--- a/tests/report_generator/integration/reference_modernization.pptx
+++ b/tests/report_generator/integration/reference_modernization.pptx
@@ -257,7 +257,7 @@
                 </a:outerShdw>
               </a:effectLst>
             </c:spPr>
-            <c:extLst xmlns:w="http://schemas.openxmlformats.org/wordprocessingml/2006/main" xmlns:w15="http://schemas.microsoft.com/office/word/2012/wordml" xmlns:w14="http://schemas.microsoft.com/office/word/2010/wordml" xmlns:m="http://schemas.openxmlformats.org/officeDocument/2006/math" xmlns:wp="http://schemas.openxmlformats.org/drawingml/2006/wordprocessingDrawing" xmlns:wp14="http://schemas.microsoft.com/office/word/2010/wordprocessingDrawing" xmlns:mc="http://schemas.openxmlformats.org/markup-compatibility/2006" xmlns:sl="http://schemas.openxmlformats.org/schemaLibrary/2006/main" xmlns:wne="http://schemas.microsoft.com/office/word/2006/wordml" xmlns:cdr="http://schemas.openxmlformats.org/drawingml/2006/chartDrawing" xmlns:c14="http://schemas.microsoft.com/office/drawing/2007/8/2/chart" xmlns:dgm="http://schemas.openxmlformats.org/drawingml/2006/diagram" xmlns:pic="http://schemas.openxmlformats.org/drawingml/2006/picture" xmlns:xdr="http://schemas.openxmlformats.org/drawingml/2006/spreadsheetDrawing" xmlns:dsp="http://schemas.microsoft.com/office/drawing/2008/diagram" xmlns:xvml="urn:schemas-microsoft-com:office:excel" xmlns:o="urn:schemas-microsoft-com:office:office" xmlns:v="urn:schemas-microsoft-com:vml" xmlns:w10="urn:schemas-microsoft-com:office:word" xmlns:pvml="urn:schemas-microsoft-com:office:powerpoint" xmlns:cppr="http://schemas.microsoft.com/office/2006/coverPageProps" xmlns:odx="http://opendope.org/xpaths" xmlns:odc="http://opendope.org/conditions" xmlns:odq="http://opendope.org/questions" xmlns:oda="http://opendope.org/answers" xmlns:odi="http://opendope.org/components" xmlns:odgm="http://opendope.org/SmartArt/DataHierarchy" xmlns:b="http://schemas.openxmlformats.org/officeDocument/2006/bibliography" xmlns:wps="http://schemas.microsoft.com/office/word/2010/wordprocessingShape" xmlns:w16se="http://schemas.microsoft.com/office/word/2015/wordml/symex" xmlns:w16cid="http://schemas.microsoft.com/office/word/2016/wordml/cid" xmlns:wetp="http://schemas.microsoft.com/office/webextensions/taskpanes/2010/11" xmlns:we="http://schemas.microsoft.com/office/webextensions/webextension/2010/11" xmlns:comp="http://schemas.openxmlformats.org/drawingml/2006/compatibility" xmlns:lc="http://schemas.openxmlformats.org/drawingml/2006/lockedCanvas">
+            <c:extLst xmlns:lc="http://schemas.openxmlformats.org/drawingml/2006/lockedCanvas" xmlns:comp="http://schemas.openxmlformats.org/drawingml/2006/compatibility" xmlns:we="http://schemas.microsoft.com/office/webextensions/webextension/2010/11" xmlns:wetp="http://schemas.microsoft.com/office/webextensions/taskpanes/2010/11" xmlns:w16cid="http://schemas.microsoft.com/office/word/2016/wordml/cid" xmlns:w16se="http://schemas.microsoft.com/office/word/2015/wordml/symex" xmlns:wps="http://schemas.microsoft.com/office/word/2010/wordprocessingShape" xmlns:b="http://schemas.openxmlformats.org/officeDocument/2006/bibliography" xmlns:odgm="http://opendope.org/SmartArt/DataHierarchy" xmlns:odi="http://opendope.org/components" xmlns:oda="http://opendope.org/answers" xmlns:odq="http://opendope.org/questions" xmlns:odc="http://opendope.org/conditions" xmlns:odx="http://opendope.org/xpaths" xmlns:cppr="http://schemas.microsoft.com/office/2006/coverPageProps" xmlns:pvml="urn:schemas-microsoft-com:office:powerpoint" xmlns:w10="urn:schemas-microsoft-com:office:word" xmlns:v="urn:schemas-microsoft-com:vml" xmlns:o="urn:schemas-microsoft-com:office:office" xmlns:xvml="urn:schemas-microsoft-com:office:excel" xmlns:dsp="http://schemas.microsoft.com/office/drawing/2008/diagram" xmlns:xdr="http://schemas.openxmlformats.org/drawingml/2006/spreadsheetDrawing" xmlns:pic="http://schemas.openxmlformats.org/drawingml/2006/picture" xmlns:dgm="http://schemas.openxmlformats.org/drawingml/2006/diagram" xmlns:c14="http://schemas.microsoft.com/office/drawing/2007/8/2/chart" xmlns:cdr="http://schemas.openxmlformats.org/drawingml/2006/chartDrawing" xmlns:wne="http://schemas.microsoft.com/office/word/2006/wordml" xmlns:sl="http://schemas.openxmlformats.org/schemaLibrary/2006/main" xmlns:mc="http://schemas.openxmlformats.org/markup-compatibility/2006" xmlns:wp14="http://schemas.microsoft.com/office/word/2010/wordprocessingDrawing" xmlns:wp="http://schemas.openxmlformats.org/drawingml/2006/wordprocessingDrawing" xmlns:m="http://schemas.openxmlformats.org/officeDocument/2006/math" xmlns:w14="http://schemas.microsoft.com/office/word/2010/wordml" xmlns:w15="http://schemas.microsoft.com/office/word/2012/wordml" xmlns:w="http://schemas.openxmlformats.org/wordprocessingml/2006/main">
               <c:ext xmlns:c16="http://schemas.microsoft.com/office/drawing/2014/chart" uri="{C3380CC4-5D6E-409C-BE32-E72D297353CC}">
                 <c16:uniqueId val="{00000001-8D46-3D4B-996A-4B880DC4E095}"/>
               </c:ext>
@@ -353,37 +353,37 @@
                   <c:v>118.73782</c:v>
                 </c:pt>
                 <c:pt idx="5">
-                  <c:v>90.589789999999994</c:v>
+                  <c:v>90.58979</c:v>
                 </c:pt>
                 <c:pt idx="6">
-                  <c:v>79.725849999999994</c:v>
+                  <c:v>79.72585</c:v>
                 </c:pt>
                 <c:pt idx="7">
-                  <c:v>70.964593343205621</c:v>
+                  <c:v>70.96459334320562</c:v>
                 </c:pt>
                 <c:pt idx="8">
-                  <c:v>69.703230000000005</c:v>
+                  <c:v>69.70323</c:v>
                 </c:pt>
                 <c:pt idx="9">
                   <c:v>56.01164</c:v>
                 </c:pt>
                 <c:pt idx="10">
-                  <c:v>39.714834660721138</c:v>
+                  <c:v>39.71483466072114</c:v>
                 </c:pt>
                 <c:pt idx="11">
-                  <c:v>34.844909999999999</c:v>
+                  <c:v>34.84491</c:v>
                 </c:pt>
                 <c:pt idx="12">
-                  <c:v>34.274880000000003</c:v>
+                  <c:v>34.27488</c:v>
                 </c:pt>
                 <c:pt idx="13">
-                  <c:v>33.210549999999998</c:v>
+                  <c:v>33.21055</c:v>
                 </c:pt>
                 <c:pt idx="14">
-                  <c:v>31.269179999999999</c:v>
+                  <c:v>31.26918</c:v>
                 </c:pt>
                 <c:pt idx="15">
-                  <c:v>30.577310000000001</c:v>
+                  <c:v>30.57731</c:v>
                 </c:pt>
                 <c:pt idx="16">
                   <c:v>28.55415</c:v>
@@ -392,15 +392,15 @@
                   <c:v>24.45168</c:v>
                 </c:pt>
                 <c:pt idx="18">
-                  <c:v>23.164843414368718</c:v>
+                  <c:v>23.16484341436872</c:v>
                 </c:pt>
                 <c:pt idx="19">
-                  <c:v>18.813199999999998</c:v>
+                  <c:v>18.8132</c:v>
                 </c:pt>
               </c:numCache>
             </c:numRef>
           </c:val>
-          <c:extLst xmlns:w="http://schemas.openxmlformats.org/wordprocessingml/2006/main" xmlns:w15="http://schemas.microsoft.com/office/word/2012/wordml" xmlns:w14="http://schemas.microsoft.com/office/word/2010/wordml" xmlns:m="http://schemas.openxmlformats.org/officeDocument/2006/math" xmlns:wp="http://schemas.openxmlformats.org/drawingml/2006/wordprocessingDrawing" xmlns:wp14="http://schemas.microsoft.com/office/word/2010/wordprocessingDrawing" xmlns:mc="http://schemas.openxmlformats.org/markup-compatibility/2006" xmlns:sl="http://schemas.openxmlformats.org/schemaLibrary/2006/main" xmlns:wne="http://schemas.microsoft.com/office/word/2006/wordml" xmlns:cdr="http://schemas.openxmlformats.org/drawingml/2006/chartDrawing" xmlns:c14="http://schemas.microsoft.com/office/drawing/2007/8/2/chart" xmlns:dgm="http://schemas.openxmlformats.org/drawingml/2006/diagram" xmlns:pic="http://schemas.openxmlformats.org/drawingml/2006/picture" xmlns:xdr="http://schemas.openxmlformats.org/drawingml/2006/spreadsheetDrawing" xmlns:dsp="http://schemas.microsoft.com/office/drawing/2008/diagram" xmlns:xvml="urn:schemas-microsoft-com:office:excel" xmlns:o="urn:schemas-microsoft-com:office:office" xmlns:v="urn:schemas-microsoft-com:vml" xmlns:w10="urn:schemas-microsoft-com:office:word" xmlns:pvml="urn:schemas-microsoft-com:office:powerpoint" xmlns:cppr="http://schemas.microsoft.com/office/2006/coverPageProps" xmlns:odx="http://opendope.org/xpaths" xmlns:odc="http://opendope.org/conditions" xmlns:odq="http://opendope.org/questions" xmlns:oda="http://opendope.org/answers" xmlns:odi="http://opendope.org/components" xmlns:odgm="http://opendope.org/SmartArt/DataHierarchy" xmlns:b="http://schemas.openxmlformats.org/officeDocument/2006/bibliography" xmlns:wps="http://schemas.microsoft.com/office/word/2010/wordprocessingShape" xmlns:w16se="http://schemas.microsoft.com/office/word/2015/wordml/symex" xmlns:w16cid="http://schemas.microsoft.com/office/word/2016/wordml/cid" xmlns:wetp="http://schemas.microsoft.com/office/webextensions/taskpanes/2010/11" xmlns:we="http://schemas.microsoft.com/office/webextensions/webextension/2010/11" xmlns:comp="http://schemas.openxmlformats.org/drawingml/2006/compatibility" xmlns:lc="http://schemas.openxmlformats.org/drawingml/2006/lockedCanvas">
+          <c:extLst xmlns:lc="http://schemas.openxmlformats.org/drawingml/2006/lockedCanvas" xmlns:comp="http://schemas.openxmlformats.org/drawingml/2006/compatibility" xmlns:we="http://schemas.microsoft.com/office/webextensions/webextension/2010/11" xmlns:wetp="http://schemas.microsoft.com/office/webextensions/taskpanes/2010/11" xmlns:w16cid="http://schemas.microsoft.com/office/word/2016/wordml/cid" xmlns:w16se="http://schemas.microsoft.com/office/word/2015/wordml/symex" xmlns:wps="http://schemas.microsoft.com/office/word/2010/wordprocessingShape" xmlns:b="http://schemas.openxmlformats.org/officeDocument/2006/bibliography" xmlns:odgm="http://opendope.org/SmartArt/DataHierarchy" xmlns:odi="http://opendope.org/components" xmlns:oda="http://opendope.org/answers" xmlns:odq="http://opendope.org/questions" xmlns:odc="http://opendope.org/conditions" xmlns:odx="http://opendope.org/xpaths" xmlns:cppr="http://schemas.microsoft.com/office/2006/coverPageProps" xmlns:pvml="urn:schemas-microsoft-com:office:powerpoint" xmlns:w10="urn:schemas-microsoft-com:office:word" xmlns:v="urn:schemas-microsoft-com:vml" xmlns:o="urn:schemas-microsoft-com:office:office" xmlns:xvml="urn:schemas-microsoft-com:office:excel" xmlns:dsp="http://schemas.microsoft.com/office/drawing/2008/diagram" xmlns:xdr="http://schemas.openxmlformats.org/drawingml/2006/spreadsheetDrawing" xmlns:pic="http://schemas.openxmlformats.org/drawingml/2006/picture" xmlns:dgm="http://schemas.openxmlformats.org/drawingml/2006/diagram" xmlns:c14="http://schemas.microsoft.com/office/drawing/2007/8/2/chart" xmlns:cdr="http://schemas.openxmlformats.org/drawingml/2006/chartDrawing" xmlns:wne="http://schemas.microsoft.com/office/word/2006/wordml" xmlns:sl="http://schemas.openxmlformats.org/schemaLibrary/2006/main" xmlns:mc="http://schemas.openxmlformats.org/markup-compatibility/2006" xmlns:wp14="http://schemas.microsoft.com/office/word/2010/wordprocessingDrawing" xmlns:wp="http://schemas.openxmlformats.org/drawingml/2006/wordprocessingDrawing" xmlns:m="http://schemas.openxmlformats.org/officeDocument/2006/math" xmlns:w14="http://schemas.microsoft.com/office/word/2010/wordml" xmlns:w15="http://schemas.microsoft.com/office/word/2012/wordml" xmlns:w="http://schemas.openxmlformats.org/wordprocessingml/2006/main">
             <c:ext xmlns:c16="http://schemas.microsoft.com/office/drawing/2014/chart" uri="{C3380CC4-5D6E-409C-BE32-E72D297353CC}">
               <c16:uniqueId val="{00000004-8D46-3D4B-996A-4B880DC4E095}"/>
             </c:ext>
@@ -505,13 +505,13 @@
                 <c:formatCode>General</c:formatCode>
                 <c:ptCount val="20"/>
                 <c:pt idx="0">
-                  <c:v>0</c:v>
+                  <c:v>0.0</c:v>
                 </c:pt>
                 <c:pt idx="1">
                   <c:v>163.50925951217985</c:v>
                 </c:pt>
                 <c:pt idx="2">
-                  <c:v>0</c:v>
+                  <c:v>0.0</c:v>
                 </c:pt>
                 <c:pt idx="3">
                   <c:v>125.69901258506576</c:v>
@@ -523,10 +523,10 @@
                   <c:v>10.386528597698714</c:v>
                 </c:pt>
                 <c:pt idx="6">
-                  <c:v>79.465384416128174</c:v>
+                  <c:v>79.46538441612817</c:v>
                 </c:pt>
                 <c:pt idx="7">
-                  <c:v>0</c:v>
+                  <c:v>0.0</c:v>
                 </c:pt>
                 <c:pt idx="8">
                   <c:v>11.918359176828517</c:v>
@@ -535,7 +535,7 @@
                   <c:v>79.59140060338413</c:v>
                 </c:pt>
                 <c:pt idx="10">
-                  <c:v>0</c:v>
+                  <c:v>0.0</c:v>
                 </c:pt>
                 <c:pt idx="11">
                   <c:v>10.294089999999962</c:v>
@@ -544,25 +544,25 @@
                   <c:v>21.230302824691023</c:v>
                 </c:pt>
                 <c:pt idx="13">
-                  <c:v>48.028939760905502</c:v>
+                  <c:v>48.0289397609055</c:v>
                 </c:pt>
                 <c:pt idx="14">
-                  <c:v>45.295292451700469</c:v>
+                  <c:v>45.29529245170047</c:v>
                 </c:pt>
                 <c:pt idx="15">
                   <c:v>42.2820233333332</c:v>
                 </c:pt>
                 <c:pt idx="16">
-                  <c:v>88.378019913123012</c:v>
+                  <c:v>88.37801991312301</c:v>
                 </c:pt>
                 <c:pt idx="17">
                   <c:v>12.3791647252819</c:v>
                 </c:pt>
                 <c:pt idx="18">
-                  <c:v>0</c:v>
+                  <c:v>0.0</c:v>
                 </c:pt>
                 <c:pt idx="19">
-                  <c:v>58.519782971294447</c:v>
+                  <c:v>58.51978297129445</c:v>
                 </c:pt>
               </c:numCache>
             </c:numRef>
@@ -700,7 +700,7 @@
     <c:plotVisOnly val="1"/>
     <c:dispBlanksAs val="gap"/>
     <c:showDLblsOverMax val="0"/>
-    <c:extLst xmlns:w="http://schemas.openxmlformats.org/wordprocessingml/2006/main" xmlns:w15="http://schemas.microsoft.com/office/word/2012/wordml" xmlns:w14="http://schemas.microsoft.com/office/word/2010/wordml" xmlns:m="http://schemas.openxmlformats.org/officeDocument/2006/math" xmlns:wp="http://schemas.openxmlformats.org/drawingml/2006/wordprocessingDrawing" xmlns:wp14="http://schemas.microsoft.com/office/word/2010/wordprocessingDrawing" xmlns:mc="http://schemas.openxmlformats.org/markup-compatibility/2006" xmlns:sl="http://schemas.openxmlformats.org/schemaLibrary/2006/main" xmlns:wne="http://schemas.microsoft.com/office/word/2006/wordml" xmlns:cdr="http://schemas.openxmlformats.org/drawingml/2006/chartDrawing" xmlns:c14="http://schemas.microsoft.com/office/drawing/2007/8/2/chart" xmlns:dgm="http://schemas.openxmlformats.org/drawingml/2006/diagram" xmlns:pic="http://schemas.openxmlformats.org/drawingml/2006/picture" xmlns:xdr="http://schemas.openxmlformats.org/drawingml/2006/spreadsheetDrawing" xmlns:dsp="http://schemas.microsoft.com/office/drawing/2008/diagram" xmlns:xvml="urn:schemas-microsoft-com:office:excel" xmlns:o="urn:schemas-microsoft-com:office:office" xmlns:v="urn:schemas-microsoft-com:vml" xmlns:w10="urn:schemas-microsoft-com:office:word" xmlns:pvml="urn:schemas-microsoft-com:office:powerpoint" xmlns:cppr="http://schemas.microsoft.com/office/2006/coverPageProps" xmlns:odx="http://opendope.org/xpaths" xmlns:odc="http://opendope.org/conditions" xmlns:odq="http://opendope.org/questions" xmlns:oda="http://opendope.org/answers" xmlns:odi="http://opendope.org/components" xmlns:odgm="http://opendope.org/SmartArt/DataHierarchy" xmlns:b="http://schemas.openxmlformats.org/officeDocument/2006/bibliography" xmlns:wps="http://schemas.microsoft.com/office/word/2010/wordprocessingShape" xmlns:w16se="http://schemas.microsoft.com/office/word/2015/wordml/symex" xmlns:w16cid="http://schemas.microsoft.com/office/word/2016/wordml/cid" xmlns:wetp="http://schemas.microsoft.com/office/webextensions/taskpanes/2010/11" xmlns:we="http://schemas.microsoft.com/office/webextensions/webextension/2010/11" xmlns:comp="http://schemas.openxmlformats.org/drawingml/2006/compatibility" xmlns:lc="http://schemas.openxmlformats.org/drawingml/2006/lockedCanvas">
+    <c:extLst xmlns:lc="http://schemas.openxmlformats.org/drawingml/2006/lockedCanvas" xmlns:comp="http://schemas.openxmlformats.org/drawingml/2006/compatibility" xmlns:we="http://schemas.microsoft.com/office/webextensions/webextension/2010/11" xmlns:wetp="http://schemas.microsoft.com/office/webextensions/taskpanes/2010/11" xmlns:w16cid="http://schemas.microsoft.com/office/word/2016/wordml/cid" xmlns:w16se="http://schemas.microsoft.com/office/word/2015/wordml/symex" xmlns:wps="http://schemas.microsoft.com/office/word/2010/wordprocessingShape" xmlns:b="http://schemas.openxmlformats.org/officeDocument/2006/bibliography" xmlns:odgm="http://opendope.org/SmartArt/DataHierarchy" xmlns:odi="http://opendope.org/components" xmlns:oda="http://opendope.org/answers" xmlns:odq="http://opendope.org/questions" xmlns:odc="http://opendope.org/conditions" xmlns:odx="http://opendope.org/xpaths" xmlns:cppr="http://schemas.microsoft.com/office/2006/coverPageProps" xmlns:pvml="urn:schemas-microsoft-com:office:powerpoint" xmlns:w10="urn:schemas-microsoft-com:office:word" xmlns:v="urn:schemas-microsoft-com:vml" xmlns:o="urn:schemas-microsoft-com:office:office" xmlns:xvml="urn:schemas-microsoft-com:office:excel" xmlns:dsp="http://schemas.microsoft.com/office/drawing/2008/diagram" xmlns:xdr="http://schemas.openxmlformats.org/drawingml/2006/spreadsheetDrawing" xmlns:pic="http://schemas.openxmlformats.org/drawingml/2006/picture" xmlns:dgm="http://schemas.openxmlformats.org/drawingml/2006/diagram" xmlns:c14="http://schemas.microsoft.com/office/drawing/2007/8/2/chart" xmlns:cdr="http://schemas.openxmlformats.org/drawingml/2006/chartDrawing" xmlns:wne="http://schemas.microsoft.com/office/word/2006/wordml" xmlns:sl="http://schemas.openxmlformats.org/schemaLibrary/2006/main" xmlns:mc="http://schemas.openxmlformats.org/markup-compatibility/2006" xmlns:wp14="http://schemas.microsoft.com/office/word/2010/wordprocessingDrawing" xmlns:wp="http://schemas.openxmlformats.org/drawingml/2006/wordprocessingDrawing" xmlns:m="http://schemas.openxmlformats.org/officeDocument/2006/math" xmlns:w14="http://schemas.microsoft.com/office/word/2010/wordml" xmlns:w15="http://schemas.microsoft.com/office/word/2012/wordml" xmlns:w="http://schemas.openxmlformats.org/wordprocessingml/2006/main">
       <c:ext xmlns:c16r3="http://schemas.microsoft.com/office/drawing/2017/03/chart" uri="{56B9EC1D-385E-4148-901F-78D8002777C0}">
         <c16r3:dataDisplayOptions16>
           <c16r3:dispNaAsBlank val="1"/>
@@ -2182,7 +2182,7 @@
           <a:p>
             <a:fld id="{C1255C68-584F-174D-BB81-51BF91708794}" type="datetimeFigureOut">
               <a:rPr lang="en-US" smtClean="0"/>
-              <a:t>3/12/26</a:t>
+              <a:t>1/29/26</a:t>
             </a:fld>
             <a:endParaRPr lang="en-US"/>
           </a:p>
@@ -2359,7 +2359,7 @@
           <a:p>
             <a:fld id="{A1EDAAC4-819D-C544-9EA1-C73624CFD70B}" type="datetimeFigureOut">
               <a:rPr lang="en-US" smtClean="0"/>
-              <a:t>3/12/26</a:t>
+              <a:t>1/29/26</a:t>
             </a:fld>
             <a:endParaRPr lang="en-US"/>
           </a:p>
@@ -11480,12 +11480,12 @@
             <p:nvPr userDrawn="1"/>
           </p:nvPicPr>
           <p:blipFill>
-            <a:blip>
+            <a:blip r:embed="rId2">
               <a:lum bright="100000"/>
               <a:alphaModFix amt="80000"/>
               <a:extLst>
                 <a:ext uri="{96DAC541-7B7A-43D3-8B79-37D633B846F1}">
-                  <asvg:svgBlip xmlns:asvg="http://schemas.microsoft.com/office/drawing/2016/SVG/main" r:embed="rId2"/>
+                  <asvg:svgBlip xmlns:asvg="http://schemas.microsoft.com/office/drawing/2016/SVG/main" r:embed="rId3"/>
                 </a:ext>
               </a:extLst>
             </a:blip>
@@ -11597,12 +11597,12 @@
             <p:nvPr userDrawn="1"/>
           </p:nvPicPr>
           <p:blipFill>
-            <a:blip>
+            <a:blip r:embed="rId4">
               <a:lum bright="100000"/>
               <a:alphaModFix amt="80000"/>
               <a:extLst>
                 <a:ext uri="{96DAC541-7B7A-43D3-8B79-37D633B846F1}">
-                  <asvg:svgBlip xmlns:asvg="http://schemas.microsoft.com/office/drawing/2016/SVG/main" r:embed="rId3"/>
+                  <asvg:svgBlip xmlns:asvg="http://schemas.microsoft.com/office/drawing/2016/SVG/main" r:embed="rId5"/>
                 </a:ext>
               </a:extLst>
             </a:blip>
@@ -11714,12 +11714,12 @@
             <p:nvPr userDrawn="1"/>
           </p:nvPicPr>
           <p:blipFill>
-            <a:blip>
+            <a:blip r:embed="rId6">
               <a:lum bright="100000"/>
               <a:alphaModFix amt="80000"/>
               <a:extLst>
                 <a:ext uri="{96DAC541-7B7A-43D3-8B79-37D633B846F1}">
-                  <asvg:svgBlip xmlns:asvg="http://schemas.microsoft.com/office/drawing/2016/SVG/main" r:embed="rId4"/>
+                  <asvg:svgBlip xmlns:asvg="http://schemas.microsoft.com/office/drawing/2016/SVG/main" r:embed="rId7"/>
                 </a:ext>
               </a:extLst>
             </a:blip>
@@ -11820,12 +11820,12 @@
             <p:nvPr userDrawn="1"/>
           </p:nvPicPr>
           <p:blipFill>
-            <a:blip>
+            <a:blip r:embed="rId8">
               <a:lum bright="100000"/>
               <a:alphaModFix amt="80000"/>
               <a:extLst>
                 <a:ext uri="{96DAC541-7B7A-43D3-8B79-37D633B846F1}">
-                  <asvg:svgBlip xmlns:asvg="http://schemas.microsoft.com/office/drawing/2016/SVG/main" r:embed="rId5"/>
+                  <asvg:svgBlip xmlns:asvg="http://schemas.microsoft.com/office/drawing/2016/SVG/main" r:embed="rId9"/>
                 </a:ext>
               </a:extLst>
             </a:blip>
@@ -11948,12 +11948,12 @@
             <p:nvPr userDrawn="1"/>
           </p:nvPicPr>
           <p:blipFill>
-            <a:blip>
+            <a:blip r:embed="rId10">
               <a:lum bright="100000"/>
               <a:alphaModFix amt="80000"/>
               <a:extLst>
                 <a:ext uri="{96DAC541-7B7A-43D3-8B79-37D633B846F1}">
-                  <asvg:svgBlip xmlns:asvg="http://schemas.microsoft.com/office/drawing/2016/SVG/main" r:embed="rId6"/>
+                  <asvg:svgBlip xmlns:asvg="http://schemas.microsoft.com/office/drawing/2016/SVG/main" r:embed="rId11"/>
                 </a:ext>
               </a:extLst>
             </a:blip>
@@ -12054,12 +12054,12 @@
             <p:nvPr userDrawn="1"/>
           </p:nvPicPr>
           <p:blipFill>
-            <a:blip>
+            <a:blip r:embed="rId12">
               <a:lum bright="100000"/>
               <a:alphaModFix amt="80000"/>
               <a:extLst>
                 <a:ext uri="{96DAC541-7B7A-43D3-8B79-37D633B846F1}">
-                  <asvg:svgBlip xmlns:asvg="http://schemas.microsoft.com/office/drawing/2016/SVG/main" r:embed="rId7"/>
+                  <asvg:svgBlip xmlns:asvg="http://schemas.microsoft.com/office/drawing/2016/SVG/main" r:embed="rId13"/>
                 </a:ext>
               </a:extLst>
             </a:blip>
@@ -22756,6 +22756,7 @@
               <a:rPr lang="en-US" dirty="0"/>
               <a:t>Software Quality report on Opendemo</a:t>
             </a:r>
+            <a:endParaRPr lang="en-US" dirty="0"/>
           </a:p>
         </p:txBody>
       </p:sp>
@@ -31628,10 +31629,10 @@
               <p:nvPr/>
             </p:nvPicPr>
             <p:blipFill>
-              <a:blip>
+              <a:blip r:embed="rId2">
                 <a:extLst>
                   <a:ext uri="{96DAC541-7B7A-43D3-8B79-37D633B846F1}">
-                    <asvg:svgBlip xmlns:asvg="http://schemas.microsoft.com/office/drawing/2016/SVG/main" r:embed="rId2"/>
+                    <asvg:svgBlip xmlns:asvg="http://schemas.microsoft.com/office/drawing/2016/SVG/main" r:embed="rId3"/>
                   </a:ext>
                 </a:extLst>
               </a:blip>
@@ -31969,10 +31970,10 @@
               <p:nvPr/>
             </p:nvPicPr>
             <p:blipFill>
-              <a:blip>
+              <a:blip r:embed="rId4">
                 <a:extLst>
                   <a:ext uri="{96DAC541-7B7A-43D3-8B79-37D633B846F1}">
-                    <asvg:svgBlip xmlns:asvg="http://schemas.microsoft.com/office/drawing/2016/SVG/main" r:embed="rId3"/>
+                    <asvg:svgBlip xmlns:asvg="http://schemas.microsoft.com/office/drawing/2016/SVG/main" r:embed="rId5"/>
                   </a:ext>
                 </a:extLst>
               </a:blip>
@@ -32621,7 +32622,7 @@
         </p:nvGraphicFramePr>
         <p:xfrm>
           <a:off x="937766" y="1466791"/>
-          <a:ext cx="10316468" cy="4540320"/>
+          <a:ext cx="10316468" cy="17341920"/>
         </p:xfrm>
         <a:graphic>
           <a:graphicData uri="http://schemas.openxmlformats.org/drawingml/2006/table">
@@ -39620,6 +39621,55 @@
               <a:rPr lang="en-US"/>
               <a:t>Systems with the most technical debt</a:t>
             </a:r>
+          </a:p>
+        </p:txBody>
+      </p:sp>
+      <p:sp>
+        <p:nvSpPr>
+          <p:cNvPr id="6" name="TextBox 5">
+            <a:extLst>
+              <a:ext uri="{FF2B5EF4-FFF2-40B4-BE49-F238E27FC236}">
+                <a16:creationId xmlns:a16="http://schemas.microsoft.com/office/drawing/2014/main" id="{777043DA-728E-44E3-4252-8FC6DEA66304}"/>
+              </a:ext>
+            </a:extLst>
+          </p:cNvPr>
+          <p:cNvSpPr txBox="1"/>
+          <p:nvPr/>
+        </p:nvSpPr>
+        <p:spPr>
+          <a:xfrm>
+            <a:off x="10058400" y="-373182"/>
+            <a:ext cx="3177686" cy="355162"/>
+          </a:xfrm>
+          <a:prstGeom prst="rect">
+            <a:avLst/>
+          </a:prstGeom>
+          <a:noFill/>
+        </p:spPr>
+        <p:txBody>
+          <a:bodyPr wrap="none" lIns="90000" rtlCol="0" anchor="t">
+            <a:spAutoFit/>
+          </a:bodyPr>
+          <a:lstStyle/>
+          <a:p>
+            <a:pPr algn="l">
+              <a:lnSpc>
+                <a:spcPct val="113000"/>
+              </a:lnSpc>
+            </a:pPr>
+            <a:r>
+              <a:rPr lang="en-US" sz="1600" dirty="0" err="1">
+                <a:solidFill>
+                  <a:schemeClr val="tx2"/>
+                </a:solidFill>
+              </a:rPr>
+              <a:t>TECHNICAL_DEBT_SYSTEMS_CHART</a:t>
+            </a:r>
+            <a:endParaRPr lang="en-US" sz="1600" dirty="0">
+              <a:solidFill>
+                <a:schemeClr val="tx2"/>
+              </a:solidFill>
+            </a:endParaRPr>
           </a:p>
         </p:txBody>
       </p:sp>
@@ -41255,6 +41305,26 @@
 </file>
 
 <file path=customXml/item1.xml><?xml version="1.0" encoding="utf-8"?>
+<p:properties xmlns:p="http://schemas.microsoft.com/office/2006/metadata/properties" xmlns:xsi="http://www.w3.org/2001/XMLSchema-instance" xmlns:pc="http://schemas.microsoft.com/office/infopath/2007/PartnerControls">
+  <documentManagement>
+    <lcf76f155ced4ddcb4097134ff3c332f xmlns="fa937df2-abe2-4d38-b5f4-c228acba3827">
+      <Terms xmlns="http://schemas.microsoft.com/office/infopath/2007/PartnerControls"/>
+    </lcf76f155ced4ddcb4097134ff3c332f>
+    <TaxCatchAll xmlns="bc8ba18a-4a58-4ad2-bfc0-6516af8e7dc2" xsi:nil="true"/>
+  </documentManagement>
+</p:properties>
+</file>
+
+<file path=customXml/item2.xml><?xml version="1.0" encoding="utf-8"?>
+<?mso-contentType ?>
+<FormTemplates xmlns="http://schemas.microsoft.com/sharepoint/v3/contenttype/forms">
+  <Display>DocumentLibraryForm</Display>
+  <Edit>DocumentLibraryForm</Edit>
+  <New>DocumentLibraryForm</New>
+</FormTemplates>
+</file>
+
+<file path=customXml/item3.xml><?xml version="1.0" encoding="utf-8"?>
 <ct:contentTypeSchema xmlns:ct="http://schemas.microsoft.com/office/2006/metadata/contentType" xmlns:ma="http://schemas.microsoft.com/office/2006/metadata/properties/metaAttributes" ct:_="" ma:_="" ma:contentTypeName="Document" ma:contentTypeID="0x010100398B4EB28540854BB4092730D7F67224" ma:contentTypeVersion="13" ma:contentTypeDescription="Create a new document." ma:contentTypeScope="" ma:versionID="07d6997c7358ecc3b6f0d78039f1ac55">
   <xsd:schema xmlns:xsd="http://www.w3.org/2001/XMLSchema" xmlns:xs="http://www.w3.org/2001/XMLSchema" xmlns:p="http://schemas.microsoft.com/office/2006/metadata/properties" xmlns:ns2="fa937df2-abe2-4d38-b5f4-c228acba3827" xmlns:ns3="bc8ba18a-4a58-4ad2-bfc0-6516af8e7dc2" targetNamespace="http://schemas.microsoft.com/office/2006/metadata/properties" ma:root="true" ma:fieldsID="a7d20d2c9a349b6838acf4b79389f2fd" ns2:_="" ns3:_="">
     <xsd:import namespace="fa937df2-abe2-4d38-b5f4-c228acba3827"/>
@@ -41477,27 +41547,32 @@
 </ct:contentTypeSchema>
 </file>
 
-<file path=customXml/item2.xml><?xml version="1.0" encoding="utf-8"?>
-<?mso-contentType ?>
-<FormTemplates xmlns="http://schemas.microsoft.com/sharepoint/v3/contenttype/forms">
-  <Display>DocumentLibraryForm</Display>
-  <Edit>DocumentLibraryForm</Edit>
-  <New>DocumentLibraryForm</New>
-</FormTemplates>
+<file path=customXml/itemProps1.xml><?xml version="1.0" encoding="utf-8"?>
+<ds:datastoreItem xmlns:ds="http://schemas.openxmlformats.org/officeDocument/2006/customXml" ds:itemID="{4B629362-CF15-4610-8FAC-A8E699942233}">
+  <ds:schemaRefs>
+    <ds:schemaRef ds:uri="http://schemas.microsoft.com/office/2006/documentManagement/types"/>
+    <ds:schemaRef ds:uri="http://purl.org/dc/elements/1.1/"/>
+    <ds:schemaRef ds:uri="bc8ba18a-4a58-4ad2-bfc0-6516af8e7dc2"/>
+    <ds:schemaRef ds:uri="http://purl.org/dc/terms/"/>
+    <ds:schemaRef ds:uri="http://www.w3.org/XML/1998/namespace"/>
+    <ds:schemaRef ds:uri="http://schemas.microsoft.com/office/2006/metadata/properties"/>
+    <ds:schemaRef ds:uri="http://schemas.microsoft.com/office/infopath/2007/PartnerControls"/>
+    <ds:schemaRef ds:uri="http://schemas.openxmlformats.org/package/2006/metadata/core-properties"/>
+    <ds:schemaRef ds:uri="fa937df2-abe2-4d38-b5f4-c228acba3827"/>
+    <ds:schemaRef ds:uri="http://purl.org/dc/dcmitype/"/>
+  </ds:schemaRefs>
+</ds:datastoreItem>
 </file>
 
-<file path=customXml/item3.xml><?xml version="1.0" encoding="utf-8"?>
-<p:properties xmlns:p="http://schemas.microsoft.com/office/2006/metadata/properties" xmlns:xsi="http://www.w3.org/2001/XMLSchema-instance" xmlns:pc="http://schemas.microsoft.com/office/infopath/2007/PartnerControls">
-  <documentManagement>
-    <lcf76f155ced4ddcb4097134ff3c332f xmlns="fa937df2-abe2-4d38-b5f4-c228acba3827">
-      <Terms xmlns="http://schemas.microsoft.com/office/infopath/2007/PartnerControls"/>
-    </lcf76f155ced4ddcb4097134ff3c332f>
-    <TaxCatchAll xmlns="bc8ba18a-4a58-4ad2-bfc0-6516af8e7dc2" xsi:nil="true"/>
-  </documentManagement>
-</p:properties>
+<file path=customXml/itemProps2.xml><?xml version="1.0" encoding="utf-8"?>
+<ds:datastoreItem xmlns:ds="http://schemas.openxmlformats.org/officeDocument/2006/customXml" ds:itemID="{570928F0-D7CA-4732-B7F3-1F945720D0AA}">
+  <ds:schemaRefs>
+    <ds:schemaRef ds:uri="http://schemas.microsoft.com/sharepoint/v3/contenttype/forms"/>
+  </ds:schemaRefs>
+</ds:datastoreItem>
 </file>
 
-<file path=customXml/itemProps1.xml><?xml version="1.0" encoding="utf-8"?>
+<file path=customXml/itemProps3.xml><?xml version="1.0" encoding="utf-8"?>
 <ds:datastoreItem xmlns:ds="http://schemas.openxmlformats.org/officeDocument/2006/customXml" ds:itemID="{06E6923A-C221-4753-B75B-BA213EEB7564}">
   <ds:schemaRefs>
     <ds:schemaRef ds:uri="bc8ba18a-4a58-4ad2-bfc0-6516af8e7dc2"/>
@@ -41514,29 +41589,4 @@
     <ds:schemaRef ds:uri="http://www.w3.org/2001/XMLSchema"/>
   </ds:schemaRefs>
 </ds:datastoreItem>
-</file>
-
-<file path=customXml/itemProps2.xml><?xml version="1.0" encoding="utf-8"?>
-<ds:datastoreItem xmlns:ds="http://schemas.openxmlformats.org/officeDocument/2006/customXml" ds:itemID="{570928F0-D7CA-4732-B7F3-1F945720D0AA}">
-  <ds:schemaRefs>
-    <ds:schemaRef ds:uri="http://schemas.microsoft.com/sharepoint/v3/contenttype/forms"/>
-  </ds:schemaRefs>
-</ds:datastoreItem>
-</file>
-
-<file path=customXml/itemProps3.xml><?xml version="1.0" encoding="utf-8"?>
-<ds:datastoreItem xmlns:ds="http://schemas.openxmlformats.org/officeDocument/2006/customXml" ds:itemID="{4B629362-CF15-4610-8FAC-A8E699942233}">
-  <ds:schemaRefs>
-    <ds:schemaRef ds:uri="http://schemas.microsoft.com/office/2006/documentManagement/types"/>
-    <ds:schemaRef ds:uri="http://purl.org/dc/elements/1.1/"/>
-    <ds:schemaRef ds:uri="bc8ba18a-4a58-4ad2-bfc0-6516af8e7dc2"/>
-    <ds:schemaRef ds:uri="http://purl.org/dc/terms/"/>
-    <ds:schemaRef ds:uri="http://www.w3.org/XML/1998/namespace"/>
-    <ds:schemaRef ds:uri="http://schemas.microsoft.com/office/2006/metadata/properties"/>
-    <ds:schemaRef ds:uri="http://schemas.microsoft.com/office/infopath/2007/PartnerControls"/>
-    <ds:schemaRef ds:uri="http://schemas.openxmlformats.org/package/2006/metadata/core-properties"/>
-    <ds:schemaRef ds:uri="fa937df2-abe2-4d38-b5f4-c228acba3827"/>
-    <ds:schemaRef ds:uri="http://purl.org/dc/dcmitype/"/>
-  </ds:schemaRefs>
-</ds:datastoreItem>
 </file>
--- a/tests/report_generator/integration/reference_modernization.pptx
+++ b/tests/report_generator/integration/reference_modernization.pptx
@@ -257,7 +257,7 @@
                 </a:outerShdw>
               </a:effectLst>
             </c:spPr>
-            <c:extLst xmlns:lc="http://schemas.openxmlformats.org/drawingml/2006/lockedCanvas" xmlns:comp="http://schemas.openxmlformats.org/drawingml/2006/compatibility" xmlns:we="http://schemas.microsoft.com/office/webextensions/webextension/2010/11" xmlns:wetp="http://schemas.microsoft.com/office/webextensions/taskpanes/2010/11" xmlns:w16cid="http://schemas.microsoft.com/office/word/2016/wordml/cid" xmlns:w16se="http://schemas.microsoft.com/office/word/2015/wordml/symex" xmlns:wps="http://schemas.microsoft.com/office/word/2010/wordprocessingShape" xmlns:b="http://schemas.openxmlformats.org/officeDocument/2006/bibliography" xmlns:odgm="http://opendope.org/SmartArt/DataHierarchy" xmlns:odi="http://opendope.org/components" xmlns:oda="http://opendope.org/answers" xmlns:odq="http://opendope.org/questions" xmlns:odc="http://opendope.org/conditions" xmlns:odx="http://opendope.org/xpaths" xmlns:cppr="http://schemas.microsoft.com/office/2006/coverPageProps" xmlns:pvml="urn:schemas-microsoft-com:office:powerpoint" xmlns:w10="urn:schemas-microsoft-com:office:word" xmlns:v="urn:schemas-microsoft-com:vml" xmlns:o="urn:schemas-microsoft-com:office:office" xmlns:xvml="urn:schemas-microsoft-com:office:excel" xmlns:dsp="http://schemas.microsoft.com/office/drawing/2008/diagram" xmlns:xdr="http://schemas.openxmlformats.org/drawingml/2006/spreadsheetDrawing" xmlns:pic="http://schemas.openxmlformats.org/drawingml/2006/picture" xmlns:dgm="http://schemas.openxmlformats.org/drawingml/2006/diagram" xmlns:c14="http://schemas.microsoft.com/office/drawing/2007/8/2/chart" xmlns:cdr="http://schemas.openxmlformats.org/drawingml/2006/chartDrawing" xmlns:wne="http://schemas.microsoft.com/office/word/2006/wordml" xmlns:sl="http://schemas.openxmlformats.org/schemaLibrary/2006/main" xmlns:mc="http://schemas.openxmlformats.org/markup-compatibility/2006" xmlns:wp14="http://schemas.microsoft.com/office/word/2010/wordprocessingDrawing" xmlns:wp="http://schemas.openxmlformats.org/drawingml/2006/wordprocessingDrawing" xmlns:m="http://schemas.openxmlformats.org/officeDocument/2006/math" xmlns:w14="http://schemas.microsoft.com/office/word/2010/wordml" xmlns:w15="http://schemas.microsoft.com/office/word/2012/wordml" xmlns:w="http://schemas.openxmlformats.org/wordprocessingml/2006/main">
+            <c:extLst xmlns:w="http://schemas.openxmlformats.org/wordprocessingml/2006/main" xmlns:w15="http://schemas.microsoft.com/office/word/2012/wordml" xmlns:w14="http://schemas.microsoft.com/office/word/2010/wordml" xmlns:m="http://schemas.openxmlformats.org/officeDocument/2006/math" xmlns:wp="http://schemas.openxmlformats.org/drawingml/2006/wordprocessingDrawing" xmlns:wp14="http://schemas.microsoft.com/office/word/2010/wordprocessingDrawing" xmlns:mc="http://schemas.openxmlformats.org/markup-compatibility/2006" xmlns:sl="http://schemas.openxmlformats.org/schemaLibrary/2006/main" xmlns:wne="http://schemas.microsoft.com/office/word/2006/wordml" xmlns:cdr="http://schemas.openxmlformats.org/drawingml/2006/chartDrawing" xmlns:c14="http://schemas.microsoft.com/office/drawing/2007/8/2/chart" xmlns:dgm="http://schemas.openxmlformats.org/drawingml/2006/diagram" xmlns:pic="http://schemas.openxmlformats.org/drawingml/2006/picture" xmlns:xdr="http://schemas.openxmlformats.org/drawingml/2006/spreadsheetDrawing" xmlns:dsp="http://schemas.microsoft.com/office/drawing/2008/diagram" xmlns:xvml="urn:schemas-microsoft-com:office:excel" xmlns:o="urn:schemas-microsoft-com:office:office" xmlns:v="urn:schemas-microsoft-com:vml" xmlns:w10="urn:schemas-microsoft-com:office:word" xmlns:pvml="urn:schemas-microsoft-com:office:powerpoint" xmlns:cppr="http://schemas.microsoft.com/office/2006/coverPageProps" xmlns:odx="http://opendope.org/xpaths" xmlns:odc="http://opendope.org/conditions" xmlns:odq="http://opendope.org/questions" xmlns:oda="http://opendope.org/answers" xmlns:odi="http://opendope.org/components" xmlns:odgm="http://opendope.org/SmartArt/DataHierarchy" xmlns:b="http://schemas.openxmlformats.org/officeDocument/2006/bibliography" xmlns:wps="http://schemas.microsoft.com/office/word/2010/wordprocessingShape" xmlns:w16se="http://schemas.microsoft.com/office/word/2015/wordml/symex" xmlns:w16cid="http://schemas.microsoft.com/office/word/2016/wordml/cid" xmlns:wetp="http://schemas.microsoft.com/office/webextensions/taskpanes/2010/11" xmlns:we="http://schemas.microsoft.com/office/webextensions/webextension/2010/11" xmlns:comp="http://schemas.openxmlformats.org/drawingml/2006/compatibility" xmlns:lc="http://schemas.openxmlformats.org/drawingml/2006/lockedCanvas">
               <c:ext xmlns:c16="http://schemas.microsoft.com/office/drawing/2014/chart" uri="{C3380CC4-5D6E-409C-BE32-E72D297353CC}">
                 <c16:uniqueId val="{00000001-8D46-3D4B-996A-4B880DC4E095}"/>
               </c:ext>
@@ -353,37 +353,37 @@
                   <c:v>118.73782</c:v>
                 </c:pt>
                 <c:pt idx="5">
-                  <c:v>90.58979</c:v>
+                  <c:v>90.589789999999994</c:v>
                 </c:pt>
                 <c:pt idx="6">
-                  <c:v>79.72585</c:v>
+                  <c:v>79.725849999999994</c:v>
                 </c:pt>
                 <c:pt idx="7">
-                  <c:v>70.96459334320562</c:v>
+                  <c:v>70.964593343205621</c:v>
                 </c:pt>
                 <c:pt idx="8">
-                  <c:v>69.70323</c:v>
+                  <c:v>69.703230000000005</c:v>
                 </c:pt>
                 <c:pt idx="9">
                   <c:v>56.01164</c:v>
                 </c:pt>
                 <c:pt idx="10">
-                  <c:v>39.71483466072114</c:v>
+                  <c:v>39.714834660721138</c:v>
                 </c:pt>
                 <c:pt idx="11">
-                  <c:v>34.84491</c:v>
+                  <c:v>34.844909999999999</c:v>
                 </c:pt>
                 <c:pt idx="12">
-                  <c:v>34.27488</c:v>
+                  <c:v>34.274880000000003</c:v>
                 </c:pt>
                 <c:pt idx="13">
-                  <c:v>33.21055</c:v>
+                  <c:v>33.210549999999998</c:v>
                 </c:pt>
                 <c:pt idx="14">
-                  <c:v>31.26918</c:v>
+                  <c:v>31.269179999999999</c:v>
                 </c:pt>
                 <c:pt idx="15">
-                  <c:v>30.57731</c:v>
+                  <c:v>30.577310000000001</c:v>
                 </c:pt>
                 <c:pt idx="16">
                   <c:v>28.55415</c:v>
@@ -392,15 +392,15 @@
                   <c:v>24.45168</c:v>
                 </c:pt>
                 <c:pt idx="18">
-                  <c:v>23.16484341436872</c:v>
+                  <c:v>23.164843414368718</c:v>
                 </c:pt>
                 <c:pt idx="19">
-                  <c:v>18.8132</c:v>
+                  <c:v>18.813199999999998</c:v>
                 </c:pt>
               </c:numCache>
             </c:numRef>
           </c:val>
-          <c:extLst xmlns:lc="http://schemas.openxmlformats.org/drawingml/2006/lockedCanvas" xmlns:comp="http://schemas.openxmlformats.org/drawingml/2006/compatibility" xmlns:we="http://schemas.microsoft.com/office/webextensions/webextension/2010/11" xmlns:wetp="http://schemas.microsoft.com/office/webextensions/taskpanes/2010/11" xmlns:w16cid="http://schemas.microsoft.com/office/word/2016/wordml/cid" xmlns:w16se="http://schemas.microsoft.com/office/word/2015/wordml/symex" xmlns:wps="http://schemas.microsoft.com/office/word/2010/wordprocessingShape" xmlns:b="http://schemas.openxmlformats.org/officeDocument/2006/bibliography" xmlns:odgm="http://opendope.org/SmartArt/DataHierarchy" xmlns:odi="http://opendope.org/components" xmlns:oda="http://opendope.org/answers" xmlns:odq="http://opendope.org/questions" xmlns:odc="http://opendope.org/conditions" xmlns:odx="http://opendope.org/xpaths" xmlns:cppr="http://schemas.microsoft.com/office/2006/coverPageProps" xmlns:pvml="urn:schemas-microsoft-com:office:powerpoint" xmlns:w10="urn:schemas-microsoft-com:office:word" xmlns:v="urn:schemas-microsoft-com:vml" xmlns:o="urn:schemas-microsoft-com:office:office" xmlns:xvml="urn:schemas-microsoft-com:office:excel" xmlns:dsp="http://schemas.microsoft.com/office/drawing/2008/diagram" xmlns:xdr="http://schemas.openxmlformats.org/drawingml/2006/spreadsheetDrawing" xmlns:pic="http://schemas.openxmlformats.org/drawingml/2006/picture" xmlns:dgm="http://schemas.openxmlformats.org/drawingml/2006/diagram" xmlns:c14="http://schemas.microsoft.com/office/drawing/2007/8/2/chart" xmlns:cdr="http://schemas.openxmlformats.org/drawingml/2006/chartDrawing" xmlns:wne="http://schemas.microsoft.com/office/word/2006/wordml" xmlns:sl="http://schemas.openxmlformats.org/schemaLibrary/2006/main" xmlns:mc="http://schemas.openxmlformats.org/markup-compatibility/2006" xmlns:wp14="http://schemas.microsoft.com/office/word/2010/wordprocessingDrawing" xmlns:wp="http://schemas.openxmlformats.org/drawingml/2006/wordprocessingDrawing" xmlns:m="http://schemas.openxmlformats.org/officeDocument/2006/math" xmlns:w14="http://schemas.microsoft.com/office/word/2010/wordml" xmlns:w15="http://schemas.microsoft.com/office/word/2012/wordml" xmlns:w="http://schemas.openxmlformats.org/wordprocessingml/2006/main">
+          <c:extLst xmlns:w="http://schemas.openxmlformats.org/wordprocessingml/2006/main" xmlns:w15="http://schemas.microsoft.com/office/word/2012/wordml" xmlns:w14="http://schemas.microsoft.com/office/word/2010/wordml" xmlns:m="http://schemas.openxmlformats.org/officeDocument/2006/math" xmlns:wp="http://schemas.openxmlformats.org/drawingml/2006/wordprocessingDrawing" xmlns:wp14="http://schemas.microsoft.com/office/word/2010/wordprocessingDrawing" xmlns:mc="http://schemas.openxmlformats.org/markup-compatibility/2006" xmlns:sl="http://schemas.openxmlformats.org/schemaLibrary/2006/main" xmlns:wne="http://schemas.microsoft.com/office/word/2006/wordml" xmlns:cdr="http://schemas.openxmlformats.org/drawingml/2006/chartDrawing" xmlns:c14="http://schemas.microsoft.com/office/drawing/2007/8/2/chart" xmlns:dgm="http://schemas.openxmlformats.org/drawingml/2006/diagram" xmlns:pic="http://schemas.openxmlformats.org/drawingml/2006/picture" xmlns:xdr="http://schemas.openxmlformats.org/drawingml/2006/spreadsheetDrawing" xmlns:dsp="http://schemas.microsoft.com/office/drawing/2008/diagram" xmlns:xvml="urn:schemas-microsoft-com:office:excel" xmlns:o="urn:schemas-microsoft-com:office:office" xmlns:v="urn:schemas-microsoft-com:vml" xmlns:w10="urn:schemas-microsoft-com:office:word" xmlns:pvml="urn:schemas-microsoft-com:office:powerpoint" xmlns:cppr="http://schemas.microsoft.com/office/2006/coverPageProps" xmlns:odx="http://opendope.org/xpaths" xmlns:odc="http://opendope.org/conditions" xmlns:odq="http://opendope.org/questions" xmlns:oda="http://opendope.org/answers" xmlns:odi="http://opendope.org/components" xmlns:odgm="http://opendope.org/SmartArt/DataHierarchy" xmlns:b="http://schemas.openxmlformats.org/officeDocument/2006/bibliography" xmlns:wps="http://schemas.microsoft.com/office/word/2010/wordprocessingShape" xmlns:w16se="http://schemas.microsoft.com/office/word/2015/wordml/symex" xmlns:w16cid="http://schemas.microsoft.com/office/word/2016/wordml/cid" xmlns:wetp="http://schemas.microsoft.com/office/webextensions/taskpanes/2010/11" xmlns:we="http://schemas.microsoft.com/office/webextensions/webextension/2010/11" xmlns:comp="http://schemas.openxmlformats.org/drawingml/2006/compatibility" xmlns:lc="http://schemas.openxmlformats.org/drawingml/2006/lockedCanvas">
             <c:ext xmlns:c16="http://schemas.microsoft.com/office/drawing/2014/chart" uri="{C3380CC4-5D6E-409C-BE32-E72D297353CC}">
               <c16:uniqueId val="{00000004-8D46-3D4B-996A-4B880DC4E095}"/>
             </c:ext>
@@ -505,13 +505,13 @@
                 <c:formatCode>General</c:formatCode>
                 <c:ptCount val="20"/>
                 <c:pt idx="0">
-                  <c:v>0.0</c:v>
+                  <c:v>0</c:v>
                 </c:pt>
                 <c:pt idx="1">
                   <c:v>163.50925951217985</c:v>
                 </c:pt>
                 <c:pt idx="2">
-                  <c:v>0.0</c:v>
+                  <c:v>0</c:v>
                 </c:pt>
                 <c:pt idx="3">
                   <c:v>125.69901258506576</c:v>
@@ -523,10 +523,10 @@
                   <c:v>10.386528597698714</c:v>
                 </c:pt>
                 <c:pt idx="6">
-                  <c:v>79.46538441612817</c:v>
+                  <c:v>79.465384416128174</c:v>
                 </c:pt>
                 <c:pt idx="7">
-                  <c:v>0.0</c:v>
+                  <c:v>0</c:v>
                 </c:pt>
                 <c:pt idx="8">
                   <c:v>11.918359176828517</c:v>
@@ -535,7 +535,7 @@
                   <c:v>79.59140060338413</c:v>
                 </c:pt>
                 <c:pt idx="10">
-                  <c:v>0.0</c:v>
+                  <c:v>0</c:v>
                 </c:pt>
                 <c:pt idx="11">
                   <c:v>10.294089999999962</c:v>
@@ -544,25 +544,25 @@
                   <c:v>21.230302824691023</c:v>
                 </c:pt>
                 <c:pt idx="13">
-                  <c:v>48.0289397609055</c:v>
+                  <c:v>48.028939760905502</c:v>
                 </c:pt>
                 <c:pt idx="14">
-                  <c:v>45.29529245170047</c:v>
+                  <c:v>45.295292451700469</c:v>
                 </c:pt>
                 <c:pt idx="15">
                   <c:v>42.2820233333332</c:v>
                 </c:pt>
                 <c:pt idx="16">
-                  <c:v>88.37801991312301</c:v>
+                  <c:v>88.378019913123012</c:v>
                 </c:pt>
                 <c:pt idx="17">
                   <c:v>12.3791647252819</c:v>
                 </c:pt>
                 <c:pt idx="18">
-                  <c:v>0.0</c:v>
+                  <c:v>0</c:v>
                 </c:pt>
                 <c:pt idx="19">
-                  <c:v>58.51978297129445</c:v>
+                  <c:v>58.519782971294447</c:v>
                 </c:pt>
               </c:numCache>
             </c:numRef>
@@ -700,7 +700,7 @@
     <c:plotVisOnly val="1"/>
     <c:dispBlanksAs val="gap"/>
     <c:showDLblsOverMax val="0"/>
-    <c:extLst xmlns:lc="http://schemas.openxmlformats.org/drawingml/2006/lockedCanvas" xmlns:comp="http://schemas.openxmlformats.org/drawingml/2006/compatibility" xmlns:we="http://schemas.microsoft.com/office/webextensions/webextension/2010/11" xmlns:wetp="http://schemas.microsoft.com/office/webextensions/taskpanes/2010/11" xmlns:w16cid="http://schemas.microsoft.com/office/word/2016/wordml/cid" xmlns:w16se="http://schemas.microsoft.com/office/word/2015/wordml/symex" xmlns:wps="http://schemas.microsoft.com/office/word/2010/wordprocessingShape" xmlns:b="http://schemas.openxmlformats.org/officeDocument/2006/bibliography" xmlns:odgm="http://opendope.org/SmartArt/DataHierarchy" xmlns:odi="http://opendope.org/components" xmlns:oda="http://opendope.org/answers" xmlns:odq="http://opendope.org/questions" xmlns:odc="http://opendope.org/conditions" xmlns:odx="http://opendope.org/xpaths" xmlns:cppr="http://schemas.microsoft.com/office/2006/coverPageProps" xmlns:pvml="urn:schemas-microsoft-com:office:powerpoint" xmlns:w10="urn:schemas-microsoft-com:office:word" xmlns:v="urn:schemas-microsoft-com:vml" xmlns:o="urn:schemas-microsoft-com:office:office" xmlns:xvml="urn:schemas-microsoft-com:office:excel" xmlns:dsp="http://schemas.microsoft.com/office/drawing/2008/diagram" xmlns:xdr="http://schemas.openxmlformats.org/drawingml/2006/spreadsheetDrawing" xmlns:pic="http://schemas.openxmlformats.org/drawingml/2006/picture" xmlns:dgm="http://schemas.openxmlformats.org/drawingml/2006/diagram" xmlns:c14="http://schemas.microsoft.com/office/drawing/2007/8/2/chart" xmlns:cdr="http://schemas.openxmlformats.org/drawingml/2006/chartDrawing" xmlns:wne="http://schemas.microsoft.com/office/word/2006/wordml" xmlns:sl="http://schemas.openxmlformats.org/schemaLibrary/2006/main" xmlns:mc="http://schemas.openxmlformats.org/markup-compatibility/2006" xmlns:wp14="http://schemas.microsoft.com/office/word/2010/wordprocessingDrawing" xmlns:wp="http://schemas.openxmlformats.org/drawingml/2006/wordprocessingDrawing" xmlns:m="http://schemas.openxmlformats.org/officeDocument/2006/math" xmlns:w14="http://schemas.microsoft.com/office/word/2010/wordml" xmlns:w15="http://schemas.microsoft.com/office/word/2012/wordml" xmlns:w="http://schemas.openxmlformats.org/wordprocessingml/2006/main">
+    <c:extLst xmlns:w="http://schemas.openxmlformats.org/wordprocessingml/2006/main" xmlns:w15="http://schemas.microsoft.com/office/word/2012/wordml" xmlns:w14="http://schemas.microsoft.com/office/word/2010/wordml" xmlns:m="http://schemas.openxmlformats.org/officeDocument/2006/math" xmlns:wp="http://schemas.openxmlformats.org/drawingml/2006/wordprocessingDrawing" xmlns:wp14="http://schemas.microsoft.com/office/word/2010/wordprocessingDrawing" xmlns:mc="http://schemas.openxmlformats.org/markup-compatibility/2006" xmlns:sl="http://schemas.openxmlformats.org/schemaLibrary/2006/main" xmlns:wne="http://schemas.microsoft.com/office/word/2006/wordml" xmlns:cdr="http://schemas.openxmlformats.org/drawingml/2006/chartDrawing" xmlns:c14="http://schemas.microsoft.com/office/drawing/2007/8/2/chart" xmlns:dgm="http://schemas.openxmlformats.org/drawingml/2006/diagram" xmlns:pic="http://schemas.openxmlformats.org/drawingml/2006/picture" xmlns:xdr="http://schemas.openxmlformats.org/drawingml/2006/spreadsheetDrawing" xmlns:dsp="http://schemas.microsoft.com/office/drawing/2008/diagram" xmlns:xvml="urn:schemas-microsoft-com:office:excel" xmlns:o="urn:schemas-microsoft-com:office:office" xmlns:v="urn:schemas-microsoft-com:vml" xmlns:w10="urn:schemas-microsoft-com:office:word" xmlns:pvml="urn:schemas-microsoft-com:office:powerpoint" xmlns:cppr="http://schemas.microsoft.com/office/2006/coverPageProps" xmlns:odx="http://opendope.org/xpaths" xmlns:odc="http://opendope.org/conditions" xmlns:odq="http://opendope.org/questions" xmlns:oda="http://opendope.org/answers" xmlns:odi="http://opendope.org/components" xmlns:odgm="http://opendope.org/SmartArt/DataHierarchy" xmlns:b="http://schemas.openxmlformats.org/officeDocument/2006/bibliography" xmlns:wps="http://schemas.microsoft.com/office/word/2010/wordprocessingShape" xmlns:w16se="http://schemas.microsoft.com/office/word/2015/wordml/symex" xmlns:w16cid="http://schemas.microsoft.com/office/word/2016/wordml/cid" xmlns:wetp="http://schemas.microsoft.com/office/webextensions/taskpanes/2010/11" xmlns:we="http://schemas.microsoft.com/office/webextensions/webextension/2010/11" xmlns:comp="http://schemas.openxmlformats.org/drawingml/2006/compatibility" xmlns:lc="http://schemas.openxmlformats.org/drawingml/2006/lockedCanvas">
       <c:ext xmlns:c16r3="http://schemas.microsoft.com/office/drawing/2017/03/chart" uri="{56B9EC1D-385E-4148-901F-78D8002777C0}">
         <c16r3:dataDisplayOptions16>
           <c16r3:dispNaAsBlank val="1"/>
@@ -2182,7 +2182,7 @@
           <a:p>
             <a:fld id="{C1255C68-584F-174D-BB81-51BF91708794}" type="datetimeFigureOut">
               <a:rPr lang="en-US" smtClean="0"/>
-              <a:t>1/29/26</a:t>
+              <a:t>3/13/26</a:t>
             </a:fld>
             <a:endParaRPr lang="en-US"/>
           </a:p>
@@ -2359,7 +2359,7 @@
           <a:p>
             <a:fld id="{A1EDAAC4-819D-C544-9EA1-C73624CFD70B}" type="datetimeFigureOut">
               <a:rPr lang="en-US" smtClean="0"/>
-              <a:t>1/29/26</a:t>
+              <a:t>3/13/26</a:t>
             </a:fld>
             <a:endParaRPr lang="en-US"/>
           </a:p>
@@ -11480,12 +11480,12 @@
             <p:nvPr userDrawn="1"/>
           </p:nvPicPr>
           <p:blipFill>
-            <a:blip r:embed="rId2">
+            <a:blip>
               <a:lum bright="100000"/>
               <a:alphaModFix amt="80000"/>
               <a:extLst>
                 <a:ext uri="{96DAC541-7B7A-43D3-8B79-37D633B846F1}">
-                  <asvg:svgBlip xmlns:asvg="http://schemas.microsoft.com/office/drawing/2016/SVG/main" r:embed="rId3"/>
+                  <asvg:svgBlip xmlns:asvg="http://schemas.microsoft.com/office/drawing/2016/SVG/main" r:embed="rId2"/>
                 </a:ext>
               </a:extLst>
             </a:blip>
@@ -11597,12 +11597,12 @@
             <p:nvPr userDrawn="1"/>
           </p:nvPicPr>
           <p:blipFill>
-            <a:blip r:embed="rId4">
+            <a:blip>
               <a:lum bright="100000"/>
               <a:alphaModFix amt="80000"/>
               <a:extLst>
                 <a:ext uri="{96DAC541-7B7A-43D3-8B79-37D633B846F1}">
-                  <asvg:svgBlip xmlns:asvg="http://schemas.microsoft.com/office/drawing/2016/SVG/main" r:embed="rId5"/>
+                  <asvg:svgBlip xmlns:asvg="http://schemas.microsoft.com/office/drawing/2016/SVG/main" r:embed="rId3"/>
                 </a:ext>
               </a:extLst>
             </a:blip>
@@ -11714,12 +11714,12 @@
             <p:nvPr userDrawn="1"/>
           </p:nvPicPr>
           <p:blipFill>
-            <a:blip r:embed="rId6">
+            <a:blip>
               <a:lum bright="100000"/>
               <a:alphaModFix amt="80000"/>
               <a:extLst>
                 <a:ext uri="{96DAC541-7B7A-43D3-8B79-37D633B846F1}">
-                  <asvg:svgBlip xmlns:asvg="http://schemas.microsoft.com/office/drawing/2016/SVG/main" r:embed="rId7"/>
+                  <asvg:svgBlip xmlns:asvg="http://schemas.microsoft.com/office/drawing/2016/SVG/main" r:embed="rId4"/>
                 </a:ext>
               </a:extLst>
             </a:blip>
@@ -11820,12 +11820,12 @@
             <p:nvPr userDrawn="1"/>
           </p:nvPicPr>
           <p:blipFill>
-            <a:blip r:embed="rId8">
+            <a:blip>
               <a:lum bright="100000"/>
               <a:alphaModFix amt="80000"/>
               <a:extLst>
                 <a:ext uri="{96DAC541-7B7A-43D3-8B79-37D633B846F1}">
-                  <asvg:svgBlip xmlns:asvg="http://schemas.microsoft.com/office/drawing/2016/SVG/main" r:embed="rId9"/>
+                  <asvg:svgBlip xmlns:asvg="http://schemas.microsoft.com/office/drawing/2016/SVG/main" r:embed="rId5"/>
                 </a:ext>
               </a:extLst>
             </a:blip>
@@ -11948,12 +11948,12 @@
             <p:nvPr userDrawn="1"/>
           </p:nvPicPr>
           <p:blipFill>
-            <a:blip r:embed="rId10">
+            <a:blip>
               <a:lum bright="100000"/>
               <a:alphaModFix amt="80000"/>
               <a:extLst>
                 <a:ext uri="{96DAC541-7B7A-43D3-8B79-37D633B846F1}">
-                  <asvg:svgBlip xmlns:asvg="http://schemas.microsoft.com/office/drawing/2016/SVG/main" r:embed="rId11"/>
+                  <asvg:svgBlip xmlns:asvg="http://schemas.microsoft.com/office/drawing/2016/SVG/main" r:embed="rId6"/>
                 </a:ext>
               </a:extLst>
             </a:blip>
@@ -12054,12 +12054,12 @@
             <p:nvPr userDrawn="1"/>
           </p:nvPicPr>
           <p:blipFill>
-            <a:blip r:embed="rId12">
+            <a:blip>
               <a:lum bright="100000"/>
               <a:alphaModFix amt="80000"/>
               <a:extLst>
                 <a:ext uri="{96DAC541-7B7A-43D3-8B79-37D633B846F1}">
-                  <asvg:svgBlip xmlns:asvg="http://schemas.microsoft.com/office/drawing/2016/SVG/main" r:embed="rId13"/>
+                  <asvg:svgBlip xmlns:asvg="http://schemas.microsoft.com/office/drawing/2016/SVG/main" r:embed="rId7"/>
                 </a:ext>
               </a:extLst>
             </a:blip>
@@ -22756,7 +22756,6 @@
               <a:rPr lang="en-US" dirty="0"/>
               <a:t>Software Quality report on Opendemo</a:t>
             </a:r>
-            <a:endParaRPr lang="en-US" dirty="0"/>
           </a:p>
         </p:txBody>
       </p:sp>
@@ -31629,10 +31628,10 @@
               <p:nvPr/>
             </p:nvPicPr>
             <p:blipFill>
-              <a:blip r:embed="rId2">
+              <a:blip>
                 <a:extLst>
                   <a:ext uri="{96DAC541-7B7A-43D3-8B79-37D633B846F1}">
-                    <asvg:svgBlip xmlns:asvg="http://schemas.microsoft.com/office/drawing/2016/SVG/main" r:embed="rId3"/>
+                    <asvg:svgBlip xmlns:asvg="http://schemas.microsoft.com/office/drawing/2016/SVG/main" r:embed="rId2"/>
                   </a:ext>
                 </a:extLst>
               </a:blip>
@@ -31970,10 +31969,10 @@
               <p:nvPr/>
             </p:nvPicPr>
             <p:blipFill>
-              <a:blip r:embed="rId4">
+              <a:blip>
                 <a:extLst>
                   <a:ext uri="{96DAC541-7B7A-43D3-8B79-37D633B846F1}">
-                    <asvg:svgBlip xmlns:asvg="http://schemas.microsoft.com/office/drawing/2016/SVG/main" r:embed="rId5"/>
+                    <asvg:svgBlip xmlns:asvg="http://schemas.microsoft.com/office/drawing/2016/SVG/main" r:embed="rId3"/>
                   </a:ext>
                 </a:extLst>
               </a:blip>
@@ -32622,7 +32621,7 @@
         </p:nvGraphicFramePr>
         <p:xfrm>
           <a:off x="937766" y="1466791"/>
-          <a:ext cx="10316468" cy="17341920"/>
+          <a:ext cx="10316468" cy="4540320"/>
         </p:xfrm>
         <a:graphic>
           <a:graphicData uri="http://schemas.openxmlformats.org/drawingml/2006/table">
@@ -39621,55 +39620,6 @@
               <a:rPr lang="en-US"/>
               <a:t>Systems with the most technical debt</a:t>
             </a:r>
-          </a:p>
-        </p:txBody>
-      </p:sp>
-      <p:sp>
-        <p:nvSpPr>
-          <p:cNvPr id="6" name="TextBox 5">
-            <a:extLst>
-              <a:ext uri="{FF2B5EF4-FFF2-40B4-BE49-F238E27FC236}">
-                <a16:creationId xmlns:a16="http://schemas.microsoft.com/office/drawing/2014/main" id="{777043DA-728E-44E3-4252-8FC6DEA66304}"/>
-              </a:ext>
-            </a:extLst>
-          </p:cNvPr>
-          <p:cNvSpPr txBox="1"/>
-          <p:nvPr/>
-        </p:nvSpPr>
-        <p:spPr>
-          <a:xfrm>
-            <a:off x="10058400" y="-373182"/>
-            <a:ext cx="3177686" cy="355162"/>
-          </a:xfrm>
-          <a:prstGeom prst="rect">
-            <a:avLst/>
-          </a:prstGeom>
-          <a:noFill/>
-        </p:spPr>
-        <p:txBody>
-          <a:bodyPr wrap="none" lIns="90000" rtlCol="0" anchor="t">
-            <a:spAutoFit/>
-          </a:bodyPr>
-          <a:lstStyle/>
-          <a:p>
-            <a:pPr algn="l">
-              <a:lnSpc>
-                <a:spcPct val="113000"/>
-              </a:lnSpc>
-            </a:pPr>
-            <a:r>
-              <a:rPr lang="en-US" sz="1600" dirty="0" err="1">
-                <a:solidFill>
-                  <a:schemeClr val="tx2"/>
-                </a:solidFill>
-              </a:rPr>
-              <a:t>TECHNICAL_DEBT_SYSTEMS_CHART</a:t>
-            </a:r>
-            <a:endParaRPr lang="en-US" sz="1600" dirty="0">
-              <a:solidFill>
-                <a:schemeClr val="tx2"/>
-              </a:solidFill>
-            </a:endParaRPr>
           </a:p>
         </p:txBody>
       </p:sp>
@@ -41305,26 +41255,6 @@
 </file>
 
 <file path=customXml/item1.xml><?xml version="1.0" encoding="utf-8"?>
-<p:properties xmlns:p="http://schemas.microsoft.com/office/2006/metadata/properties" xmlns:xsi="http://www.w3.org/2001/XMLSchema-instance" xmlns:pc="http://schemas.microsoft.com/office/infopath/2007/PartnerControls">
-  <documentManagement>
-    <lcf76f155ced4ddcb4097134ff3c332f xmlns="fa937df2-abe2-4d38-b5f4-c228acba3827">
-      <Terms xmlns="http://schemas.microsoft.com/office/infopath/2007/PartnerControls"/>
-    </lcf76f155ced4ddcb4097134ff3c332f>
-    <TaxCatchAll xmlns="bc8ba18a-4a58-4ad2-bfc0-6516af8e7dc2" xsi:nil="true"/>
-  </documentManagement>
-</p:properties>
-</file>
-
-<file path=customXml/item2.xml><?xml version="1.0" encoding="utf-8"?>
-<?mso-contentType ?>
-<FormTemplates xmlns="http://schemas.microsoft.com/sharepoint/v3/contenttype/forms">
-  <Display>DocumentLibraryForm</Display>
-  <Edit>DocumentLibraryForm</Edit>
-  <New>DocumentLibraryForm</New>
-</FormTemplates>
-</file>
-
-<file path=customXml/item3.xml><?xml version="1.0" encoding="utf-8"?>
 <ct:contentTypeSchema xmlns:ct="http://schemas.microsoft.com/office/2006/metadata/contentType" xmlns:ma="http://schemas.microsoft.com/office/2006/metadata/properties/metaAttributes" ct:_="" ma:_="" ma:contentTypeName="Document" ma:contentTypeID="0x010100398B4EB28540854BB4092730D7F67224" ma:contentTypeVersion="13" ma:contentTypeDescription="Create a new document." ma:contentTypeScope="" ma:versionID="07d6997c7358ecc3b6f0d78039f1ac55">
   <xsd:schema xmlns:xsd="http://www.w3.org/2001/XMLSchema" xmlns:xs="http://www.w3.org/2001/XMLSchema" xmlns:p="http://schemas.microsoft.com/office/2006/metadata/properties" xmlns:ns2="fa937df2-abe2-4d38-b5f4-c228acba3827" xmlns:ns3="bc8ba18a-4a58-4ad2-bfc0-6516af8e7dc2" targetNamespace="http://schemas.microsoft.com/office/2006/metadata/properties" ma:root="true" ma:fieldsID="a7d20d2c9a349b6838acf4b79389f2fd" ns2:_="" ns3:_="">
     <xsd:import namespace="fa937df2-abe2-4d38-b5f4-c228acba3827"/>
@@ -41547,32 +41477,27 @@
 </ct:contentTypeSchema>
 </file>
 
-<file path=customXml/itemProps1.xml><?xml version="1.0" encoding="utf-8"?>
-<ds:datastoreItem xmlns:ds="http://schemas.openxmlformats.org/officeDocument/2006/customXml" ds:itemID="{4B629362-CF15-4610-8FAC-A8E699942233}">
-  <ds:schemaRefs>
-    <ds:schemaRef ds:uri="http://schemas.microsoft.com/office/2006/documentManagement/types"/>
-    <ds:schemaRef ds:uri="http://purl.org/dc/elements/1.1/"/>
-    <ds:schemaRef ds:uri="bc8ba18a-4a58-4ad2-bfc0-6516af8e7dc2"/>
-    <ds:schemaRef ds:uri="http://purl.org/dc/terms/"/>
-    <ds:schemaRef ds:uri="http://www.w3.org/XML/1998/namespace"/>
-    <ds:schemaRef ds:uri="http://schemas.microsoft.com/office/2006/metadata/properties"/>
-    <ds:schemaRef ds:uri="http://schemas.microsoft.com/office/infopath/2007/PartnerControls"/>
-    <ds:schemaRef ds:uri="http://schemas.openxmlformats.org/package/2006/metadata/core-properties"/>
-    <ds:schemaRef ds:uri="fa937df2-abe2-4d38-b5f4-c228acba3827"/>
-    <ds:schemaRef ds:uri="http://purl.org/dc/dcmitype/"/>
-  </ds:schemaRefs>
-</ds:datastoreItem>
+<file path=customXml/item2.xml><?xml version="1.0" encoding="utf-8"?>
+<?mso-contentType ?>
+<FormTemplates xmlns="http://schemas.microsoft.com/sharepoint/v3/contenttype/forms">
+  <Display>DocumentLibraryForm</Display>
+  <Edit>DocumentLibraryForm</Edit>
+  <New>DocumentLibraryForm</New>
+</FormTemplates>
 </file>
 
-<file path=customXml/itemProps2.xml><?xml version="1.0" encoding="utf-8"?>
-<ds:datastoreItem xmlns:ds="http://schemas.openxmlformats.org/officeDocument/2006/customXml" ds:itemID="{570928F0-D7CA-4732-B7F3-1F945720D0AA}">
-  <ds:schemaRefs>
-    <ds:schemaRef ds:uri="http://schemas.microsoft.com/sharepoint/v3/contenttype/forms"/>
-  </ds:schemaRefs>
-</ds:datastoreItem>
+<file path=customXml/item3.xml><?xml version="1.0" encoding="utf-8"?>
+<p:properties xmlns:p="http://schemas.microsoft.com/office/2006/metadata/properties" xmlns:xsi="http://www.w3.org/2001/XMLSchema-instance" xmlns:pc="http://schemas.microsoft.com/office/infopath/2007/PartnerControls">
+  <documentManagement>
+    <lcf76f155ced4ddcb4097134ff3c332f xmlns="fa937df2-abe2-4d38-b5f4-c228acba3827">
+      <Terms xmlns="http://schemas.microsoft.com/office/infopath/2007/PartnerControls"/>
+    </lcf76f155ced4ddcb4097134ff3c332f>
+    <TaxCatchAll xmlns="bc8ba18a-4a58-4ad2-bfc0-6516af8e7dc2" xsi:nil="true"/>
+  </documentManagement>
+</p:properties>
 </file>
 
-<file path=customXml/itemProps3.xml><?xml version="1.0" encoding="utf-8"?>
+<file path=customXml/itemProps1.xml><?xml version="1.0" encoding="utf-8"?>
 <ds:datastoreItem xmlns:ds="http://schemas.openxmlformats.org/officeDocument/2006/customXml" ds:itemID="{06E6923A-C221-4753-B75B-BA213EEB7564}">
   <ds:schemaRefs>
     <ds:schemaRef ds:uri="bc8ba18a-4a58-4ad2-bfc0-6516af8e7dc2"/>
@@ -41589,4 +41514,29 @@
     <ds:schemaRef ds:uri="http://www.w3.org/2001/XMLSchema"/>
   </ds:schemaRefs>
 </ds:datastoreItem>
+</file>
+
+<file path=customXml/itemProps2.xml><?xml version="1.0" encoding="utf-8"?>
+<ds:datastoreItem xmlns:ds="http://schemas.openxmlformats.org/officeDocument/2006/customXml" ds:itemID="{570928F0-D7CA-4732-B7F3-1F945720D0AA}">
+  <ds:schemaRefs>
+    <ds:schemaRef ds:uri="http://schemas.microsoft.com/sharepoint/v3/contenttype/forms"/>
+  </ds:schemaRefs>
+</ds:datastoreItem>
+</file>
+
+<file path=customXml/itemProps3.xml><?xml version="1.0" encoding="utf-8"?>
+<ds:datastoreItem xmlns:ds="http://schemas.openxmlformats.org/officeDocument/2006/customXml" ds:itemID="{4B629362-CF15-4610-8FAC-A8E699942233}">
+  <ds:schemaRefs>
+    <ds:schemaRef ds:uri="http://schemas.microsoft.com/office/2006/documentManagement/types"/>
+    <ds:schemaRef ds:uri="http://purl.org/dc/elements/1.1/"/>
+    <ds:schemaRef ds:uri="bc8ba18a-4a58-4ad2-bfc0-6516af8e7dc2"/>
+    <ds:schemaRef ds:uri="http://purl.org/dc/terms/"/>
+    <ds:schemaRef ds:uri="http://www.w3.org/XML/1998/namespace"/>
+    <ds:schemaRef ds:uri="http://schemas.microsoft.com/office/2006/metadata/properties"/>
+    <ds:schemaRef ds:uri="http://schemas.microsoft.com/office/infopath/2007/PartnerControls"/>
+    <ds:schemaRef ds:uri="http://schemas.openxmlformats.org/package/2006/metadata/core-properties"/>
+    <ds:schemaRef ds:uri="fa937df2-abe2-4d38-b5f4-c228acba3827"/>
+    <ds:schemaRef ds:uri="http://purl.org/dc/dcmitype/"/>
+  </ds:schemaRefs>
+</ds:datastoreItem>
 </file>
--- a/tests/report_generator/integration/reference_modernization.pptx
+++ b/tests/report_generator/integration/reference_modernization.pptx
@@ -353,37 +353,37 @@
                   <c:v>118.73782</c:v>
                 </c:pt>
                 <c:pt idx="5">
-                  <c:v>90.589789999999994</c:v>
+                  <c:v>90.58979</c:v>
                 </c:pt>
                 <c:pt idx="6">
-                  <c:v>79.725849999999994</c:v>
+                  <c:v>79.72585</c:v>
                 </c:pt>
                 <c:pt idx="7">
-                  <c:v>70.964593343205621</c:v>
+                  <c:v>70.96459334320562</c:v>
                 </c:pt>
                 <c:pt idx="8">
-                  <c:v>69.703230000000005</c:v>
+                  <c:v>69.70323</c:v>
                 </c:pt>
                 <c:pt idx="9">
                   <c:v>56.01164</c:v>
                 </c:pt>
                 <c:pt idx="10">
-                  <c:v>39.714834660721138</c:v>
+                  <c:v>39.71483466072114</c:v>
                 </c:pt>
                 <c:pt idx="11">
-                  <c:v>34.844909999999999</c:v>
+                  <c:v>34.84491</c:v>
                 </c:pt>
                 <c:pt idx="12">
-                  <c:v>34.274880000000003</c:v>
+                  <c:v>34.27488</c:v>
                 </c:pt>
                 <c:pt idx="13">
-                  <c:v>33.210549999999998</c:v>
+                  <c:v>33.21055</c:v>
                 </c:pt>
                 <c:pt idx="14">
-                  <c:v>31.269179999999999</c:v>
+                  <c:v>31.26918</c:v>
                 </c:pt>
                 <c:pt idx="15">
-                  <c:v>30.577310000000001</c:v>
+                  <c:v>30.57731</c:v>
                 </c:pt>
                 <c:pt idx="16">
                   <c:v>28.55415</c:v>
@@ -392,10 +392,10 @@
                   <c:v>24.45168</c:v>
                 </c:pt>
                 <c:pt idx="18">
-                  <c:v>23.164843414368718</c:v>
+                  <c:v>23.16484341436872</c:v>
                 </c:pt>
                 <c:pt idx="19">
-                  <c:v>18.813199999999998</c:v>
+                  <c:v>18.8132</c:v>
                 </c:pt>
               </c:numCache>
             </c:numRef>
@@ -505,13 +505,13 @@
                 <c:formatCode>General</c:formatCode>
                 <c:ptCount val="20"/>
                 <c:pt idx="0">
-                  <c:v>0</c:v>
+                  <c:v>0.0</c:v>
                 </c:pt>
                 <c:pt idx="1">
                   <c:v>163.50925951217985</c:v>
                 </c:pt>
                 <c:pt idx="2">
-                  <c:v>0</c:v>
+                  <c:v>0.0</c:v>
                 </c:pt>
                 <c:pt idx="3">
                   <c:v>125.69901258506576</c:v>
@@ -523,10 +523,10 @@
                   <c:v>10.386528597698714</c:v>
                 </c:pt>
                 <c:pt idx="6">
-                  <c:v>79.465384416128174</c:v>
+                  <c:v>79.46538441612817</c:v>
                 </c:pt>
                 <c:pt idx="7">
-                  <c:v>0</c:v>
+                  <c:v>0.0</c:v>
                 </c:pt>
                 <c:pt idx="8">
                   <c:v>11.918359176828517</c:v>
@@ -535,7 +535,7 @@
                   <c:v>79.59140060338413</c:v>
                 </c:pt>
                 <c:pt idx="10">
-                  <c:v>0</c:v>
+                  <c:v>0.0</c:v>
                 </c:pt>
                 <c:pt idx="11">
                   <c:v>10.294089999999962</c:v>
@@ -544,25 +544,25 @@
                   <c:v>21.230302824691023</c:v>
                 </c:pt>
                 <c:pt idx="13">
-                  <c:v>48.028939760905502</c:v>
+                  <c:v>48.0289397609055</c:v>
                 </c:pt>
                 <c:pt idx="14">
-                  <c:v>45.295292451700469</c:v>
+                  <c:v>45.29529245170047</c:v>
                 </c:pt>
                 <c:pt idx="15">
                   <c:v>42.2820233333332</c:v>
                 </c:pt>
                 <c:pt idx="16">
-                  <c:v>88.378019913123012</c:v>
+                  <c:v>88.37801991312301</c:v>
                 </c:pt>
                 <c:pt idx="17">
                   <c:v>12.3791647252819</c:v>
                 </c:pt>
                 <c:pt idx="18">
-                  <c:v>0</c:v>
+                  <c:v>0.0</c:v>
                 </c:pt>
                 <c:pt idx="19">
-                  <c:v>58.519782971294447</c:v>
+                  <c:v>58.51978297129445</c:v>
                 </c:pt>
               </c:numCache>
             </c:numRef>
@@ -759,7 +759,7 @@
               <c:strCache>
                 <c:ptCount val="1"/>
                 <c:pt idx="0">
-                  <c:v>Estimated change speed increase</c:v>
+                  <c:v>Critical</c:v>
                 </c:pt>
               </c:strCache>
             </c:strRef>
@@ -774,56 +774,2577 @@
             <a:effectLst/>
           </c:spPr>
           <c:invertIfNegative val="0"/>
+          <c:dPt>
+            <c:idx val="0"/>
+            <c:spPr>
+              <a:solidFill>
+                <a:srgbClr val="003DAB"/>
+              </a:solidFill>
+              <a:ln>
+                <a:solidFill>
+                  <a:srgbClr val="FFFFFF"/>
+                </a:solidFill>
+              </a:ln>
+            </c:spPr>
+          </c:dPt>
+          <c:dPt>
+            <c:idx val="1"/>
+            <c:spPr>
+              <a:solidFill>
+                <a:srgbClr val="003DAB"/>
+              </a:solidFill>
+              <a:ln>
+                <a:solidFill>
+                  <a:srgbClr val="FFFFFF"/>
+                </a:solidFill>
+              </a:ln>
+            </c:spPr>
+          </c:dPt>
+          <c:dPt>
+            <c:idx val="2"/>
+            <c:spPr>
+              <a:solidFill>
+                <a:srgbClr val="003DAB"/>
+              </a:solidFill>
+              <a:ln>
+                <a:solidFill>
+                  <a:srgbClr val="FFFFFF"/>
+                </a:solidFill>
+              </a:ln>
+            </c:spPr>
+          </c:dPt>
+          <c:dPt>
+            <c:idx val="3"/>
+            <c:spPr>
+              <a:solidFill>
+                <a:srgbClr val="003DAB"/>
+              </a:solidFill>
+              <a:ln>
+                <a:solidFill>
+                  <a:srgbClr val="FFFFFF"/>
+                </a:solidFill>
+              </a:ln>
+            </c:spPr>
+          </c:dPt>
+          <c:dPt>
+            <c:idx val="4"/>
+            <c:spPr>
+              <a:solidFill>
+                <a:srgbClr val="003DAB"/>
+              </a:solidFill>
+              <a:ln>
+                <a:solidFill>
+                  <a:srgbClr val="FFFFFF"/>
+                </a:solidFill>
+              </a:ln>
+            </c:spPr>
+          </c:dPt>
+          <c:dPt>
+            <c:idx val="5"/>
+            <c:spPr>
+              <a:solidFill>
+                <a:srgbClr val="003DAB"/>
+              </a:solidFill>
+              <a:ln>
+                <a:solidFill>
+                  <a:srgbClr val="FFFFFF"/>
+                </a:solidFill>
+              </a:ln>
+            </c:spPr>
+          </c:dPt>
+          <c:dPt>
+            <c:idx val="6"/>
+            <c:spPr>
+              <a:solidFill>
+                <a:srgbClr val="003DAB"/>
+              </a:solidFill>
+              <a:ln>
+                <a:solidFill>
+                  <a:srgbClr val="FFFFFF"/>
+                </a:solidFill>
+              </a:ln>
+            </c:spPr>
+          </c:dPt>
+          <c:dPt>
+            <c:idx val="7"/>
+            <c:spPr>
+              <a:solidFill>
+                <a:srgbClr val="003DAB"/>
+              </a:solidFill>
+              <a:ln>
+                <a:solidFill>
+                  <a:srgbClr val="FFFFFF"/>
+                </a:solidFill>
+              </a:ln>
+            </c:spPr>
+          </c:dPt>
+          <c:dPt>
+            <c:idx val="8"/>
+            <c:spPr>
+              <a:solidFill>
+                <a:srgbClr val="003DAB"/>
+              </a:solidFill>
+              <a:ln>
+                <a:solidFill>
+                  <a:srgbClr val="FFFFFF"/>
+                </a:solidFill>
+              </a:ln>
+            </c:spPr>
+          </c:dPt>
+          <c:dPt>
+            <c:idx val="9"/>
+            <c:spPr>
+              <a:solidFill>
+                <a:srgbClr val="003DAB"/>
+              </a:solidFill>
+              <a:ln>
+                <a:solidFill>
+                  <a:srgbClr val="FFFFFF"/>
+                </a:solidFill>
+              </a:ln>
+            </c:spPr>
+          </c:dPt>
+          <c:dPt>
+            <c:idx val="10"/>
+            <c:spPr>
+              <a:solidFill>
+                <a:srgbClr val="003DAB"/>
+              </a:solidFill>
+              <a:ln>
+                <a:solidFill>
+                  <a:srgbClr val="FFFFFF"/>
+                </a:solidFill>
+              </a:ln>
+            </c:spPr>
+          </c:dPt>
+          <c:dLbls>
+            <c:dLbl>
+              <c:idx val="0"/>
+              <c:tx>
+                <c:rich>
+                  <a:bodyPr/>
+                  <a:lstStyle/>
+                  <a:p>
+                    <a:r>
+                      <a:t>MongoDB</a:t>
+                    </a:r>
+                  </a:p>
+                </c:rich>
+              </c:tx>
+              <c:showLegendKey val="0"/>
+              <c:showVal val="1"/>
+              <c:showCatName val="0"/>
+              <c:showSerName val="0"/>
+              <c:showPercent val="0"/>
+              <c:showBubbleSize val="0"/>
+            </c:dLbl>
+            <c:dLbl>
+              <c:idx val="1"/>
+              <c:tx>
+                <c:rich>
+                  <a:bodyPr/>
+                  <a:lstStyle/>
+                  <a:p>
+                    <a:r>
+                      <a:t>Hadoop</a:t>
+                    </a:r>
+                  </a:p>
+                </c:rich>
+              </c:tx>
+              <c:showLegendKey val="0"/>
+              <c:showVal val="1"/>
+              <c:showCatName val="0"/>
+              <c:showSerName val="0"/>
+              <c:showPercent val="0"/>
+              <c:showBubbleSize val="0"/>
+            </c:dLbl>
+            <c:dLbl>
+              <c:idx val="2"/>
+              <c:tx>
+                <c:rich>
+                  <a:bodyPr/>
+                  <a:lstStyle/>
+                  <a:p>
+                    <a:r>
+                      <a:t>Hibernate</a:t>
+                    </a:r>
+                  </a:p>
+                </c:rich>
+              </c:tx>
+              <c:showLegendKey val="0"/>
+              <c:showVal val="1"/>
+              <c:showCatName val="0"/>
+              <c:showSerName val="0"/>
+              <c:showPercent val="0"/>
+              <c:showBubbleSize val="0"/>
+            </c:dLbl>
+            <c:dLbl>
+              <c:idx val="3"/>
+              <c:tx>
+                <c:rich>
+                  <a:bodyPr/>
+                  <a:lstStyle/>
+                  <a:p>
+                    <a:r>
+                      <a:t>Airflow</a:t>
+                    </a:r>
+                  </a:p>
+                </c:rich>
+              </c:tx>
+              <c:showLegendKey val="0"/>
+              <c:showVal val="1"/>
+              <c:showCatName val="0"/>
+              <c:showSerName val="0"/>
+              <c:showPercent val="0"/>
+              <c:showBubbleSize val="0"/>
+            </c:dLbl>
+            <c:dLbl>
+              <c:idx val="4"/>
+              <c:tx>
+                <c:rich>
+                  <a:bodyPr/>
+                  <a:lstStyle/>
+                  <a:p>
+                    <a:r>
+                      <a:t>Redis</a:t>
+                    </a:r>
+                  </a:p>
+                </c:rich>
+              </c:tx>
+              <c:showLegendKey val="0"/>
+              <c:showVal val="1"/>
+              <c:showCatName val="0"/>
+              <c:showSerName val="0"/>
+              <c:showPercent val="0"/>
+              <c:showBubbleSize val="0"/>
+            </c:dLbl>
+            <c:dLbl>
+              <c:idx val="5"/>
+              <c:tx>
+                <c:rich>
+                  <a:bodyPr/>
+                  <a:lstStyle/>
+                  <a:p>
+                    <a:r>
+                      <a:t>Puppet</a:t>
+                    </a:r>
+                  </a:p>
+                </c:rich>
+              </c:tx>
+              <c:showLegendKey val="0"/>
+              <c:showVal val="1"/>
+              <c:showCatName val="0"/>
+              <c:showSerName val="0"/>
+              <c:showPercent val="0"/>
+              <c:showBubbleSize val="0"/>
+            </c:dLbl>
+            <c:dLbl>
+              <c:idx val="6"/>
+              <c:tx>
+                <c:rich>
+                  <a:bodyPr/>
+                  <a:lstStyle/>
+                  <a:p>
+                    <a:r>
+                      <a:t>Swift</a:t>
+                    </a:r>
+                  </a:p>
+                </c:rich>
+              </c:tx>
+              <c:showLegendKey val="0"/>
+              <c:showVal val="1"/>
+              <c:showCatName val="0"/>
+              <c:showSerName val="0"/>
+              <c:showPercent val="0"/>
+              <c:showBubbleSize val="0"/>
+            </c:dLbl>
+            <c:dLbl>
+              <c:idx val="7"/>
+              <c:tx>
+                <c:rich>
+                  <a:bodyPr/>
+                  <a:lstStyle/>
+                  <a:p>
+                    <a:r>
+                      <a:t>Card Management</a:t>
+                    </a:r>
+                  </a:p>
+                </c:rich>
+              </c:tx>
+              <c:showLegendKey val="0"/>
+              <c:showVal val="1"/>
+              <c:showCatName val="0"/>
+              <c:showSerName val="0"/>
+              <c:showPercent val="0"/>
+              <c:showBubbleSize val="0"/>
+            </c:dLbl>
+            <c:dLbl>
+              <c:idx val="8"/>
+              <c:tx>
+                <c:rich>
+                  <a:bodyPr/>
+                  <a:lstStyle/>
+                  <a:p>
+                    <a:r>
+                      <a:t>Emergency Response</a:t>
+                    </a:r>
+                  </a:p>
+                </c:rich>
+              </c:tx>
+              <c:showLegendKey val="0"/>
+              <c:showVal val="1"/>
+              <c:showCatName val="0"/>
+              <c:showSerName val="0"/>
+              <c:showPercent val="0"/>
+              <c:showBubbleSize val="0"/>
+            </c:dLbl>
+            <c:dLbl>
+              <c:idx val="9"/>
+              <c:tx>
+                <c:rich>
+                  <a:bodyPr/>
+                  <a:lstStyle/>
+                  <a:p>
+                    <a:r>
+                      <a:t>Zuul</a:t>
+                    </a:r>
+                  </a:p>
+                </c:rich>
+              </c:tx>
+              <c:showLegendKey val="0"/>
+              <c:showVal val="1"/>
+              <c:showCatName val="0"/>
+              <c:showSerName val="0"/>
+              <c:showPercent val="0"/>
+              <c:showBubbleSize val="0"/>
+            </c:dLbl>
+            <c:dLbl>
+              <c:idx val="10"/>
+              <c:tx>
+                <c:rich>
+                  <a:bodyPr/>
+                  <a:lstStyle/>
+                  <a:p>
+                    <a:r>
+                      <a:t>Discovery</a:t>
+                    </a:r>
+                  </a:p>
+                </c:rich>
+              </c:tx>
+              <c:showLegendKey val="0"/>
+              <c:showVal val="1"/>
+              <c:showCatName val="0"/>
+              <c:showSerName val="0"/>
+              <c:showPercent val="0"/>
+              <c:showBubbleSize val="0"/>
+            </c:dLbl>
+            <c:showLegendKey val="0"/>
+            <c:showVal val="0"/>
+            <c:showCatName val="0"/>
+            <c:showSerName val="0"/>
+            <c:showPercent val="0"/>
+            <c:showBubbleSize val="0"/>
+            <c:showLeaderLines val="1"/>
+          </c:dLbls>
           <c:xVal>
             <c:numRef>
-              <c:f>Sheet1!$A$2:$A$4</c:f>
+              <c:f>Sheet1!$A$2:$A$12</c:f>
               <c:numCache>
                 <c:formatCode>General</c:formatCode>
-                <c:ptCount val="3"/>
+                <c:ptCount val="11"/>
                 <c:pt idx="0">
-                  <c:v>0.7</c:v>
+                  <c:v>118.73782</c:v>
                 </c:pt>
                 <c:pt idx="1">
-                  <c:v>1.8</c:v>
+                  <c:v>33.21055</c:v>
                 </c:pt>
                 <c:pt idx="2">
-                  <c:v>2.6</c:v>
+                  <c:v>30.57731</c:v>
+                </c:pt>
+                <c:pt idx="3">
+                  <c:v>34.27488</c:v>
+                </c:pt>
+                <c:pt idx="4">
+                  <c:v>23.16484341436872</c:v>
+                </c:pt>
+                <c:pt idx="5">
+                  <c:v>5.15985</c:v>
+                </c:pt>
+                <c:pt idx="6">
+                  <c:v>3.20787</c:v>
+                </c:pt>
+                <c:pt idx="7">
+                  <c:v>0.70401</c:v>
+                </c:pt>
+                <c:pt idx="8">
+                  <c:v>0.97714</c:v>
+                </c:pt>
+                <c:pt idx="9">
+                  <c:v>0.52348</c:v>
+                </c:pt>
+                <c:pt idx="10">
+                  <c:v>0.30559</c:v>
                 </c:pt>
               </c:numCache>
             </c:numRef>
           </c:xVal>
           <c:yVal>
             <c:numRef>
-              <c:f>Sheet1!$B$2:$B$4</c:f>
+              <c:f>Sheet1!$B$2:$B$12</c:f>
               <c:numCache>
-                <c:formatCode>0%</c:formatCode>
-                <c:ptCount val="3"/>
+                <c:formatCode>General</c:formatCode>
+                <c:ptCount val="11"/>
                 <c:pt idx="0">
-                  <c:v>2.7</c:v>
+                  <c:v>86.18161</c:v>
                 </c:pt>
                 <c:pt idx="1">
-                  <c:v>3.2</c:v>
+                  <c:v>78.22621</c:v>
                 </c:pt>
                 <c:pt idx="2">
-                  <c:v>0.8</c:v>
+                  <c:v>82.15507</c:v>
+                </c:pt>
+                <c:pt idx="3">
+                  <c:v>82.46816</c:v>
+                </c:pt>
+                <c:pt idx="4">
+                  <c:v>60.29861</c:v>
+                </c:pt>
+                <c:pt idx="5">
+                  <c:v>53.69692</c:v>
+                </c:pt>
+                <c:pt idx="6">
+                  <c:v>84.02105</c:v>
+                </c:pt>
+                <c:pt idx="7">
+                  <c:v>55.91103</c:v>
+                </c:pt>
+                <c:pt idx="8">
+                  <c:v>37.82205</c:v>
+                </c:pt>
+                <c:pt idx="9">
+                  <c:v>46.84862</c:v>
+                </c:pt>
+                <c:pt idx="10">
+                  <c:v>15.1171</c:v>
                 </c:pt>
               </c:numCache>
             </c:numRef>
           </c:yVal>
           <c:bubbleSize>
-            <c:numLit>
-              <c:formatCode>General</c:formatCode>
-              <c:ptCount val="3"/>
-              <c:pt idx="0">
-                <c:v>1</c:v>
-              </c:pt>
-              <c:pt idx="1">
-                <c:v>1</c:v>
-              </c:pt>
-              <c:pt idx="2">
-                <c:v>1</c:v>
-              </c:pt>
-            </c:numLit>
+            <c:numRef>
+              <c:f>Sheet1!$C$2:$C$12</c:f>
+              <c:numCache>
+                <c:formatCode>General</c:formatCode>
+                <c:ptCount val="11"/>
+                <c:pt idx="0">
+                  <c:v>224.03359387292423</c:v>
+                </c:pt>
+                <c:pt idx="1">
+                  <c:v>81.2394897609055</c:v>
+                </c:pt>
+                <c:pt idx="2">
+                  <c:v>72.8593333333332</c:v>
+                </c:pt>
+                <c:pt idx="3">
+                  <c:v>55.505182824691026</c:v>
+                </c:pt>
+                <c:pt idx="4">
+                  <c:v>23.16484341436872</c:v>
+                </c:pt>
+                <c:pt idx="5">
+                  <c:v>21.25445304610272</c:v>
+                </c:pt>
+                <c:pt idx="6">
+                  <c:v>5.8078125</c:v>
+                </c:pt>
+                <c:pt idx="7">
+                  <c:v>2.81876098232243</c:v>
+                </c:pt>
+                <c:pt idx="8">
+                  <c:v>2.6791224178651554</c:v>
+                </c:pt>
+                <c:pt idx="9">
+                  <c:v>2.1457777777777776</c:v>
+                </c:pt>
+                <c:pt idx="10">
+                  <c:v>1.251407218141167</c:v>
+                </c:pt>
+              </c:numCache>
+            </c:numRef>
+          </c:bubbleSize>
+          <c:bubble3D val="0"/>
+          <c:extLst>
+            <c:ext xmlns:c16="http://schemas.microsoft.com/office/drawing/2014/chart" uri="{C3380CC4-5D6E-409C-BE32-E72D297353CC}">
+              <c16:uniqueId val="{00000000-D4B8-B94C-91E4-2DDF998DBB50}"/>
+            </c:ext>
+          </c:extLst>
+        </c:ser>
+        <c:ser>
+          <c:idx val="1"/>
+          <c:order val="1"/>
+          <c:tx>
+            <c:strRef>
+              <c:f>Sheet1!$B$14</c:f>
+              <c:strCache>
+                <c:ptCount val="1"/>
+                <c:pt idx="0">
+                  <c:v>High</c:v>
+                </c:pt>
+              </c:strCache>
+            </c:strRef>
+          </c:tx>
+          <c:spPr>
+            <a:solidFill>
+              <a:schemeClr val="accent1"/>
+            </a:solidFill>
+            <a:ln w="19050">
+              <a:noFill/>
+            </a:ln>
+            <a:effectLst/>
+          </c:spPr>
+          <c:invertIfNegative val="0"/>
+          <c:dPt>
+            <c:idx val="0"/>
+            <c:spPr>
+              <a:solidFill>
+                <a:srgbClr val="2E6BFF"/>
+              </a:solidFill>
+              <a:ln>
+                <a:solidFill>
+                  <a:srgbClr val="FFFFFF"/>
+                </a:solidFill>
+              </a:ln>
+            </c:spPr>
+          </c:dPt>
+          <c:dPt>
+            <c:idx val="1"/>
+            <c:spPr>
+              <a:solidFill>
+                <a:srgbClr val="2E6BFF"/>
+              </a:solidFill>
+              <a:ln>
+                <a:solidFill>
+                  <a:srgbClr val="FFFFFF"/>
+                </a:solidFill>
+              </a:ln>
+            </c:spPr>
+          </c:dPt>
+          <c:dPt>
+            <c:idx val="2"/>
+            <c:spPr>
+              <a:solidFill>
+                <a:srgbClr val="2E6BFF"/>
+              </a:solidFill>
+              <a:ln>
+                <a:solidFill>
+                  <a:srgbClr val="FFFFFF"/>
+                </a:solidFill>
+              </a:ln>
+            </c:spPr>
+          </c:dPt>
+          <c:dPt>
+            <c:idx val="3"/>
+            <c:spPr>
+              <a:solidFill>
+                <a:srgbClr val="2E6BFF"/>
+              </a:solidFill>
+              <a:ln>
+                <a:solidFill>
+                  <a:srgbClr val="FFFFFF"/>
+                </a:solidFill>
+              </a:ln>
+            </c:spPr>
+          </c:dPt>
+          <c:dPt>
+            <c:idx val="4"/>
+            <c:spPr>
+              <a:solidFill>
+                <a:srgbClr val="2E6BFF"/>
+              </a:solidFill>
+              <a:ln>
+                <a:solidFill>
+                  <a:srgbClr val="FFFFFF"/>
+                </a:solidFill>
+              </a:ln>
+            </c:spPr>
+          </c:dPt>
+          <c:dPt>
+            <c:idx val="5"/>
+            <c:spPr>
+              <a:solidFill>
+                <a:srgbClr val="2E6BFF"/>
+              </a:solidFill>
+              <a:ln>
+                <a:solidFill>
+                  <a:srgbClr val="FFFFFF"/>
+                </a:solidFill>
+              </a:ln>
+            </c:spPr>
+          </c:dPt>
+          <c:dPt>
+            <c:idx val="6"/>
+            <c:spPr>
+              <a:solidFill>
+                <a:srgbClr val="2E6BFF"/>
+              </a:solidFill>
+              <a:ln>
+                <a:solidFill>
+                  <a:srgbClr val="FFFFFF"/>
+                </a:solidFill>
+              </a:ln>
+            </c:spPr>
+          </c:dPt>
+          <c:dPt>
+            <c:idx val="7"/>
+            <c:spPr>
+              <a:solidFill>
+                <a:srgbClr val="2E6BFF"/>
+              </a:solidFill>
+              <a:ln>
+                <a:solidFill>
+                  <a:srgbClr val="FFFFFF"/>
+                </a:solidFill>
+              </a:ln>
+            </c:spPr>
+          </c:dPt>
+          <c:dPt>
+            <c:idx val="8"/>
+            <c:spPr>
+              <a:solidFill>
+                <a:srgbClr val="2E6BFF"/>
+              </a:solidFill>
+              <a:ln>
+                <a:solidFill>
+                  <a:srgbClr val="FFFFFF"/>
+                </a:solidFill>
+              </a:ln>
+            </c:spPr>
+          </c:dPt>
+          <c:dPt>
+            <c:idx val="9"/>
+            <c:spPr>
+              <a:solidFill>
+                <a:srgbClr val="2E6BFF"/>
+              </a:solidFill>
+              <a:ln>
+                <a:solidFill>
+                  <a:srgbClr val="FFFFFF"/>
+                </a:solidFill>
+              </a:ln>
+            </c:spPr>
+          </c:dPt>
+          <c:dLbls>
+            <c:dLbl>
+              <c:idx val="0"/>
+              <c:tx>
+                <c:rich>
+                  <a:bodyPr/>
+                  <a:lstStyle/>
+                  <a:p>
+                    <a:r>
+                      <a:t>Blender</a:t>
+                    </a:r>
+                  </a:p>
+                </c:rich>
+              </c:tx>
+              <c:showLegendKey val="0"/>
+              <c:showVal val="1"/>
+              <c:showCatName val="0"/>
+              <c:showSerName val="0"/>
+              <c:showPercent val="0"/>
+              <c:showBubbleSize val="0"/>
+            </c:dLbl>
+            <c:dLbl>
+              <c:idx val="1"/>
+              <c:tx>
+                <c:rich>
+                  <a:bodyPr/>
+                  <a:lstStyle/>
+                  <a:p>
+                    <a:r>
+                      <a:t>Elasticsearch</a:t>
+                    </a:r>
+                  </a:p>
+                </c:rich>
+              </c:tx>
+              <c:showLegendKey val="0"/>
+              <c:showVal val="1"/>
+              <c:showCatName val="0"/>
+              <c:showSerName val="0"/>
+              <c:showPercent val="0"/>
+              <c:showBubbleSize val="0"/>
+            </c:dLbl>
+            <c:dLbl>
+              <c:idx val="2"/>
+              <c:tx>
+                <c:rich>
+                  <a:bodyPr/>
+                  <a:lstStyle/>
+                  <a:p>
+                    <a:r>
+                      <a:t>Oracle GraalVM</a:t>
+                    </a:r>
+                  </a:p>
+                </c:rich>
+              </c:tx>
+              <c:showLegendKey val="0"/>
+              <c:showVal val="1"/>
+              <c:showCatName val="0"/>
+              <c:showSerName val="0"/>
+              <c:showPercent val="0"/>
+              <c:showBubbleSize val="0"/>
+            </c:dLbl>
+            <c:dLbl>
+              <c:idx val="3"/>
+              <c:tx>
+                <c:rich>
+                  <a:bodyPr/>
+                  <a:lstStyle/>
+                  <a:p>
+                    <a:r>
+                      <a:t>Artemis</a:t>
+                    </a:r>
+                  </a:p>
+                </c:rich>
+              </c:tx>
+              <c:showLegendKey val="0"/>
+              <c:showVal val="1"/>
+              <c:showCatName val="0"/>
+              <c:showSerName val="0"/>
+              <c:showPercent val="0"/>
+              <c:showBubbleSize val="0"/>
+            </c:dLbl>
+            <c:dLbl>
+              <c:idx val="4"/>
+              <c:tx>
+                <c:rich>
+                  <a:bodyPr/>
+                  <a:lstStyle/>
+                  <a:p>
+                    <a:r>
+                      <a:t>Mediawiki</a:t>
+                    </a:r>
+                  </a:p>
+                </c:rich>
+              </c:tx>
+              <c:showLegendKey val="0"/>
+              <c:showVal val="1"/>
+              <c:showCatName val="0"/>
+              <c:showSerName val="0"/>
+              <c:showPercent val="0"/>
+              <c:showBubbleSize val="0"/>
+            </c:dLbl>
+            <c:dLbl>
+              <c:idx val="5"/>
+              <c:tx>
+                <c:rich>
+                  <a:bodyPr/>
+                  <a:lstStyle/>
+                  <a:p>
+                    <a:r>
+                      <a:t>Druid-local</a:t>
+                    </a:r>
+                  </a:p>
+                </c:rich>
+              </c:tx>
+              <c:showLegendKey val="0"/>
+              <c:showVal val="1"/>
+              <c:showCatName val="0"/>
+              <c:showSerName val="0"/>
+              <c:showPercent val="0"/>
+              <c:showBubbleSize val="0"/>
+            </c:dLbl>
+            <c:dLbl>
+              <c:idx val="6"/>
+              <c:tx>
+                <c:rich>
+                  <a:bodyPr/>
+                  <a:lstStyle/>
+                  <a:p>
+                    <a:r>
+                      <a:t>Druid</a:t>
+                    </a:r>
+                  </a:p>
+                </c:rich>
+              </c:tx>
+              <c:showLegendKey val="0"/>
+              <c:showVal val="1"/>
+              <c:showCatName val="0"/>
+              <c:showSerName val="0"/>
+              <c:showPercent val="0"/>
+              <c:showBubbleSize val="0"/>
+            </c:dLbl>
+            <c:dLbl>
+              <c:idx val="7"/>
+              <c:tx>
+                <c:rich>
+                  <a:bodyPr/>
+                  <a:lstStyle/>
+                  <a:p>
+                    <a:r>
+                      <a:t>Dubbo</a:t>
+                    </a:r>
+                  </a:p>
+                </c:rich>
+              </c:tx>
+              <c:showLegendKey val="0"/>
+              <c:showVal val="1"/>
+              <c:showCatName val="0"/>
+              <c:showSerName val="0"/>
+              <c:showPercent val="0"/>
+              <c:showBubbleSize val="0"/>
+            </c:dLbl>
+            <c:dLbl>
+              <c:idx val="8"/>
+              <c:tx>
+                <c:rich>
+                  <a:bodyPr/>
+                  <a:lstStyle/>
+                  <a:p>
+                    <a:r>
+                      <a:t>Spring-boot</a:t>
+                    </a:r>
+                  </a:p>
+                </c:rich>
+              </c:tx>
+              <c:showLegendKey val="0"/>
+              <c:showVal val="1"/>
+              <c:showCatName val="0"/>
+              <c:showSerName val="0"/>
+              <c:showPercent val="0"/>
+              <c:showBubbleSize val="0"/>
+            </c:dLbl>
+            <c:dLbl>
+              <c:idx val="9"/>
+              <c:tx>
+                <c:rich>
+                  <a:bodyPr/>
+                  <a:lstStyle/>
+                  <a:p>
+                    <a:r>
+                      <a:t>Django</a:t>
+                    </a:r>
+                  </a:p>
+                </c:rich>
+              </c:tx>
+              <c:showLegendKey val="0"/>
+              <c:showVal val="1"/>
+              <c:showCatName val="0"/>
+              <c:showSerName val="0"/>
+              <c:showPercent val="0"/>
+              <c:showBubbleSize val="0"/>
+            </c:dLbl>
+            <c:showLegendKey val="0"/>
+            <c:showVal val="0"/>
+            <c:showCatName val="0"/>
+            <c:showSerName val="0"/>
+            <c:showPercent val="0"/>
+            <c:showBubbleSize val="0"/>
+            <c:showLeaderLines val="1"/>
+          </c:dLbls>
+          <c:xVal>
+            <c:numRef>
+              <c:f>Sheet1!$A$15:$A$24</c:f>
+              <c:numCache>
+                <c:formatCode>General</c:formatCode>
+                <c:ptCount val="10"/>
+                <c:pt idx="0">
+                  <c:v>175.68071</c:v>
+                </c:pt>
+                <c:pt idx="1">
+                  <c:v>137.00198</c:v>
+                </c:pt>
+                <c:pt idx="2">
+                  <c:v>175.17548215807747</c:v>
+                </c:pt>
+                <c:pt idx="3">
+                  <c:v>31.26918</c:v>
+                </c:pt>
+                <c:pt idx="4">
+                  <c:v>18.18312</c:v>
+                </c:pt>
+                <c:pt idx="5">
+                  <c:v>12.99401</c:v>
+                </c:pt>
+                <c:pt idx="6">
+                  <c:v>12.30279</c:v>
+                </c:pt>
+                <c:pt idx="7">
+                  <c:v>8.19523</c:v>
+                </c:pt>
+                <c:pt idx="8">
+                  <c:v>5.26901</c:v>
+                </c:pt>
+                <c:pt idx="9">
+                  <c:v>2.77431</c:v>
+                </c:pt>
+              </c:numCache>
+            </c:numRef>
+          </c:xVal>
+          <c:yVal>
+            <c:numRef>
+              <c:f>Sheet1!$B$15:$B$24</c:f>
+              <c:numCache>
+                <c:formatCode>General</c:formatCode>
+                <c:ptCount val="10"/>
+                <c:pt idx="0">
+                  <c:v>76.07558</c:v>
+                </c:pt>
+                <c:pt idx="1">
+                  <c:v>90.11709</c:v>
+                </c:pt>
+                <c:pt idx="2">
+                  <c:v>84.75704</c:v>
+                </c:pt>
+                <c:pt idx="3">
+                  <c:v>78.5494</c:v>
+                </c:pt>
+                <c:pt idx="4">
+                  <c:v>60.78835</c:v>
+                </c:pt>
+                <c:pt idx="5">
+                  <c:v>77.92646</c:v>
+                </c:pt>
+                <c:pt idx="6">
+                  <c:v>83.2979</c:v>
+                </c:pt>
+                <c:pt idx="7">
+                  <c:v>78.25331</c:v>
+                </c:pt>
+                <c:pt idx="8">
+                  <c:v>36.31141</c:v>
+                </c:pt>
+                <c:pt idx="9">
+                  <c:v>57.55254</c:v>
+                </c:pt>
+              </c:numCache>
+            </c:numRef>
+          </c:yVal>
+          <c:bubbleSize>
+            <c:numRef>
+              <c:f>Sheet1!$C$15:$C$24</c:f>
+              <c:numCache>
+                <c:formatCode>General</c:formatCode>
+                <c:ptCount val="10"/>
+                <c:pt idx="0">
+                  <c:v>339.18996951217986</c:v>
+                </c:pt>
+                <c:pt idx="1">
+                  <c:v>262.70099258506576</c:v>
+                </c:pt>
+                <c:pt idx="2">
+                  <c:v>175.17548215807747</c:v>
+                </c:pt>
+                <c:pt idx="3">
+                  <c:v>76.56447245170047</c:v>
+                </c:pt>
+                <c:pt idx="4">
+                  <c:v>59.41762804924715</c:v>
+                </c:pt>
+                <c:pt idx="5">
+                  <c:v>28.69315971339149</c:v>
+                </c:pt>
+                <c:pt idx="6">
+                  <c:v>26.77437275985667</c:v>
+                </c:pt>
+                <c:pt idx="7">
+                  <c:v>21.30444444444446</c:v>
+                </c:pt>
+                <c:pt idx="8">
+                  <c:v>21.883886685494133</c:v>
+                </c:pt>
+                <c:pt idx="9">
+                  <c:v>11.360794690860216</c:v>
+                </c:pt>
+              </c:numCache>
+            </c:numRef>
+          </c:bubbleSize>
+          <c:bubble3D val="0"/>
+          <c:extLst>
+            <c:ext xmlns:c16="http://schemas.microsoft.com/office/drawing/2014/chart" uri="{C3380CC4-5D6E-409C-BE32-E72D297353CC}">
+              <c16:uniqueId val="{00000000-D4B8-B94C-91E4-2DDF998DBB50}"/>
+            </c:ext>
+          </c:extLst>
+        </c:ser>
+        <c:ser>
+          <c:idx val="2"/>
+          <c:order val="2"/>
+          <c:tx>
+            <c:strRef>
+              <c:f>Sheet1!$B$26</c:f>
+              <c:strCache>
+                <c:ptCount val="1"/>
+                <c:pt idx="0">
+                  <c:v>Medium</c:v>
+                </c:pt>
+              </c:strCache>
+            </c:strRef>
+          </c:tx>
+          <c:spPr>
+            <a:solidFill>
+              <a:schemeClr val="accent1"/>
+            </a:solidFill>
+            <a:ln w="19050">
+              <a:noFill/>
+            </a:ln>
+            <a:effectLst/>
+          </c:spPr>
+          <c:invertIfNegative val="0"/>
+          <c:dPt>
+            <c:idx val="0"/>
+            <c:spPr>
+              <a:solidFill>
+                <a:srgbClr val="8DA8FF"/>
+              </a:solidFill>
+              <a:ln>
+                <a:solidFill>
+                  <a:srgbClr val="FFFFFF"/>
+                </a:solidFill>
+              </a:ln>
+            </c:spPr>
+          </c:dPt>
+          <c:dPt>
+            <c:idx val="1"/>
+            <c:spPr>
+              <a:solidFill>
+                <a:srgbClr val="8DA8FF"/>
+              </a:solidFill>
+              <a:ln>
+                <a:solidFill>
+                  <a:srgbClr val="FFFFFF"/>
+                </a:solidFill>
+              </a:ln>
+            </c:spPr>
+          </c:dPt>
+          <c:dPt>
+            <c:idx val="2"/>
+            <c:spPr>
+              <a:solidFill>
+                <a:srgbClr val="8DA8FF"/>
+              </a:solidFill>
+              <a:ln>
+                <a:solidFill>
+                  <a:srgbClr val="FFFFFF"/>
+                </a:solidFill>
+              </a:ln>
+            </c:spPr>
+          </c:dPt>
+          <c:dPt>
+            <c:idx val="3"/>
+            <c:spPr>
+              <a:solidFill>
+                <a:srgbClr val="8DA8FF"/>
+              </a:solidFill>
+              <a:ln>
+                <a:solidFill>
+                  <a:srgbClr val="FFFFFF"/>
+                </a:solidFill>
+              </a:ln>
+            </c:spPr>
+          </c:dPt>
+          <c:dPt>
+            <c:idx val="4"/>
+            <c:spPr>
+              <a:solidFill>
+                <a:srgbClr val="8DA8FF"/>
+              </a:solidFill>
+              <a:ln>
+                <a:solidFill>
+                  <a:srgbClr val="FFFFFF"/>
+                </a:solidFill>
+              </a:ln>
+            </c:spPr>
+          </c:dPt>
+          <c:dPt>
+            <c:idx val="5"/>
+            <c:spPr>
+              <a:solidFill>
+                <a:srgbClr val="8DA8FF"/>
+              </a:solidFill>
+              <a:ln>
+                <a:solidFill>
+                  <a:srgbClr val="FFFFFF"/>
+                </a:solidFill>
+              </a:ln>
+            </c:spPr>
+          </c:dPt>
+          <c:dPt>
+            <c:idx val="6"/>
+            <c:spPr>
+              <a:solidFill>
+                <a:srgbClr val="8DA8FF"/>
+              </a:solidFill>
+              <a:ln>
+                <a:solidFill>
+                  <a:srgbClr val="FFFFFF"/>
+                </a:solidFill>
+              </a:ln>
+            </c:spPr>
+          </c:dPt>
+          <c:dPt>
+            <c:idx val="7"/>
+            <c:spPr>
+              <a:solidFill>
+                <a:srgbClr val="8DA8FF"/>
+              </a:solidFill>
+              <a:ln>
+                <a:solidFill>
+                  <a:srgbClr val="FFFFFF"/>
+                </a:solidFill>
+              </a:ln>
+            </c:spPr>
+          </c:dPt>
+          <c:dPt>
+            <c:idx val="8"/>
+            <c:spPr>
+              <a:solidFill>
+                <a:srgbClr val="8DA8FF"/>
+              </a:solidFill>
+              <a:ln>
+                <a:solidFill>
+                  <a:srgbClr val="FFFFFF"/>
+                </a:solidFill>
+              </a:ln>
+            </c:spPr>
+          </c:dPt>
+          <c:dPt>
+            <c:idx val="9"/>
+            <c:spPr>
+              <a:solidFill>
+                <a:srgbClr val="8DA8FF"/>
+              </a:solidFill>
+              <a:ln>
+                <a:solidFill>
+                  <a:srgbClr val="FFFFFF"/>
+                </a:solidFill>
+              </a:ln>
+            </c:spPr>
+          </c:dPt>
+          <c:dPt>
+            <c:idx val="10"/>
+            <c:spPr>
+              <a:solidFill>
+                <a:srgbClr val="8DA8FF"/>
+              </a:solidFill>
+              <a:ln>
+                <a:solidFill>
+                  <a:srgbClr val="FFFFFF"/>
+                </a:solidFill>
+              </a:ln>
+            </c:spPr>
+          </c:dPt>
+          <c:dPt>
+            <c:idx val="11"/>
+            <c:spPr>
+              <a:solidFill>
+                <a:srgbClr val="8DA8FF"/>
+              </a:solidFill>
+              <a:ln>
+                <a:solidFill>
+                  <a:srgbClr val="FFFFFF"/>
+                </a:solidFill>
+              </a:ln>
+            </c:spPr>
+          </c:dPt>
+          <c:dPt>
+            <c:idx val="12"/>
+            <c:spPr>
+              <a:solidFill>
+                <a:srgbClr val="8DA8FF"/>
+              </a:solidFill>
+              <a:ln>
+                <a:solidFill>
+                  <a:srgbClr val="FFFFFF"/>
+                </a:solidFill>
+              </a:ln>
+            </c:spPr>
+          </c:dPt>
+          <c:dPt>
+            <c:idx val="13"/>
+            <c:spPr>
+              <a:solidFill>
+                <a:srgbClr val="8DA8FF"/>
+              </a:solidFill>
+              <a:ln>
+                <a:solidFill>
+                  <a:srgbClr val="FFFFFF"/>
+                </a:solidFill>
+              </a:ln>
+            </c:spPr>
+          </c:dPt>
+          <c:dPt>
+            <c:idx val="14"/>
+            <c:spPr>
+              <a:solidFill>
+                <a:srgbClr val="8DA8FF"/>
+              </a:solidFill>
+              <a:ln>
+                <a:solidFill>
+                  <a:srgbClr val="FFFFFF"/>
+                </a:solidFill>
+              </a:ln>
+            </c:spPr>
+          </c:dPt>
+          <c:dPt>
+            <c:idx val="15"/>
+            <c:spPr>
+              <a:solidFill>
+                <a:srgbClr val="8DA8FF"/>
+              </a:solidFill>
+              <a:ln>
+                <a:solidFill>
+                  <a:srgbClr val="FFFFFF"/>
+                </a:solidFill>
+              </a:ln>
+            </c:spPr>
+          </c:dPt>
+          <c:dLbls>
+            <c:dLbl>
+              <c:idx val="0"/>
+              <c:tx>
+                <c:rich>
+                  <a:bodyPr/>
+                  <a:lstStyle/>
+                  <a:p>
+                    <a:r>
+                      <a:t>Tensorflow</a:t>
+                    </a:r>
+                  </a:p>
+                </c:rich>
+              </c:tx>
+              <c:showLegendKey val="0"/>
+              <c:showVal val="1"/>
+              <c:showCatName val="0"/>
+              <c:showSerName val="0"/>
+              <c:showPercent val="0"/>
+              <c:showBubbleSize val="0"/>
+            </c:dLbl>
+            <c:dLbl>
+              <c:idx val="1"/>
+              <c:tx>
+                <c:rich>
+                  <a:bodyPr/>
+                  <a:lstStyle/>
+                  <a:p>
+                    <a:r>
+                      <a:t>Google V8</a:t>
+                    </a:r>
+                  </a:p>
+                </c:rich>
+              </c:tx>
+              <c:showLegendKey val="0"/>
+              <c:showVal val="1"/>
+              <c:showCatName val="0"/>
+              <c:showSerName val="0"/>
+              <c:showPercent val="0"/>
+              <c:showBubbleSize val="0"/>
+            </c:dLbl>
+            <c:dLbl>
+              <c:idx val="2"/>
+              <c:tx>
+                <c:rich>
+                  <a:bodyPr/>
+                  <a:lstStyle/>
+                  <a:p>
+                    <a:r>
+                      <a:t>PostgreSQL</a:t>
+                    </a:r>
+                  </a:p>
+                </c:rich>
+              </c:tx>
+              <c:showLegendKey val="0"/>
+              <c:showVal val="1"/>
+              <c:showCatName val="0"/>
+              <c:showSerName val="0"/>
+              <c:showPercent val="0"/>
+              <c:showBubbleSize val="0"/>
+            </c:dLbl>
+            <c:dLbl>
+              <c:idx val="3"/>
+              <c:tx>
+                <c:rich>
+                  <a:bodyPr/>
+                  <a:lstStyle/>
+                  <a:p>
+                    <a:r>
+                      <a:t>Systemd</a:t>
+                    </a:r>
+                  </a:p>
+                </c:rich>
+              </c:tx>
+              <c:showLegendKey val="0"/>
+              <c:showVal val="1"/>
+              <c:showCatName val="0"/>
+              <c:showSerName val="0"/>
+              <c:showPercent val="0"/>
+              <c:showBubbleSize val="0"/>
+            </c:dLbl>
+            <c:dLbl>
+              <c:idx val="4"/>
+              <c:tx>
+                <c:rich>
+                  <a:bodyPr/>
+                  <a:lstStyle/>
+                  <a:p>
+                    <a:r>
+                      <a:t>GIT</a:t>
+                    </a:r>
+                  </a:p>
+                </c:rich>
+              </c:tx>
+              <c:showLegendKey val="0"/>
+              <c:showVal val="1"/>
+              <c:showCatName val="0"/>
+              <c:showSerName val="0"/>
+              <c:showPercent val="0"/>
+              <c:showBubbleSize val="0"/>
+            </c:dLbl>
+            <c:dLbl>
+              <c:idx val="5"/>
+              <c:tx>
+                <c:rich>
+                  <a:bodyPr/>
+                  <a:lstStyle/>
+                  <a:p>
+                    <a:r>
+                      <a:t>Kafka</a:t>
+                    </a:r>
+                  </a:p>
+                </c:rich>
+              </c:tx>
+              <c:showLegendKey val="0"/>
+              <c:showVal val="1"/>
+              <c:showCatName val="0"/>
+              <c:showSerName val="0"/>
+              <c:showPercent val="0"/>
+              <c:showBubbleSize val="0"/>
+            </c:dLbl>
+            <c:dLbl>
+              <c:idx val="6"/>
+              <c:tx>
+                <c:rich>
+                  <a:bodyPr/>
+                  <a:lstStyle/>
+                  <a:p>
+                    <a:r>
+                      <a:t>Visual Studio Code</a:t>
+                    </a:r>
+                  </a:p>
+                </c:rich>
+              </c:tx>
+              <c:showLegendKey val="0"/>
+              <c:showVal val="1"/>
+              <c:showCatName val="0"/>
+              <c:showSerName val="0"/>
+              <c:showPercent val="0"/>
+              <c:showBubbleSize val="0"/>
+            </c:dLbl>
+            <c:dLbl>
+              <c:idx val="7"/>
+              <c:tx>
+                <c:rich>
+                  <a:bodyPr/>
+                  <a:lstStyle/>
+                  <a:p>
+                    <a:r>
+                      <a:t>JRuby</a:t>
+                    </a:r>
+                  </a:p>
+                </c:rich>
+              </c:tx>
+              <c:showLegendKey val="0"/>
+              <c:showVal val="1"/>
+              <c:showCatName val="0"/>
+              <c:showSerName val="0"/>
+              <c:showPercent val="0"/>
+              <c:showBubbleSize val="0"/>
+            </c:dLbl>
+            <c:dLbl>
+              <c:idx val="8"/>
+              <c:tx>
+                <c:rich>
+                  <a:bodyPr/>
+                  <a:lstStyle/>
+                  <a:p>
+                    <a:r>
+                      <a:t>Golang</a:t>
+                    </a:r>
+                  </a:p>
+                </c:rich>
+              </c:tx>
+              <c:showLegendKey val="0"/>
+              <c:showVal val="1"/>
+              <c:showCatName val="0"/>
+              <c:showSerName val="0"/>
+              <c:showPercent val="0"/>
+              <c:showBubbleSize val="0"/>
+            </c:dLbl>
+            <c:dLbl>
+              <c:idx val="9"/>
+              <c:tx>
+                <c:rich>
+                  <a:bodyPr/>
+                  <a:lstStyle/>
+                  <a:p>
+                    <a:r>
+                      <a:t>Angular</a:t>
+                    </a:r>
+                  </a:p>
+                </c:rich>
+              </c:tx>
+              <c:showLegendKey val="0"/>
+              <c:showVal val="1"/>
+              <c:showCatName val="0"/>
+              <c:showSerName val="0"/>
+              <c:showPercent val="0"/>
+              <c:showBubbleSize val="0"/>
+            </c:dLbl>
+            <c:dLbl>
+              <c:idx val="10"/>
+              <c:tx>
+                <c:rich>
+                  <a:bodyPr/>
+                  <a:lstStyle/>
+                  <a:p>
+                    <a:r>
+                      <a:t>NodeJS</a:t>
+                    </a:r>
+                  </a:p>
+                </c:rich>
+              </c:tx>
+              <c:showLegendKey val="0"/>
+              <c:showVal val="1"/>
+              <c:showCatName val="0"/>
+              <c:showSerName val="0"/>
+              <c:showPercent val="0"/>
+              <c:showBubbleSize val="0"/>
+            </c:dLbl>
+            <c:dLbl>
+              <c:idx val="11"/>
+              <c:tx>
+                <c:rich>
+                  <a:bodyPr/>
+                  <a:lstStyle/>
+                  <a:p>
+                    <a:r>
+                      <a:t>React</a:t>
+                    </a:r>
+                  </a:p>
+                </c:rich>
+              </c:tx>
+              <c:showLegendKey val="0"/>
+              <c:showVal val="1"/>
+              <c:showCatName val="0"/>
+              <c:showSerName val="0"/>
+              <c:showPercent val="0"/>
+              <c:showBubbleSize val="0"/>
+            </c:dLbl>
+            <c:dLbl>
+              <c:idx val="12"/>
+              <c:tx>
+                <c:rich>
+                  <a:bodyPr/>
+                  <a:lstStyle/>
+                  <a:p>
+                    <a:r>
+                      <a:t>Android-core</a:t>
+                    </a:r>
+                  </a:p>
+                </c:rich>
+              </c:tx>
+              <c:showLegendKey val="0"/>
+              <c:showVal val="1"/>
+              <c:showCatName val="0"/>
+              <c:showSerName val="0"/>
+              <c:showPercent val="0"/>
+              <c:showBubbleSize val="0"/>
+            </c:dLbl>
+            <c:dLbl>
+              <c:idx val="13"/>
+              <c:tx>
+                <c:rich>
+                  <a:bodyPr/>
+                  <a:lstStyle/>
+                  <a:p>
+                    <a:r>
+                      <a:t>Electron</a:t>
+                    </a:r>
+                  </a:p>
+                </c:rich>
+              </c:tx>
+              <c:showLegendKey val="0"/>
+              <c:showVal val="1"/>
+              <c:showCatName val="0"/>
+              <c:showSerName val="0"/>
+              <c:showPercent val="0"/>
+              <c:showBubbleSize val="0"/>
+            </c:dLbl>
+            <c:dLbl>
+              <c:idx val="14"/>
+              <c:tx>
+                <c:rich>
+                  <a:bodyPr/>
+                  <a:lstStyle/>
+                  <a:p>
+                    <a:r>
+                      <a:t>Bazel</a:t>
+                    </a:r>
+                  </a:p>
+                </c:rich>
+              </c:tx>
+              <c:showLegendKey val="0"/>
+              <c:showVal val="1"/>
+              <c:showCatName val="0"/>
+              <c:showSerName val="0"/>
+              <c:showPercent val="0"/>
+              <c:showBubbleSize val="0"/>
+            </c:dLbl>
+            <c:dLbl>
+              <c:idx val="15"/>
+              <c:tx>
+                <c:rich>
+                  <a:bodyPr/>
+                  <a:lstStyle/>
+                  <a:p>
+                    <a:r>
+                      <a:t>utPLSQL</a:t>
+                    </a:r>
+                  </a:p>
+                </c:rich>
+              </c:tx>
+              <c:showLegendKey val="0"/>
+              <c:showVal val="1"/>
+              <c:showCatName val="0"/>
+              <c:showSerName val="0"/>
+              <c:showPercent val="0"/>
+              <c:showBubbleSize val="0"/>
+            </c:dLbl>
+            <c:showLegendKey val="0"/>
+            <c:showVal val="0"/>
+            <c:showCatName val="0"/>
+            <c:showSerName val="0"/>
+            <c:showPercent val="0"/>
+            <c:showBubbleSize val="0"/>
+            <c:showLeaderLines val="1"/>
+          </c:dLbls>
+          <c:xVal>
+            <c:numRef>
+              <c:f>Sheet1!$A$27:$A$42</c:f>
+              <c:numCache>
+                <c:formatCode>General</c:formatCode>
+                <c:ptCount val="16"/>
+                <c:pt idx="0">
+                  <c:v>260.16236712396966</c:v>
+                </c:pt>
+                <c:pt idx="1">
+                  <c:v>79.72585</c:v>
+                </c:pt>
+                <c:pt idx="2">
+                  <c:v>90.58979</c:v>
+                </c:pt>
+                <c:pt idx="3">
+                  <c:v>69.70323</c:v>
+                </c:pt>
+                <c:pt idx="4">
+                  <c:v>24.45168</c:v>
+                </c:pt>
+                <c:pt idx="5">
+                  <c:v>17.91134</c:v>
+                </c:pt>
+                <c:pt idx="6">
+                  <c:v>18.8132</c:v>
+                </c:pt>
+                <c:pt idx="7">
+                  <c:v>18.75342</c:v>
+                </c:pt>
+                <c:pt idx="8">
+                  <c:v>14.59827</c:v>
+                </c:pt>
+                <c:pt idx="9">
+                  <c:v>10.1496</c:v>
+                </c:pt>
+                <c:pt idx="10">
+                  <c:v>8.29559</c:v>
+                </c:pt>
+                <c:pt idx="11">
+                  <c:v>11.9119</c:v>
+                </c:pt>
+                <c:pt idx="12">
+                  <c:v>4.87776</c:v>
+                </c:pt>
+                <c:pt idx="13">
+                  <c:v>3.16419</c:v>
+                </c:pt>
+                <c:pt idx="14">
+                  <c:v>1.5314</c:v>
+                </c:pt>
+                <c:pt idx="15">
+                  <c:v>0.63175</c:v>
+                </c:pt>
+              </c:numCache>
+            </c:numRef>
+          </c:xVal>
+          <c:yVal>
+            <c:numRef>
+              <c:f>Sheet1!$B$27:$B$42</c:f>
+              <c:numCache>
+                <c:formatCode>General</c:formatCode>
+                <c:ptCount val="16"/>
+                <c:pt idx="0">
+                  <c:v>75.58706</c:v>
+                </c:pt>
+                <c:pt idx="1">
+                  <c:v>82.44632</c:v>
+                </c:pt>
+                <c:pt idx="2">
+                  <c:v>103.80727</c:v>
+                </c:pt>
+                <c:pt idx="3">
+                  <c:v>104.71228</c:v>
+                </c:pt>
+                <c:pt idx="4">
+                  <c:v>96.96495</c:v>
+                </c:pt>
+                <c:pt idx="5">
+                  <c:v>78.41279</c:v>
+                </c:pt>
+                <c:pt idx="6">
+                  <c:v>41.75224</c:v>
+                </c:pt>
+                <c:pt idx="7">
+                  <c:v>86.79028</c:v>
+                </c:pt>
+                <c:pt idx="8">
+                  <c:v>87.69346</c:v>
+                </c:pt>
+                <c:pt idx="9">
+                  <c:v>58.07822</c:v>
+                </c:pt>
+                <c:pt idx="10">
+                  <c:v>49.65581</c:v>
+                </c:pt>
+                <c:pt idx="11">
+                  <c:v>38.44903</c:v>
+                </c:pt>
+                <c:pt idx="12">
+                  <c:v>55.28725</c:v>
+                </c:pt>
+                <c:pt idx="13">
+                  <c:v>27.19237</c:v>
+                </c:pt>
+                <c:pt idx="14">
+                  <c:v>35.19517</c:v>
+                </c:pt>
+                <c:pt idx="15">
+                  <c:v>73.8148</c:v>
+                </c:pt>
+              </c:numCache>
+            </c:numRef>
+          </c:yVal>
+          <c:bubbleSize>
+            <c:numRef>
+              <c:f>Sheet1!$C$27:$C$42</c:f>
+              <c:numCache>
+                <c:formatCode>General</c:formatCode>
+                <c:ptCount val="16"/>
+                <c:pt idx="0">
+                  <c:v>260.16236712396966</c:v>
+                </c:pt>
+                <c:pt idx="1">
+                  <c:v>159.19123441612817</c:v>
+                </c:pt>
+                <c:pt idx="2">
+                  <c:v>100.97631859769871</c:v>
+                </c:pt>
+                <c:pt idx="3">
+                  <c:v>81.62158917682852</c:v>
+                </c:pt>
+                <c:pt idx="4">
+                  <c:v>36.8308447252819</c:v>
+                </c:pt>
+                <c:pt idx="5">
+                  <c:v>42.6041631944445</c:v>
+                </c:pt>
+                <c:pt idx="6">
+                  <c:v>77.33298297129444</c:v>
+                </c:pt>
+                <c:pt idx="7">
+                  <c:v>36.35964730933028</c:v>
+                </c:pt>
+                <c:pt idx="8">
+                  <c:v>25.287808219178057</c:v>
+                </c:pt>
+                <c:pt idx="9">
+                  <c:v>32.726012046993276</c:v>
+                </c:pt>
+                <c:pt idx="10">
+                  <c:v>34.19510036935046</c:v>
+                </c:pt>
+                <c:pt idx="11">
+                  <c:v>36.73600159299017</c:v>
+                </c:pt>
+                <c:pt idx="12">
+                  <c:v>17.05715701219506</c:v>
+                </c:pt>
+                <c:pt idx="13">
+                  <c:v>12.957363313311653</c:v>
+                </c:pt>
+                <c:pt idx="14">
+                  <c:v>6.740096036585361</c:v>
+                </c:pt>
+                <c:pt idx="15">
+                  <c:v>1.7355555555555553</c:v>
+                </c:pt>
+              </c:numCache>
+            </c:numRef>
+          </c:bubbleSize>
+          <c:bubble3D val="0"/>
+          <c:extLst>
+            <c:ext xmlns:c16="http://schemas.microsoft.com/office/drawing/2014/chart" uri="{C3380CC4-5D6E-409C-BE32-E72D297353CC}">
+              <c16:uniqueId val="{00000000-D4B8-B94C-91E4-2DDF998DBB50}"/>
+            </c:ext>
+          </c:extLst>
+        </c:ser>
+        <c:ser>
+          <c:idx val="3"/>
+          <c:order val="3"/>
+          <c:tx>
+            <c:strRef>
+              <c:f>Sheet1!$B$44</c:f>
+              <c:strCache>
+                <c:ptCount val="1"/>
+                <c:pt idx="0">
+                  <c:v>Low</c:v>
+                </c:pt>
+              </c:strCache>
+            </c:strRef>
+          </c:tx>
+          <c:spPr>
+            <a:solidFill>
+              <a:schemeClr val="accent1"/>
+            </a:solidFill>
+            <a:ln w="19050">
+              <a:noFill/>
+            </a:ln>
+            <a:effectLst/>
+          </c:spPr>
+          <c:invertIfNegative val="0"/>
+          <c:dPt>
+            <c:idx val="0"/>
+            <c:spPr>
+              <a:solidFill>
+                <a:srgbClr val="DBE1FF"/>
+              </a:solidFill>
+              <a:ln>
+                <a:solidFill>
+                  <a:srgbClr val="FFFFFF"/>
+                </a:solidFill>
+              </a:ln>
+            </c:spPr>
+          </c:dPt>
+          <c:dPt>
+            <c:idx val="1"/>
+            <c:spPr>
+              <a:solidFill>
+                <a:srgbClr val="DBE1FF"/>
+              </a:solidFill>
+              <a:ln>
+                <a:solidFill>
+                  <a:srgbClr val="FFFFFF"/>
+                </a:solidFill>
+              </a:ln>
+            </c:spPr>
+          </c:dPt>
+          <c:dPt>
+            <c:idx val="2"/>
+            <c:spPr>
+              <a:solidFill>
+                <a:srgbClr val="DBE1FF"/>
+              </a:solidFill>
+              <a:ln>
+                <a:solidFill>
+                  <a:srgbClr val="FFFFFF"/>
+                </a:solidFill>
+              </a:ln>
+            </c:spPr>
+          </c:dPt>
+          <c:dPt>
+            <c:idx val="3"/>
+            <c:spPr>
+              <a:solidFill>
+                <a:srgbClr val="DBE1FF"/>
+              </a:solidFill>
+              <a:ln>
+                <a:solidFill>
+                  <a:srgbClr val="FFFFFF"/>
+                </a:solidFill>
+              </a:ln>
+            </c:spPr>
+          </c:dPt>
+          <c:dPt>
+            <c:idx val="4"/>
+            <c:spPr>
+              <a:solidFill>
+                <a:srgbClr val="DBE1FF"/>
+              </a:solidFill>
+              <a:ln>
+                <a:solidFill>
+                  <a:srgbClr val="FFFFFF"/>
+                </a:solidFill>
+              </a:ln>
+            </c:spPr>
+          </c:dPt>
+          <c:dPt>
+            <c:idx val="5"/>
+            <c:spPr>
+              <a:solidFill>
+                <a:srgbClr val="DBE1FF"/>
+              </a:solidFill>
+              <a:ln>
+                <a:solidFill>
+                  <a:srgbClr val="FFFFFF"/>
+                </a:solidFill>
+              </a:ln>
+            </c:spPr>
+          </c:dPt>
+          <c:dPt>
+            <c:idx val="6"/>
+            <c:spPr>
+              <a:solidFill>
+                <a:srgbClr val="DBE1FF"/>
+              </a:solidFill>
+              <a:ln>
+                <a:solidFill>
+                  <a:srgbClr val="FFFFFF"/>
+                </a:solidFill>
+              </a:ln>
+            </c:spPr>
+          </c:dPt>
+          <c:dPt>
+            <c:idx val="7"/>
+            <c:spPr>
+              <a:solidFill>
+                <a:srgbClr val="DBE1FF"/>
+              </a:solidFill>
+              <a:ln>
+                <a:solidFill>
+                  <a:srgbClr val="FFFFFF"/>
+                </a:solidFill>
+              </a:ln>
+            </c:spPr>
+          </c:dPt>
+          <c:dPt>
+            <c:idx val="8"/>
+            <c:spPr>
+              <a:solidFill>
+                <a:srgbClr val="DBE1FF"/>
+              </a:solidFill>
+              <a:ln>
+                <a:solidFill>
+                  <a:srgbClr val="FFFFFF"/>
+                </a:solidFill>
+              </a:ln>
+            </c:spPr>
+          </c:dPt>
+          <c:dPt>
+            <c:idx val="9"/>
+            <c:spPr>
+              <a:solidFill>
+                <a:srgbClr val="DBE1FF"/>
+              </a:solidFill>
+              <a:ln>
+                <a:solidFill>
+                  <a:srgbClr val="FFFFFF"/>
+                </a:solidFill>
+              </a:ln>
+            </c:spPr>
+          </c:dPt>
+          <c:dPt>
+            <c:idx val="10"/>
+            <c:spPr>
+              <a:solidFill>
+                <a:srgbClr val="DBE1FF"/>
+              </a:solidFill>
+              <a:ln>
+                <a:solidFill>
+                  <a:srgbClr val="FFFFFF"/>
+                </a:solidFill>
+              </a:ln>
+            </c:spPr>
+          </c:dPt>
+          <c:dPt>
+            <c:idx val="11"/>
+            <c:spPr>
+              <a:solidFill>
+                <a:srgbClr val="DBE1FF"/>
+              </a:solidFill>
+              <a:ln>
+                <a:solidFill>
+                  <a:srgbClr val="FFFFFF"/>
+                </a:solidFill>
+              </a:ln>
+            </c:spPr>
+          </c:dPt>
+          <c:dPt>
+            <c:idx val="12"/>
+            <c:spPr>
+              <a:solidFill>
+                <a:srgbClr val="DBE1FF"/>
+              </a:solidFill>
+              <a:ln>
+                <a:solidFill>
+                  <a:srgbClr val="FFFFFF"/>
+                </a:solidFill>
+              </a:ln>
+            </c:spPr>
+          </c:dPt>
+          <c:dPt>
+            <c:idx val="13"/>
+            <c:spPr>
+              <a:solidFill>
+                <a:srgbClr val="DBE1FF"/>
+              </a:solidFill>
+              <a:ln>
+                <a:solidFill>
+                  <a:srgbClr val="FFFFFF"/>
+                </a:solidFill>
+              </a:ln>
+            </c:spPr>
+          </c:dPt>
+          <c:dPt>
+            <c:idx val="14"/>
+            <c:spPr>
+              <a:solidFill>
+                <a:srgbClr val="DBE1FF"/>
+              </a:solidFill>
+              <a:ln>
+                <a:solidFill>
+                  <a:srgbClr val="FFFFFF"/>
+                </a:solidFill>
+              </a:ln>
+            </c:spPr>
+          </c:dPt>
+          <c:dPt>
+            <c:idx val="15"/>
+            <c:spPr>
+              <a:solidFill>
+                <a:srgbClr val="DBE1FF"/>
+              </a:solidFill>
+              <a:ln>
+                <a:solidFill>
+                  <a:srgbClr val="FFFFFF"/>
+                </a:solidFill>
+              </a:ln>
+            </c:spPr>
+          </c:dPt>
+          <c:dLbls>
+            <c:dLbl>
+              <c:idx val="0"/>
+              <c:tx>
+                <c:rich>
+                  <a:bodyPr/>
+                  <a:lstStyle/>
+                  <a:p>
+                    <a:r>
+                      <a:t>Clickhouse</a:t>
+                    </a:r>
+                  </a:p>
+                </c:rich>
+              </c:tx>
+              <c:showLegendKey val="0"/>
+              <c:showVal val="1"/>
+              <c:showCatName val="0"/>
+              <c:showSerName val="0"/>
+              <c:showPercent val="0"/>
+              <c:showBubbleSize val="0"/>
+            </c:dLbl>
+            <c:dLbl>
+              <c:idx val="1"/>
+              <c:tx>
+                <c:rich>
+                  <a:bodyPr/>
+                  <a:lstStyle/>
+                  <a:p>
+                    <a:r>
+                      <a:t>Brave-core</a:t>
+                    </a:r>
+                  </a:p>
+                </c:rich>
+              </c:tx>
+              <c:showLegendKey val="0"/>
+              <c:showVal val="1"/>
+              <c:showCatName val="0"/>
+              <c:showSerName val="0"/>
+              <c:showPercent val="0"/>
+              <c:showBubbleSize val="0"/>
+            </c:dLbl>
+            <c:dLbl>
+              <c:idx val="2"/>
+              <c:tx>
+                <c:rich>
+                  <a:bodyPr/>
+                  <a:lstStyle/>
+                  <a:p>
+                    <a:r>
+                      <a:t>Outsystems-demo</a:t>
+                    </a:r>
+                  </a:p>
+                </c:rich>
+              </c:tx>
+              <c:showLegendKey val="0"/>
+              <c:showVal val="1"/>
+              <c:showCatName val="0"/>
+              <c:showSerName val="0"/>
+              <c:showPercent val="0"/>
+              <c:showBubbleSize val="0"/>
+            </c:dLbl>
+            <c:dLbl>
+              <c:idx val="3"/>
+              <c:tx>
+                <c:rich>
+                  <a:bodyPr/>
+                  <a:lstStyle/>
+                  <a:p>
+                    <a:r>
+                      <a:t>Umbraco-cms</a:t>
+                    </a:r>
+                  </a:p>
+                </c:rich>
+              </c:tx>
+              <c:showLegendKey val="0"/>
+              <c:showVal val="1"/>
+              <c:showCatName val="0"/>
+              <c:showSerName val="0"/>
+              <c:showPercent val="0"/>
+              <c:showBubbleSize val="0"/>
+            </c:dLbl>
+            <c:dLbl>
+              <c:idx val="4"/>
+              <c:tx>
+                <c:rich>
+                  <a:bodyPr/>
+                  <a:lstStyle/>
+                  <a:p>
+                    <a:r>
+                      <a:t>Solana</a:t>
+                    </a:r>
+                  </a:p>
+                </c:rich>
+              </c:tx>
+              <c:showLegendKey val="0"/>
+              <c:showVal val="1"/>
+              <c:showCatName val="0"/>
+              <c:showSerName val="0"/>
+              <c:showPercent val="0"/>
+              <c:showBubbleSize val="0"/>
+            </c:dLbl>
+            <c:dLbl>
+              <c:idx val="5"/>
+              <c:tx>
+                <c:rich>
+                  <a:bodyPr/>
+                  <a:lstStyle/>
+                  <a:p>
+                    <a:r>
+                      <a:t>Twitter Algorithm</a:t>
+                    </a:r>
+                  </a:p>
+                </c:rich>
+              </c:tx>
+              <c:showLegendKey val="0"/>
+              <c:showVal val="1"/>
+              <c:showCatName val="0"/>
+              <c:showSerName val="0"/>
+              <c:showPercent val="0"/>
+              <c:showBubbleSize val="0"/>
+            </c:dLbl>
+            <c:dLbl>
+              <c:idx val="6"/>
+              <c:tx>
+                <c:rich>
+                  <a:bodyPr/>
+                  <a:lstStyle/>
+                  <a:p>
+                    <a:r>
+                      <a:t>Google Guava</a:t>
+                    </a:r>
+                  </a:p>
+                </c:rich>
+              </c:tx>
+              <c:showLegendKey val="0"/>
+              <c:showVal val="1"/>
+              <c:showCatName val="0"/>
+              <c:showSerName val="0"/>
+              <c:showPercent val="0"/>
+              <c:showBubbleSize val="0"/>
+            </c:dLbl>
+            <c:dLbl>
+              <c:idx val="7"/>
+              <c:tx>
+                <c:rich>
+                  <a:bodyPr/>
+                  <a:lstStyle/>
+                  <a:p>
+                    <a:r>
+                      <a:t>Bitcoin</a:t>
+                    </a:r>
+                  </a:p>
+                </c:rich>
+              </c:tx>
+              <c:showLegendKey val="0"/>
+              <c:showVal val="1"/>
+              <c:showCatName val="0"/>
+              <c:showSerName val="0"/>
+              <c:showPercent val="0"/>
+              <c:showBubbleSize val="0"/>
+            </c:dLbl>
+            <c:dLbl>
+              <c:idx val="8"/>
+              <c:tx>
+                <c:rich>
+                  <a:bodyPr/>
+                  <a:lstStyle/>
+                  <a:p>
+                    <a:r>
+                      <a:t>Struts</a:t>
+                    </a:r>
+                  </a:p>
+                </c:rich>
+              </c:tx>
+              <c:showLegendKey val="0"/>
+              <c:showVal val="1"/>
+              <c:showCatName val="0"/>
+              <c:showSerName val="0"/>
+              <c:showPercent val="0"/>
+              <c:showBubbleSize val="0"/>
+            </c:dLbl>
+            <c:dLbl>
+              <c:idx val="9"/>
+              <c:tx>
+                <c:rich>
+                  <a:bodyPr/>
+                  <a:lstStyle/>
+                  <a:p>
+                    <a:r>
+                      <a:t>abapGit</a:t>
+                    </a:r>
+                  </a:p>
+                </c:rich>
+              </c:tx>
+              <c:showLegendKey val="0"/>
+              <c:showVal val="1"/>
+              <c:showCatName val="0"/>
+              <c:showSerName val="0"/>
+              <c:showPercent val="0"/>
+              <c:showBubbleSize val="0"/>
+            </c:dLbl>
+            <c:dLbl>
+              <c:idx val="10"/>
+              <c:tx>
+                <c:rich>
+                  <a:bodyPr/>
+                  <a:lstStyle/>
+                  <a:p>
+                    <a:r>
+                      <a:t>Curl</a:t>
+                    </a:r>
+                  </a:p>
+                </c:rich>
+              </c:tx>
+              <c:showLegendKey val="0"/>
+              <c:showVal val="1"/>
+              <c:showCatName val="0"/>
+              <c:showSerName val="0"/>
+              <c:showPercent val="0"/>
+              <c:showBubbleSize val="0"/>
+            </c:dLbl>
+            <c:dLbl>
+              <c:idx val="11"/>
+              <c:tx>
+                <c:rich>
+                  <a:bodyPr/>
+                  <a:lstStyle/>
+                  <a:p>
+                    <a:r>
+                      <a:t>Webpack</a:t>
+                    </a:r>
+                  </a:p>
+                </c:rich>
+              </c:tx>
+              <c:showLegendKey val="0"/>
+              <c:showVal val="1"/>
+              <c:showCatName val="0"/>
+              <c:showSerName val="0"/>
+              <c:showPercent val="0"/>
+              <c:showBubbleSize val="0"/>
+            </c:dLbl>
+            <c:dLbl>
+              <c:idx val="12"/>
+              <c:tx>
+                <c:rich>
+                  <a:bodyPr/>
+                  <a:lstStyle/>
+                  <a:p>
+                    <a:r>
+                      <a:t>Rasa</a:t>
+                    </a:r>
+                  </a:p>
+                </c:rich>
+              </c:tx>
+              <c:showLegendKey val="0"/>
+              <c:showVal val="1"/>
+              <c:showCatName val="0"/>
+              <c:showSerName val="0"/>
+              <c:showPercent val="0"/>
+              <c:showBubbleSize val="0"/>
+            </c:dLbl>
+            <c:dLbl>
+              <c:idx val="13"/>
+              <c:tx>
+                <c:rich>
+                  <a:bodyPr/>
+                  <a:lstStyle/>
+                  <a:p>
+                    <a:r>
+                      <a:t>Vscode-python</a:t>
+                    </a:r>
+                  </a:p>
+                </c:rich>
+              </c:tx>
+              <c:showLegendKey val="0"/>
+              <c:showVal val="1"/>
+              <c:showCatName val="0"/>
+              <c:showSerName val="0"/>
+              <c:showPercent val="0"/>
+              <c:showBubbleSize val="0"/>
+            </c:dLbl>
+            <c:dLbl>
+              <c:idx val="14"/>
+              <c:tx>
+                <c:rich>
+                  <a:bodyPr/>
+                  <a:lstStyle/>
+                  <a:p>
+                    <a:r>
+                      <a:t>Facebookyoga</a:t>
+                    </a:r>
+                  </a:p>
+                </c:rich>
+              </c:tx>
+              <c:showLegendKey val="0"/>
+              <c:showVal val="1"/>
+              <c:showCatName val="0"/>
+              <c:showSerName val="0"/>
+              <c:showPercent val="0"/>
+              <c:showBubbleSize val="0"/>
+            </c:dLbl>
+            <c:dLbl>
+              <c:idx val="15"/>
+              <c:tx>
+                <c:rich>
+                  <a:bodyPr/>
+                  <a:lstStyle/>
+                  <a:p>
+                    <a:r>
+                      <a:t>Return to workplace</a:t>
+                    </a:r>
+                  </a:p>
+                </c:rich>
+              </c:tx>
+              <c:showLegendKey val="0"/>
+              <c:showVal val="1"/>
+              <c:showCatName val="0"/>
+              <c:showSerName val="0"/>
+              <c:showPercent val="0"/>
+              <c:showBubbleSize val="0"/>
+            </c:dLbl>
+            <c:showLegendKey val="0"/>
+            <c:showVal val="0"/>
+            <c:showCatName val="0"/>
+            <c:showSerName val="0"/>
+            <c:showPercent val="0"/>
+            <c:showBubbleSize val="0"/>
+            <c:showLeaderLines val="1"/>
+          </c:dLbls>
+          <c:xVal>
+            <c:numRef>
+              <c:f>Sheet1!$A$45:$A$60</c:f>
+              <c:numCache>
+                <c:formatCode>General</c:formatCode>
+                <c:ptCount val="16"/>
+                <c:pt idx="0">
+                  <c:v>56.01164</c:v>
+                </c:pt>
+                <c:pt idx="1">
+                  <c:v>28.55415</c:v>
+                </c:pt>
+                <c:pt idx="2">
+                  <c:v>70.96459334320562</c:v>
+                </c:pt>
+                <c:pt idx="3">
+                  <c:v>11.14414</c:v>
+                </c:pt>
+                <c:pt idx="4">
+                  <c:v>34.84491</c:v>
+                </c:pt>
+                <c:pt idx="5">
+                  <c:v>39.71483466072114</c:v>
+                </c:pt>
+                <c:pt idx="6">
+                  <c:v>5.23083</c:v>
+                </c:pt>
+                <c:pt idx="7">
+                  <c:v>13.05913</c:v>
+                </c:pt>
+                <c:pt idx="8">
+                  <c:v>4.18054</c:v>
+                </c:pt>
+                <c:pt idx="9">
+                  <c:v>14.616503703365735</c:v>
+                </c:pt>
+                <c:pt idx="10">
+                  <c:v>8.67078</c:v>
+                </c:pt>
+                <c:pt idx="11">
+                  <c:v>2.68415</c:v>
+                </c:pt>
+                <c:pt idx="12">
+                  <c:v>3.52922</c:v>
+                </c:pt>
+                <c:pt idx="13">
+                  <c:v>1.31425</c:v>
+                </c:pt>
+                <c:pt idx="14">
+                  <c:v>1.03302</c:v>
+                </c:pt>
+                <c:pt idx="15">
+                  <c:v>0.91724</c:v>
+                </c:pt>
+              </c:numCache>
+            </c:numRef>
+          </c:xVal>
+          <c:yVal>
+            <c:numRef>
+              <c:f>Sheet1!$B$45:$B$60</c:f>
+              <c:numCache>
+                <c:formatCode>General</c:formatCode>
+                <c:ptCount val="16"/>
+                <c:pt idx="0">
+                  <c:v>79.38283</c:v>
+                </c:pt>
+                <c:pt idx="1">
+                  <c:v>42.09434</c:v>
+                </c:pt>
+                <c:pt idx="2">
+                  <c:v>32.72942</c:v>
+                </c:pt>
+                <c:pt idx="3">
+                  <c:v>37.41208</c:v>
+                </c:pt>
+                <c:pt idx="4">
+                  <c:v>96.68597</c:v>
+                </c:pt>
+                <c:pt idx="5">
+                  <c:v>43.72778</c:v>
+                </c:pt>
+                <c:pt idx="6">
+                  <c:v>27.04173</c:v>
+                </c:pt>
+                <c:pt idx="7">
+                  <c:v>76.52871</c:v>
+                </c:pt>
+                <c:pt idx="8">
+                  <c:v>66.25977</c:v>
+                </c:pt>
+                <c:pt idx="9">
+                  <c:v>71.13314</c:v>
+                </c:pt>
+                <c:pt idx="10">
+                  <c:v>82.55915</c:v>
+                </c:pt>
+                <c:pt idx="11">
+                  <c:v>59.37446</c:v>
+                </c:pt>
+                <c:pt idx="12">
+                  <c:v>83.75028</c:v>
+                </c:pt>
+                <c:pt idx="13">
+                  <c:v>39.9342</c:v>
+                </c:pt>
+                <c:pt idx="14">
+                  <c:v>37.98614</c:v>
+                </c:pt>
+                <c:pt idx="15">
+                  <c:v>37.09208</c:v>
+                </c:pt>
+              </c:numCache>
+            </c:numRef>
+          </c:yVal>
+          <c:bubbleSize>
+            <c:numRef>
+              <c:f>Sheet1!$C$45:$C$60</c:f>
+              <c:numCache>
+                <c:formatCode>General</c:formatCode>
+                <c:ptCount val="16"/>
+                <c:pt idx="0">
+                  <c:v>135.60304060338413</c:v>
+                </c:pt>
+                <c:pt idx="1">
+                  <c:v>116.93216991312302</c:v>
+                </c:pt>
+                <c:pt idx="2">
+                  <c:v>70.96459334320562</c:v>
+                </c:pt>
+                <c:pt idx="3">
+                  <c:v>45.658306856402554</c:v>
+                </c:pt>
+                <c:pt idx="4">
+                  <c:v>45.13899999999996</c:v>
+                </c:pt>
+                <c:pt idx="5">
+                  <c:v>39.71483466072114</c:v>
+                </c:pt>
+                <c:pt idx="6">
+                  <c:v>29.576290322580657</c:v>
+                </c:pt>
+                <c:pt idx="7">
+                  <c:v>26.10661204268288</c:v>
+                </c:pt>
+                <c:pt idx="8">
+                  <c:v>18.920243547897623</c:v>
+                </c:pt>
+                <c:pt idx="9">
+                  <c:v>14.616503703365735</c:v>
+                </c:pt>
+                <c:pt idx="10">
+                  <c:v>14.519878048780463</c:v>
+                </c:pt>
+                <c:pt idx="11">
+                  <c:v>10.991592990840289</c:v>
+                </c:pt>
+                <c:pt idx="12">
+                  <c:v>7.93359375</c:v>
+                </c:pt>
+                <c:pt idx="13">
+                  <c:v>5.73710339506173</c:v>
+                </c:pt>
+                <c:pt idx="14">
+                  <c:v>3.603644565740011</c:v>
+                </c:pt>
+                <c:pt idx="15">
+                  <c:v>2.9021568570861747</c:v>
+                </c:pt>
+              </c:numCache>
+            </c:numRef>
+          </c:bubbleSize>
+          <c:bubble3D val="0"/>
+          <c:extLst>
+            <c:ext xmlns:c16="http://schemas.microsoft.com/office/drawing/2014/chart" uri="{C3380CC4-5D6E-409C-BE32-E72D297353CC}">
+              <c16:uniqueId val="{00000000-D4B8-B94C-91E4-2DDF998DBB50}"/>
+            </c:ext>
+          </c:extLst>
+        </c:ser>
+        <c:ser>
+          <c:idx val="4"/>
+          <c:order val="4"/>
+          <c:tx>
+            <c:strRef>
+              <c:f>Sheet1!$B$62</c:f>
+              <c:strCache>
+                <c:ptCount val="1"/>
+                <c:pt idx="0">
+                  <c:v>Unknown</c:v>
+                </c:pt>
+              </c:strCache>
+            </c:strRef>
+          </c:tx>
+          <c:spPr>
+            <a:solidFill>
+              <a:schemeClr val="accent1"/>
+            </a:solidFill>
+            <a:ln w="19050">
+              <a:noFill/>
+            </a:ln>
+            <a:effectLst/>
+          </c:spPr>
+          <c:invertIfNegative val="0"/>
+          <c:dPt>
+            <c:idx val="0"/>
+            <c:spPr>
+              <a:solidFill>
+                <a:srgbClr val="8A98A8"/>
+              </a:solidFill>
+              <a:ln>
+                <a:solidFill>
+                  <a:srgbClr val="FFFFFF"/>
+                </a:solidFill>
+              </a:ln>
+            </c:spPr>
+          </c:dPt>
+          <c:dLbls>
+            <c:dLbl>
+              <c:idx val="0"/>
+              <c:tx>
+                <c:rich>
+                  <a:bodyPr/>
+                  <a:lstStyle/>
+                  <a:p>
+                    <a:r>
+                      <a:t>webgoat</a:t>
+                    </a:r>
+                  </a:p>
+                </c:rich>
+              </c:tx>
+              <c:showLegendKey val="0"/>
+              <c:showVal val="1"/>
+              <c:showCatName val="0"/>
+              <c:showSerName val="0"/>
+              <c:showPercent val="0"/>
+              <c:showBubbleSize val="0"/>
+            </c:dLbl>
+            <c:showLegendKey val="0"/>
+            <c:showVal val="0"/>
+            <c:showCatName val="0"/>
+            <c:showSerName val="0"/>
+            <c:showPercent val="0"/>
+            <c:showBubbleSize val="0"/>
+            <c:showLeaderLines val="1"/>
+          </c:dLbls>
+          <c:xVal>
+            <c:numRef>
+              <c:f>Sheet1!$A$63:$A$63</c:f>
+              <c:numCache>
+                <c:formatCode>General</c:formatCode>
+                <c:ptCount val="1"/>
+                <c:pt idx="0">
+                  <c:v>0.66187</c:v>
+                </c:pt>
+              </c:numCache>
+            </c:numRef>
+          </c:xVal>
+          <c:yVal>
+            <c:numRef>
+              <c:f>Sheet1!$B$63:$B$63</c:f>
+              <c:numCache>
+                <c:formatCode>General</c:formatCode>
+                <c:ptCount val="1"/>
+                <c:pt idx="0">
+                  <c:v>10.22878</c:v>
+                </c:pt>
+              </c:numCache>
+            </c:numRef>
+          </c:yVal>
+          <c:bubbleSize>
+            <c:numRef>
+              <c:f>Sheet1!$C$63:$C$63</c:f>
+              <c:numCache>
+                <c:formatCode>General</c:formatCode>
+                <c:ptCount val="1"/>
+                <c:pt idx="0">
+                  <c:v>2.7103568439793277</c:v>
+                </c:pt>
+              </c:numCache>
+            </c:numRef>
           </c:bubbleSize>
           <c:bubble3D val="0"/>
           <c:extLst>
@@ -849,6 +3370,7 @@
         <c:axId val="392045280"/>
         <c:scaling>
           <c:orientation val="minMax"/>
+          <c:min val="0.0"/>
         </c:scaling>
         <c:delete val="0"/>
         <c:axPos val="b"/>
@@ -908,6 +3430,7 @@
         <c:axId val="392046992"/>
         <c:scaling>
           <c:orientation val="minMax"/>
+          <c:min val="0.0"/>
         </c:scaling>
         <c:delete val="0"/>
         <c:axPos val="l"/>
@@ -2182,7 +4705,7 @@
           <a:p>
             <a:fld id="{C1255C68-584F-174D-BB81-51BF91708794}" type="datetimeFigureOut">
               <a:rPr lang="en-US" smtClean="0"/>
-              <a:t>3/13/26</a:t>
+              <a:t>3/12/26</a:t>
             </a:fld>
             <a:endParaRPr lang="en-US"/>
           </a:p>
@@ -2359,7 +4882,7 @@
           <a:p>
             <a:fld id="{A1EDAAC4-819D-C544-9EA1-C73624CFD70B}" type="datetimeFigureOut">
               <a:rPr lang="en-US" smtClean="0"/>
-              <a:t>3/13/26</a:t>
+              <a:t>3/12/26</a:t>
             </a:fld>
             <a:endParaRPr lang="en-US"/>
           </a:p>
@@ -22756,6 +25279,7 @@
               <a:rPr lang="en-US" dirty="0"/>
               <a:t>Software Quality report on Opendemo</a:t>
             </a:r>
+            <a:endParaRPr lang="en-US" dirty="0"/>
           </a:p>
         </p:txBody>
       </p:sp>
@@ -32621,7 +35145,7 @@
         </p:nvGraphicFramePr>
         <p:xfrm>
           <a:off x="937766" y="1466791"/>
-          <a:ext cx="10316468" cy="4540320"/>
+          <a:ext cx="10316468" cy="17341920"/>
         </p:xfrm>
         <a:graphic>
           <a:graphicData uri="http://schemas.openxmlformats.org/drawingml/2006/table">
@@ -39669,7 +42193,7 @@
       </p:sp>
       <p:graphicFrame>
         <p:nvGraphicFramePr>
-          <p:cNvPr id="8" name="TECHNICAL_DEBT_SYSTEMS_CHART&#13;&#10;">
+          <p:cNvPr id="8" name="TECHNICAL_DEBT_SYSTEMS_CHART">
             <a:extLst>
               <a:ext uri="{FF2B5EF4-FFF2-40B4-BE49-F238E27FC236}">
                 <a16:creationId xmlns:a16="http://schemas.microsoft.com/office/drawing/2014/main" id="{220D7F51-72F0-DC6F-B733-E9F269FA92FE}"/>
@@ -39680,7 +42204,7 @@
           <p:nvPr>
             <p:extLst>
               <p:ext uri="{D42A27DB-BD31-4B8C-83A1-F6EECF244321}">
-                <p14:modId xmlns:p14="http://schemas.microsoft.com/office/powerpoint/2010/main" val="94991413"/>
+                <p14:modId xmlns:p14="http://schemas.microsoft.com/office/powerpoint/2010/main" val="1963346089"/>
               </p:ext>
             </p:extLst>
           </p:nvPr>
@@ -40094,7 +42618,7 @@
       </p:sp>
       <p:graphicFrame>
         <p:nvGraphicFramePr>
-          <p:cNvPr id="10" name="MODERNIZATION_SCATTER_PLOT_CHART&#13;&#10;">
+          <p:cNvPr id="10" name="MODERNIZATION_SCATTER_PLOT_CHART">
             <a:extLst>
               <a:ext uri="{FF2B5EF4-FFF2-40B4-BE49-F238E27FC236}">
                 <a16:creationId xmlns:a16="http://schemas.microsoft.com/office/drawing/2014/main" id="{FA04012A-8076-57D9-16E6-FD4DB5AABD99}"/>
@@ -40105,7 +42629,7 @@
           <p:nvPr>
             <p:extLst>
               <p:ext uri="{D42A27DB-BD31-4B8C-83A1-F6EECF244321}">
-                <p14:modId xmlns:p14="http://schemas.microsoft.com/office/powerpoint/2010/main" val="1380179552"/>
+                <p14:modId xmlns:p14="http://schemas.microsoft.com/office/powerpoint/2010/main" val="2991213908"/>
               </p:ext>
             </p:extLst>
           </p:nvPr>

--- a/tests/report_generator/integration/reference_modernization.pptx
+++ b/tests/report_generator/integration/reference_modernization.pptx
@@ -265,137 +265,89 @@
           </c:dPt>
           <c:cat>
             <c:strRef>
-              <c:f>Sheet1!$A$2:$A$21</c:f>
+              <c:f>Sheet1!$A$2:$A$13</c:f>
               <c:strCache>
-                <c:ptCount val="20"/>
+                <c:ptCount val="12"/>
                 <c:pt idx="0">
-                  <c:v>Tensorflow</c:v>
+                  <c:v>integrationtest-elasticsearch</c:v>
                 </c:pt>
                 <c:pt idx="1">
-                  <c:v>Blender</c:v>
+                  <c:v>integrationtest-airflow</c:v>
                 </c:pt>
                 <c:pt idx="2">
-                  <c:v>Oracle GraalVM</c:v>
+                  <c:v>integrationtest-git</c:v>
                 </c:pt>
                 <c:pt idx="3">
-                  <c:v>Elasticsearch</c:v>
+                  <c:v>integrationtest-vscode</c:v>
                 </c:pt>
                 <c:pt idx="4">
-                  <c:v>MongoDB</c:v>
+                  <c:v>integrationtest-jruby</c:v>
                 </c:pt>
                 <c:pt idx="5">
-                  <c:v>PostgreSQL</c:v>
+                  <c:v>integrationtest-kafka</c:v>
                 </c:pt>
                 <c:pt idx="6">
-                  <c:v>Google V8</c:v>
+                  <c:v>integrationtest-druid</c:v>
                 </c:pt>
                 <c:pt idx="7">
-                  <c:v>Outsystems-demo</c:v>
+                  <c:v>integrationtest-electron</c:v>
                 </c:pt>
                 <c:pt idx="8">
-                  <c:v>Systemd</c:v>
+                  <c:v>integrationtest-webpack</c:v>
                 </c:pt>
                 <c:pt idx="9">
-                  <c:v>Clickhouse</c:v>
+                  <c:v>integrationtest-bazel</c:v>
                 </c:pt>
                 <c:pt idx="10">
-                  <c:v>Twitter Algorithm</c:v>
+                  <c:v>integrationtest-facebookyoga</c:v>
                 </c:pt>
                 <c:pt idx="11">
-                  <c:v>Solana</c:v>
-                </c:pt>
-                <c:pt idx="12">
-                  <c:v>Airflow</c:v>
-                </c:pt>
-                <c:pt idx="13">
-                  <c:v>Hadoop</c:v>
-                </c:pt>
-                <c:pt idx="14">
-                  <c:v>Artemis</c:v>
-                </c:pt>
-                <c:pt idx="15">
-                  <c:v>Hibernate</c:v>
-                </c:pt>
-                <c:pt idx="16">
-                  <c:v>Brave-core</c:v>
-                </c:pt>
-                <c:pt idx="17">
-                  <c:v>GIT</c:v>
-                </c:pt>
-                <c:pt idx="18">
-                  <c:v>Redis</c:v>
-                </c:pt>
-                <c:pt idx="19">
-                  <c:v>Visual Studio Code</c:v>
+                  <c:v>integrationtest-zuul</c:v>
                 </c:pt>
               </c:strCache>
             </c:strRef>
           </c:cat>
           <c:val>
             <c:numRef>
-              <c:f>Sheet1!$B$2:$B$21</c:f>
+              <c:f>Sheet1!$B$2:$B$13</c:f>
               <c:numCache>
                 <c:formatCode>General</c:formatCode>
-                <c:ptCount val="20"/>
+                <c:ptCount val="12"/>
                 <c:pt idx="0">
-                  <c:v>260.16236712396966</c:v>
+                  <c:v>138.76191</c:v>
                 </c:pt>
                 <c:pt idx="1">
-                  <c:v>175.68071</c:v>
+                  <c:v>34.85719</c:v>
                 </c:pt>
                 <c:pt idx="2">
-                  <c:v>175.17548215807747</c:v>
+                  <c:v>24.57473</c:v>
                 </c:pt>
                 <c:pt idx="3">
-                  <c:v>137.00198</c:v>
+                  <c:v>18.88447</c:v>
                 </c:pt>
                 <c:pt idx="4">
-                  <c:v>118.73782</c:v>
+                  <c:v>18.38069</c:v>
                 </c:pt>
                 <c:pt idx="5">
-                  <c:v>90.58979</c:v>
+                  <c:v>18.16938</c:v>
                 </c:pt>
                 <c:pt idx="6">
-                  <c:v>79.72585</c:v>
+                  <c:v>12.48652</c:v>
                 </c:pt>
                 <c:pt idx="7">
-                  <c:v>70.96459334320562</c:v>
+                  <c:v>3.17265</c:v>
                 </c:pt>
                 <c:pt idx="8">
-                  <c:v>69.70323</c:v>
+                  <c:v>2.69231</c:v>
                 </c:pt>
                 <c:pt idx="9">
-                  <c:v>56.01164</c:v>
+                  <c:v>1.53173</c:v>
                 </c:pt>
                 <c:pt idx="10">
-                  <c:v>39.71483466072114</c:v>
+                  <c:v>1.04072</c:v>
                 </c:pt>
                 <c:pt idx="11">
-                  <c:v>34.84491</c:v>
-                </c:pt>
-                <c:pt idx="12">
-                  <c:v>34.27488</c:v>
-                </c:pt>
-                <c:pt idx="13">
-                  <c:v>33.21055</c:v>
-                </c:pt>
-                <c:pt idx="14">
-                  <c:v>31.26918</c:v>
-                </c:pt>
-                <c:pt idx="15">
-                  <c:v>30.57731</c:v>
-                </c:pt>
-                <c:pt idx="16">
-                  <c:v>28.55415</c:v>
-                </c:pt>
-                <c:pt idx="17">
-                  <c:v>24.45168</c:v>
-                </c:pt>
-                <c:pt idx="18">
-                  <c:v>23.16484341436872</c:v>
-                </c:pt>
-                <c:pt idx="19">
-                  <c:v>18.8132</c:v>
+                  <c:v>0.52362</c:v>
                 </c:pt>
               </c:numCache>
             </c:numRef>
@@ -432,137 +384,89 @@
           <c:invertIfNegative val="0"/>
           <c:cat>
             <c:strRef>
-              <c:f>Sheet1!$A$2:$A$21</c:f>
+              <c:f>Sheet1!$A$2:$A$13</c:f>
               <c:strCache>
-                <c:ptCount val="20"/>
+                <c:ptCount val="12"/>
                 <c:pt idx="0">
-                  <c:v>Tensorflow</c:v>
+                  <c:v>integrationtest-elasticsearch</c:v>
                 </c:pt>
                 <c:pt idx="1">
-                  <c:v>Blender</c:v>
+                  <c:v>integrationtest-airflow</c:v>
                 </c:pt>
                 <c:pt idx="2">
-                  <c:v>Oracle GraalVM</c:v>
+                  <c:v>integrationtest-git</c:v>
                 </c:pt>
                 <c:pt idx="3">
-                  <c:v>Elasticsearch</c:v>
+                  <c:v>integrationtest-vscode</c:v>
                 </c:pt>
                 <c:pt idx="4">
-                  <c:v>MongoDB</c:v>
+                  <c:v>integrationtest-jruby</c:v>
                 </c:pt>
                 <c:pt idx="5">
-                  <c:v>PostgreSQL</c:v>
+                  <c:v>integrationtest-kafka</c:v>
                 </c:pt>
                 <c:pt idx="6">
-                  <c:v>Google V8</c:v>
+                  <c:v>integrationtest-druid</c:v>
                 </c:pt>
                 <c:pt idx="7">
-                  <c:v>Outsystems-demo</c:v>
+                  <c:v>integrationtest-electron</c:v>
                 </c:pt>
                 <c:pt idx="8">
-                  <c:v>Systemd</c:v>
+                  <c:v>integrationtest-webpack</c:v>
                 </c:pt>
                 <c:pt idx="9">
-                  <c:v>Clickhouse</c:v>
+                  <c:v>integrationtest-bazel</c:v>
                 </c:pt>
                 <c:pt idx="10">
-                  <c:v>Twitter Algorithm</c:v>
+                  <c:v>integrationtest-facebookyoga</c:v>
                 </c:pt>
                 <c:pt idx="11">
-                  <c:v>Solana</c:v>
-                </c:pt>
-                <c:pt idx="12">
-                  <c:v>Airflow</c:v>
-                </c:pt>
-                <c:pt idx="13">
-                  <c:v>Hadoop</c:v>
-                </c:pt>
-                <c:pt idx="14">
-                  <c:v>Artemis</c:v>
-                </c:pt>
-                <c:pt idx="15">
-                  <c:v>Hibernate</c:v>
-                </c:pt>
-                <c:pt idx="16">
-                  <c:v>Brave-core</c:v>
-                </c:pt>
-                <c:pt idx="17">
-                  <c:v>GIT</c:v>
-                </c:pt>
-                <c:pt idx="18">
-                  <c:v>Redis</c:v>
-                </c:pt>
-                <c:pt idx="19">
-                  <c:v>Visual Studio Code</c:v>
+                  <c:v>integrationtest-zuul</c:v>
                 </c:pt>
               </c:strCache>
             </c:strRef>
           </c:cat>
           <c:val>
             <c:numRef>
-              <c:f>Sheet1!$C$2:$C$21</c:f>
+              <c:f>Sheet1!$C$2:$C$13</c:f>
               <c:numCache>
                 <c:formatCode>General</c:formatCode>
-                <c:ptCount val="20"/>
+                <c:ptCount val="12"/>
                 <c:pt idx="0">
-                  <c:v>0.0</c:v>
+                  <c:v>126.00943488858826</c:v>
                 </c:pt>
                 <c:pt idx="1">
-                  <c:v>163.50925951217985</c:v>
+                  <c:v>21.683513046341687</c:v>
                 </c:pt>
                 <c:pt idx="2">
-                  <c:v>0.0</c:v>
+                  <c:v>12.391236676501368</c:v>
                 </c:pt>
                 <c:pt idx="3">
-                  <c:v>125.69901258506576</c:v>
+                  <c:v>58.74034676610504</c:v>
                 </c:pt>
                 <c:pt idx="4">
-                  <c:v>105.29577387292423</c:v>
+                  <c:v>17.402782706155662</c:v>
                 </c:pt>
                 <c:pt idx="5">
-                  <c:v>10.386528597698714</c:v>
+                  <c:v>24.80422763888895</c:v>
                 </c:pt>
                 <c:pt idx="6">
-                  <c:v>79.46538441612817</c:v>
+                  <c:v>14.749963870967802</c:v>
                 </c:pt>
                 <c:pt idx="7">
-                  <c:v>0.0</c:v>
+                  <c:v>9.819366324817128</c:v>
                 </c:pt>
                 <c:pt idx="8">
-                  <c:v>11.918359176828517</c:v>
+                  <c:v>8.332723851055352</c:v>
                 </c:pt>
                 <c:pt idx="9">
-                  <c:v>79.59140060338413</c:v>
+                  <c:v>5.2096993699186935</c:v>
                 </c:pt>
                 <c:pt idx="10">
-                  <c:v>0.0</c:v>
+                  <c:v>2.5651353173961375</c:v>
                 </c:pt>
                 <c:pt idx="11">
-                  <c:v>10.294089999999962</c:v>
-                </c:pt>
-                <c:pt idx="12">
-                  <c:v>21.230302824691023</c:v>
-                </c:pt>
-                <c:pt idx="13">
-                  <c:v>48.0289397609055</c:v>
-                </c:pt>
-                <c:pt idx="14">
-                  <c:v>45.29529245170047</c:v>
-                </c:pt>
-                <c:pt idx="15">
-                  <c:v>42.2820233333332</c:v>
-                </c:pt>
-                <c:pt idx="16">
-                  <c:v>88.37801991312301</c:v>
-                </c:pt>
-                <c:pt idx="17">
-                  <c:v>12.3791647252819</c:v>
-                </c:pt>
-                <c:pt idx="18">
-                  <c:v>0.0</c:v>
-                </c:pt>
-                <c:pt idx="19">
-                  <c:v>58.51978297129445</c:v>
+                  <c:v>1.6227133333333315</c:v>
                 </c:pt>
               </c:numCache>
             </c:numRef>
@@ -774,501 +678,30 @@
             <a:effectLst/>
           </c:spPr>
           <c:invertIfNegative val="0"/>
-          <c:dPt>
-            <c:idx val="0"/>
-            <c:spPr>
-              <a:solidFill>
-                <a:srgbClr val="003DAB"/>
-              </a:solidFill>
-              <a:ln>
-                <a:solidFill>
-                  <a:srgbClr val="FFFFFF"/>
-                </a:solidFill>
-              </a:ln>
-            </c:spPr>
-          </c:dPt>
-          <c:dPt>
-            <c:idx val="1"/>
-            <c:spPr>
-              <a:solidFill>
-                <a:srgbClr val="003DAB"/>
-              </a:solidFill>
-              <a:ln>
-                <a:solidFill>
-                  <a:srgbClr val="FFFFFF"/>
-                </a:solidFill>
-              </a:ln>
-            </c:spPr>
-          </c:dPt>
-          <c:dPt>
-            <c:idx val="2"/>
-            <c:spPr>
-              <a:solidFill>
-                <a:srgbClr val="003DAB"/>
-              </a:solidFill>
-              <a:ln>
-                <a:solidFill>
-                  <a:srgbClr val="FFFFFF"/>
-                </a:solidFill>
-              </a:ln>
-            </c:spPr>
-          </c:dPt>
-          <c:dPt>
-            <c:idx val="3"/>
-            <c:spPr>
-              <a:solidFill>
-                <a:srgbClr val="003DAB"/>
-              </a:solidFill>
-              <a:ln>
-                <a:solidFill>
-                  <a:srgbClr val="FFFFFF"/>
-                </a:solidFill>
-              </a:ln>
-            </c:spPr>
-          </c:dPt>
-          <c:dPt>
-            <c:idx val="4"/>
-            <c:spPr>
-              <a:solidFill>
-                <a:srgbClr val="003DAB"/>
-              </a:solidFill>
-              <a:ln>
-                <a:solidFill>
-                  <a:srgbClr val="FFFFFF"/>
-                </a:solidFill>
-              </a:ln>
-            </c:spPr>
-          </c:dPt>
-          <c:dPt>
-            <c:idx val="5"/>
-            <c:spPr>
-              <a:solidFill>
-                <a:srgbClr val="003DAB"/>
-              </a:solidFill>
-              <a:ln>
-                <a:solidFill>
-                  <a:srgbClr val="FFFFFF"/>
-                </a:solidFill>
-              </a:ln>
-            </c:spPr>
-          </c:dPt>
-          <c:dPt>
-            <c:idx val="6"/>
-            <c:spPr>
-              <a:solidFill>
-                <a:srgbClr val="003DAB"/>
-              </a:solidFill>
-              <a:ln>
-                <a:solidFill>
-                  <a:srgbClr val="FFFFFF"/>
-                </a:solidFill>
-              </a:ln>
-            </c:spPr>
-          </c:dPt>
-          <c:dPt>
-            <c:idx val="7"/>
-            <c:spPr>
-              <a:solidFill>
-                <a:srgbClr val="003DAB"/>
-              </a:solidFill>
-              <a:ln>
-                <a:solidFill>
-                  <a:srgbClr val="FFFFFF"/>
-                </a:solidFill>
-              </a:ln>
-            </c:spPr>
-          </c:dPt>
-          <c:dPt>
-            <c:idx val="8"/>
-            <c:spPr>
-              <a:solidFill>
-                <a:srgbClr val="003DAB"/>
-              </a:solidFill>
-              <a:ln>
-                <a:solidFill>
-                  <a:srgbClr val="FFFFFF"/>
-                </a:solidFill>
-              </a:ln>
-            </c:spPr>
-          </c:dPt>
-          <c:dPt>
-            <c:idx val="9"/>
-            <c:spPr>
-              <a:solidFill>
-                <a:srgbClr val="003DAB"/>
-              </a:solidFill>
-              <a:ln>
-                <a:solidFill>
-                  <a:srgbClr val="FFFFFF"/>
-                </a:solidFill>
-              </a:ln>
-            </c:spPr>
-          </c:dPt>
-          <c:dPt>
-            <c:idx val="10"/>
-            <c:spPr>
-              <a:solidFill>
-                <a:srgbClr val="003DAB"/>
-              </a:solidFill>
-              <a:ln>
-                <a:solidFill>
-                  <a:srgbClr val="FFFFFF"/>
-                </a:solidFill>
-              </a:ln>
-            </c:spPr>
-          </c:dPt>
-          <c:dLbls>
-            <c:dLbl>
-              <c:idx val="0"/>
-              <c:tx>
-                <c:rich>
-                  <a:bodyPr/>
-                  <a:lstStyle/>
-                  <a:p>
-                    <a:r>
-                      <a:t>MongoDB</a:t>
-                    </a:r>
-                  </a:p>
-                </c:rich>
-              </c:tx>
-              <c:showLegendKey val="0"/>
-              <c:showVal val="1"/>
-              <c:showCatName val="0"/>
-              <c:showSerName val="0"/>
-              <c:showPercent val="0"/>
-              <c:showBubbleSize val="0"/>
-            </c:dLbl>
-            <c:dLbl>
-              <c:idx val="1"/>
-              <c:tx>
-                <c:rich>
-                  <a:bodyPr/>
-                  <a:lstStyle/>
-                  <a:p>
-                    <a:r>
-                      <a:t>Hadoop</a:t>
-                    </a:r>
-                  </a:p>
-                </c:rich>
-              </c:tx>
-              <c:showLegendKey val="0"/>
-              <c:showVal val="1"/>
-              <c:showCatName val="0"/>
-              <c:showSerName val="0"/>
-              <c:showPercent val="0"/>
-              <c:showBubbleSize val="0"/>
-            </c:dLbl>
-            <c:dLbl>
-              <c:idx val="2"/>
-              <c:tx>
-                <c:rich>
-                  <a:bodyPr/>
-                  <a:lstStyle/>
-                  <a:p>
-                    <a:r>
-                      <a:t>Hibernate</a:t>
-                    </a:r>
-                  </a:p>
-                </c:rich>
-              </c:tx>
-              <c:showLegendKey val="0"/>
-              <c:showVal val="1"/>
-              <c:showCatName val="0"/>
-              <c:showSerName val="0"/>
-              <c:showPercent val="0"/>
-              <c:showBubbleSize val="0"/>
-            </c:dLbl>
-            <c:dLbl>
-              <c:idx val="3"/>
-              <c:tx>
-                <c:rich>
-                  <a:bodyPr/>
-                  <a:lstStyle/>
-                  <a:p>
-                    <a:r>
-                      <a:t>Airflow</a:t>
-                    </a:r>
-                  </a:p>
-                </c:rich>
-              </c:tx>
-              <c:showLegendKey val="0"/>
-              <c:showVal val="1"/>
-              <c:showCatName val="0"/>
-              <c:showSerName val="0"/>
-              <c:showPercent val="0"/>
-              <c:showBubbleSize val="0"/>
-            </c:dLbl>
-            <c:dLbl>
-              <c:idx val="4"/>
-              <c:tx>
-                <c:rich>
-                  <a:bodyPr/>
-                  <a:lstStyle/>
-                  <a:p>
-                    <a:r>
-                      <a:t>Redis</a:t>
-                    </a:r>
-                  </a:p>
-                </c:rich>
-              </c:tx>
-              <c:showLegendKey val="0"/>
-              <c:showVal val="1"/>
-              <c:showCatName val="0"/>
-              <c:showSerName val="0"/>
-              <c:showPercent val="0"/>
-              <c:showBubbleSize val="0"/>
-            </c:dLbl>
-            <c:dLbl>
-              <c:idx val="5"/>
-              <c:tx>
-                <c:rich>
-                  <a:bodyPr/>
-                  <a:lstStyle/>
-                  <a:p>
-                    <a:r>
-                      <a:t>Puppet</a:t>
-                    </a:r>
-                  </a:p>
-                </c:rich>
-              </c:tx>
-              <c:showLegendKey val="0"/>
-              <c:showVal val="1"/>
-              <c:showCatName val="0"/>
-              <c:showSerName val="0"/>
-              <c:showPercent val="0"/>
-              <c:showBubbleSize val="0"/>
-            </c:dLbl>
-            <c:dLbl>
-              <c:idx val="6"/>
-              <c:tx>
-                <c:rich>
-                  <a:bodyPr/>
-                  <a:lstStyle/>
-                  <a:p>
-                    <a:r>
-                      <a:t>Swift</a:t>
-                    </a:r>
-                  </a:p>
-                </c:rich>
-              </c:tx>
-              <c:showLegendKey val="0"/>
-              <c:showVal val="1"/>
-              <c:showCatName val="0"/>
-              <c:showSerName val="0"/>
-              <c:showPercent val="0"/>
-              <c:showBubbleSize val="0"/>
-            </c:dLbl>
-            <c:dLbl>
-              <c:idx val="7"/>
-              <c:tx>
-                <c:rich>
-                  <a:bodyPr/>
-                  <a:lstStyle/>
-                  <a:p>
-                    <a:r>
-                      <a:t>Card Management</a:t>
-                    </a:r>
-                  </a:p>
-                </c:rich>
-              </c:tx>
-              <c:showLegendKey val="0"/>
-              <c:showVal val="1"/>
-              <c:showCatName val="0"/>
-              <c:showSerName val="0"/>
-              <c:showPercent val="0"/>
-              <c:showBubbleSize val="0"/>
-            </c:dLbl>
-            <c:dLbl>
-              <c:idx val="8"/>
-              <c:tx>
-                <c:rich>
-                  <a:bodyPr/>
-                  <a:lstStyle/>
-                  <a:p>
-                    <a:r>
-                      <a:t>Emergency Response</a:t>
-                    </a:r>
-                  </a:p>
-                </c:rich>
-              </c:tx>
-              <c:showLegendKey val="0"/>
-              <c:showVal val="1"/>
-              <c:showCatName val="0"/>
-              <c:showSerName val="0"/>
-              <c:showPercent val="0"/>
-              <c:showBubbleSize val="0"/>
-            </c:dLbl>
-            <c:dLbl>
-              <c:idx val="9"/>
-              <c:tx>
-                <c:rich>
-                  <a:bodyPr/>
-                  <a:lstStyle/>
-                  <a:p>
-                    <a:r>
-                      <a:t>Zuul</a:t>
-                    </a:r>
-                  </a:p>
-                </c:rich>
-              </c:tx>
-              <c:showLegendKey val="0"/>
-              <c:showVal val="1"/>
-              <c:showCatName val="0"/>
-              <c:showSerName val="0"/>
-              <c:showPercent val="0"/>
-              <c:showBubbleSize val="0"/>
-            </c:dLbl>
-            <c:dLbl>
-              <c:idx val="10"/>
-              <c:tx>
-                <c:rich>
-                  <a:bodyPr/>
-                  <a:lstStyle/>
-                  <a:p>
-                    <a:r>
-                      <a:t>Discovery</a:t>
-                    </a:r>
-                  </a:p>
-                </c:rich>
-              </c:tx>
-              <c:showLegendKey val="0"/>
-              <c:showVal val="1"/>
-              <c:showCatName val="0"/>
-              <c:showSerName val="0"/>
-              <c:showPercent val="0"/>
-              <c:showBubbleSize val="0"/>
-            </c:dLbl>
-            <c:showLegendKey val="0"/>
-            <c:showVal val="0"/>
-            <c:showCatName val="0"/>
-            <c:showSerName val="0"/>
-            <c:showPercent val="0"/>
-            <c:showBubbleSize val="0"/>
-            <c:showLeaderLines val="1"/>
-          </c:dLbls>
           <c:xVal>
             <c:numRef>
-              <c:f>Sheet1!$A$2:$A$12</c:f>
+              <c:f>Sheet1!$A$2:$A$1</c:f>
               <c:numCache>
                 <c:formatCode>General</c:formatCode>
-                <c:ptCount val="11"/>
-                <c:pt idx="0">
-                  <c:v>118.73782</c:v>
-                </c:pt>
-                <c:pt idx="1">
-                  <c:v>33.21055</c:v>
-                </c:pt>
-                <c:pt idx="2">
-                  <c:v>30.57731</c:v>
-                </c:pt>
-                <c:pt idx="3">
-                  <c:v>34.27488</c:v>
-                </c:pt>
-                <c:pt idx="4">
-                  <c:v>23.16484341436872</c:v>
-                </c:pt>
-                <c:pt idx="5">
-                  <c:v>5.15985</c:v>
-                </c:pt>
-                <c:pt idx="6">
-                  <c:v>3.20787</c:v>
-                </c:pt>
-                <c:pt idx="7">
-                  <c:v>0.70401</c:v>
-                </c:pt>
-                <c:pt idx="8">
-                  <c:v>0.97714</c:v>
-                </c:pt>
-                <c:pt idx="9">
-                  <c:v>0.52348</c:v>
-                </c:pt>
-                <c:pt idx="10">
-                  <c:v>0.30559</c:v>
-                </c:pt>
+                <c:ptCount val="0"/>
               </c:numCache>
             </c:numRef>
           </c:xVal>
           <c:yVal>
             <c:numRef>
-              <c:f>Sheet1!$B$2:$B$12</c:f>
+              <c:f>Sheet1!$B$2:$B$1</c:f>
               <c:numCache>
                 <c:formatCode>General</c:formatCode>
-                <c:ptCount val="11"/>
-                <c:pt idx="0">
-                  <c:v>86.18161</c:v>
-                </c:pt>
-                <c:pt idx="1">
-                  <c:v>78.22621</c:v>
-                </c:pt>
-                <c:pt idx="2">
-                  <c:v>82.15507</c:v>
-                </c:pt>
-                <c:pt idx="3">
-                  <c:v>82.46816</c:v>
-                </c:pt>
-                <c:pt idx="4">
-                  <c:v>60.29861</c:v>
-                </c:pt>
-                <c:pt idx="5">
-                  <c:v>53.69692</c:v>
-                </c:pt>
-                <c:pt idx="6">
-                  <c:v>84.02105</c:v>
-                </c:pt>
-                <c:pt idx="7">
-                  <c:v>55.91103</c:v>
-                </c:pt>
-                <c:pt idx="8">
-                  <c:v>37.82205</c:v>
-                </c:pt>
-                <c:pt idx="9">
-                  <c:v>46.84862</c:v>
-                </c:pt>
-                <c:pt idx="10">
-                  <c:v>15.1171</c:v>
-                </c:pt>
+                <c:ptCount val="0"/>
               </c:numCache>
             </c:numRef>
           </c:yVal>
           <c:bubbleSize>
             <c:numRef>
-              <c:f>Sheet1!$C$2:$C$12</c:f>
+              <c:f>Sheet1!$C$2:$C$1</c:f>
               <c:numCache>
                 <c:formatCode>General</c:formatCode>
-                <c:ptCount val="11"/>
-                <c:pt idx="0">
-                  <c:v>224.03359387292423</c:v>
-                </c:pt>
-                <c:pt idx="1">
-                  <c:v>81.2394897609055</c:v>
-                </c:pt>
-                <c:pt idx="2">
-                  <c:v>72.8593333333332</c:v>
-                </c:pt>
-                <c:pt idx="3">
-                  <c:v>55.505182824691026</c:v>
-                </c:pt>
-                <c:pt idx="4">
-                  <c:v>23.16484341436872</c:v>
-                </c:pt>
-                <c:pt idx="5">
-                  <c:v>21.25445304610272</c:v>
-                </c:pt>
-                <c:pt idx="6">
-                  <c:v>5.8078125</c:v>
-                </c:pt>
-                <c:pt idx="7">
-                  <c:v>2.81876098232243</c:v>
-                </c:pt>
-                <c:pt idx="8">
-                  <c:v>2.6791224178651554</c:v>
-                </c:pt>
-                <c:pt idx="9">
-                  <c:v>2.1457777777777776</c:v>
-                </c:pt>
-                <c:pt idx="10">
-                  <c:v>1.251407218141167</c:v>
-                </c:pt>
+                <c:ptCount val="0"/>
               </c:numCache>
             </c:numRef>
           </c:bubbleSize>
@@ -1284,7 +717,7 @@
           <c:order val="1"/>
           <c:tx>
             <c:strRef>
-              <c:f>Sheet1!$B$14</c:f>
+              <c:f>Sheet1!$B$3</c:f>
               <c:strCache>
                 <c:ptCount val="1"/>
                 <c:pt idx="0">
@@ -1303,459 +736,30 @@
             <a:effectLst/>
           </c:spPr>
           <c:invertIfNegative val="0"/>
-          <c:dPt>
-            <c:idx val="0"/>
-            <c:spPr>
-              <a:solidFill>
-                <a:srgbClr val="2E6BFF"/>
-              </a:solidFill>
-              <a:ln>
-                <a:solidFill>
-                  <a:srgbClr val="FFFFFF"/>
-                </a:solidFill>
-              </a:ln>
-            </c:spPr>
-          </c:dPt>
-          <c:dPt>
-            <c:idx val="1"/>
-            <c:spPr>
-              <a:solidFill>
-                <a:srgbClr val="2E6BFF"/>
-              </a:solidFill>
-              <a:ln>
-                <a:solidFill>
-                  <a:srgbClr val="FFFFFF"/>
-                </a:solidFill>
-              </a:ln>
-            </c:spPr>
-          </c:dPt>
-          <c:dPt>
-            <c:idx val="2"/>
-            <c:spPr>
-              <a:solidFill>
-                <a:srgbClr val="2E6BFF"/>
-              </a:solidFill>
-              <a:ln>
-                <a:solidFill>
-                  <a:srgbClr val="FFFFFF"/>
-                </a:solidFill>
-              </a:ln>
-            </c:spPr>
-          </c:dPt>
-          <c:dPt>
-            <c:idx val="3"/>
-            <c:spPr>
-              <a:solidFill>
-                <a:srgbClr val="2E6BFF"/>
-              </a:solidFill>
-              <a:ln>
-                <a:solidFill>
-                  <a:srgbClr val="FFFFFF"/>
-                </a:solidFill>
-              </a:ln>
-            </c:spPr>
-          </c:dPt>
-          <c:dPt>
-            <c:idx val="4"/>
-            <c:spPr>
-              <a:solidFill>
-                <a:srgbClr val="2E6BFF"/>
-              </a:solidFill>
-              <a:ln>
-                <a:solidFill>
-                  <a:srgbClr val="FFFFFF"/>
-                </a:solidFill>
-              </a:ln>
-            </c:spPr>
-          </c:dPt>
-          <c:dPt>
-            <c:idx val="5"/>
-            <c:spPr>
-              <a:solidFill>
-                <a:srgbClr val="2E6BFF"/>
-              </a:solidFill>
-              <a:ln>
-                <a:solidFill>
-                  <a:srgbClr val="FFFFFF"/>
-                </a:solidFill>
-              </a:ln>
-            </c:spPr>
-          </c:dPt>
-          <c:dPt>
-            <c:idx val="6"/>
-            <c:spPr>
-              <a:solidFill>
-                <a:srgbClr val="2E6BFF"/>
-              </a:solidFill>
-              <a:ln>
-                <a:solidFill>
-                  <a:srgbClr val="FFFFFF"/>
-                </a:solidFill>
-              </a:ln>
-            </c:spPr>
-          </c:dPt>
-          <c:dPt>
-            <c:idx val="7"/>
-            <c:spPr>
-              <a:solidFill>
-                <a:srgbClr val="2E6BFF"/>
-              </a:solidFill>
-              <a:ln>
-                <a:solidFill>
-                  <a:srgbClr val="FFFFFF"/>
-                </a:solidFill>
-              </a:ln>
-            </c:spPr>
-          </c:dPt>
-          <c:dPt>
-            <c:idx val="8"/>
-            <c:spPr>
-              <a:solidFill>
-                <a:srgbClr val="2E6BFF"/>
-              </a:solidFill>
-              <a:ln>
-                <a:solidFill>
-                  <a:srgbClr val="FFFFFF"/>
-                </a:solidFill>
-              </a:ln>
-            </c:spPr>
-          </c:dPt>
-          <c:dPt>
-            <c:idx val="9"/>
-            <c:spPr>
-              <a:solidFill>
-                <a:srgbClr val="2E6BFF"/>
-              </a:solidFill>
-              <a:ln>
-                <a:solidFill>
-                  <a:srgbClr val="FFFFFF"/>
-                </a:solidFill>
-              </a:ln>
-            </c:spPr>
-          </c:dPt>
-          <c:dLbls>
-            <c:dLbl>
-              <c:idx val="0"/>
-              <c:tx>
-                <c:rich>
-                  <a:bodyPr/>
-                  <a:lstStyle/>
-                  <a:p>
-                    <a:r>
-                      <a:t>Blender</a:t>
-                    </a:r>
-                  </a:p>
-                </c:rich>
-              </c:tx>
-              <c:showLegendKey val="0"/>
-              <c:showVal val="1"/>
-              <c:showCatName val="0"/>
-              <c:showSerName val="0"/>
-              <c:showPercent val="0"/>
-              <c:showBubbleSize val="0"/>
-            </c:dLbl>
-            <c:dLbl>
-              <c:idx val="1"/>
-              <c:tx>
-                <c:rich>
-                  <a:bodyPr/>
-                  <a:lstStyle/>
-                  <a:p>
-                    <a:r>
-                      <a:t>Elasticsearch</a:t>
-                    </a:r>
-                  </a:p>
-                </c:rich>
-              </c:tx>
-              <c:showLegendKey val="0"/>
-              <c:showVal val="1"/>
-              <c:showCatName val="0"/>
-              <c:showSerName val="0"/>
-              <c:showPercent val="0"/>
-              <c:showBubbleSize val="0"/>
-            </c:dLbl>
-            <c:dLbl>
-              <c:idx val="2"/>
-              <c:tx>
-                <c:rich>
-                  <a:bodyPr/>
-                  <a:lstStyle/>
-                  <a:p>
-                    <a:r>
-                      <a:t>Oracle GraalVM</a:t>
-                    </a:r>
-                  </a:p>
-                </c:rich>
-              </c:tx>
-              <c:showLegendKey val="0"/>
-              <c:showVal val="1"/>
-              <c:showCatName val="0"/>
-              <c:showSerName val="0"/>
-              <c:showPercent val="0"/>
-              <c:showBubbleSize val="0"/>
-            </c:dLbl>
-            <c:dLbl>
-              <c:idx val="3"/>
-              <c:tx>
-                <c:rich>
-                  <a:bodyPr/>
-                  <a:lstStyle/>
-                  <a:p>
-                    <a:r>
-                      <a:t>Artemis</a:t>
-                    </a:r>
-                  </a:p>
-                </c:rich>
-              </c:tx>
-              <c:showLegendKey val="0"/>
-              <c:showVal val="1"/>
-              <c:showCatName val="0"/>
-              <c:showSerName val="0"/>
-              <c:showPercent val="0"/>
-              <c:showBubbleSize val="0"/>
-            </c:dLbl>
-            <c:dLbl>
-              <c:idx val="4"/>
-              <c:tx>
-                <c:rich>
-                  <a:bodyPr/>
-                  <a:lstStyle/>
-                  <a:p>
-                    <a:r>
-                      <a:t>Mediawiki</a:t>
-                    </a:r>
-                  </a:p>
-                </c:rich>
-              </c:tx>
-              <c:showLegendKey val="0"/>
-              <c:showVal val="1"/>
-              <c:showCatName val="0"/>
-              <c:showSerName val="0"/>
-              <c:showPercent val="0"/>
-              <c:showBubbleSize val="0"/>
-            </c:dLbl>
-            <c:dLbl>
-              <c:idx val="5"/>
-              <c:tx>
-                <c:rich>
-                  <a:bodyPr/>
-                  <a:lstStyle/>
-                  <a:p>
-                    <a:r>
-                      <a:t>Druid-local</a:t>
-                    </a:r>
-                  </a:p>
-                </c:rich>
-              </c:tx>
-              <c:showLegendKey val="0"/>
-              <c:showVal val="1"/>
-              <c:showCatName val="0"/>
-              <c:showSerName val="0"/>
-              <c:showPercent val="0"/>
-              <c:showBubbleSize val="0"/>
-            </c:dLbl>
-            <c:dLbl>
-              <c:idx val="6"/>
-              <c:tx>
-                <c:rich>
-                  <a:bodyPr/>
-                  <a:lstStyle/>
-                  <a:p>
-                    <a:r>
-                      <a:t>Druid</a:t>
-                    </a:r>
-                  </a:p>
-                </c:rich>
-              </c:tx>
-              <c:showLegendKey val="0"/>
-              <c:showVal val="1"/>
-              <c:showCatName val="0"/>
-              <c:showSerName val="0"/>
-              <c:showPercent val="0"/>
-              <c:showBubbleSize val="0"/>
-            </c:dLbl>
-            <c:dLbl>
-              <c:idx val="7"/>
-              <c:tx>
-                <c:rich>
-                  <a:bodyPr/>
-                  <a:lstStyle/>
-                  <a:p>
-                    <a:r>
-                      <a:t>Dubbo</a:t>
-                    </a:r>
-                  </a:p>
-                </c:rich>
-              </c:tx>
-              <c:showLegendKey val="0"/>
-              <c:showVal val="1"/>
-              <c:showCatName val="0"/>
-              <c:showSerName val="0"/>
-              <c:showPercent val="0"/>
-              <c:showBubbleSize val="0"/>
-            </c:dLbl>
-            <c:dLbl>
-              <c:idx val="8"/>
-              <c:tx>
-                <c:rich>
-                  <a:bodyPr/>
-                  <a:lstStyle/>
-                  <a:p>
-                    <a:r>
-                      <a:t>Spring-boot</a:t>
-                    </a:r>
-                  </a:p>
-                </c:rich>
-              </c:tx>
-              <c:showLegendKey val="0"/>
-              <c:showVal val="1"/>
-              <c:showCatName val="0"/>
-              <c:showSerName val="0"/>
-              <c:showPercent val="0"/>
-              <c:showBubbleSize val="0"/>
-            </c:dLbl>
-            <c:dLbl>
-              <c:idx val="9"/>
-              <c:tx>
-                <c:rich>
-                  <a:bodyPr/>
-                  <a:lstStyle/>
-                  <a:p>
-                    <a:r>
-                      <a:t>Django</a:t>
-                    </a:r>
-                  </a:p>
-                </c:rich>
-              </c:tx>
-              <c:showLegendKey val="0"/>
-              <c:showVal val="1"/>
-              <c:showCatName val="0"/>
-              <c:showSerName val="0"/>
-              <c:showPercent val="0"/>
-              <c:showBubbleSize val="0"/>
-            </c:dLbl>
-            <c:showLegendKey val="0"/>
-            <c:showVal val="0"/>
-            <c:showCatName val="0"/>
-            <c:showSerName val="0"/>
-            <c:showPercent val="0"/>
-            <c:showBubbleSize val="0"/>
-            <c:showLeaderLines val="1"/>
-          </c:dLbls>
           <c:xVal>
             <c:numRef>
-              <c:f>Sheet1!$A$15:$A$24</c:f>
+              <c:f>Sheet1!$A$4:$A$3</c:f>
               <c:numCache>
                 <c:formatCode>General</c:formatCode>
-                <c:ptCount val="10"/>
-                <c:pt idx="0">
-                  <c:v>175.68071</c:v>
-                </c:pt>
-                <c:pt idx="1">
-                  <c:v>137.00198</c:v>
-                </c:pt>
-                <c:pt idx="2">
-                  <c:v>175.17548215807747</c:v>
-                </c:pt>
-                <c:pt idx="3">
-                  <c:v>31.26918</c:v>
-                </c:pt>
-                <c:pt idx="4">
-                  <c:v>18.18312</c:v>
-                </c:pt>
-                <c:pt idx="5">
-                  <c:v>12.99401</c:v>
-                </c:pt>
-                <c:pt idx="6">
-                  <c:v>12.30279</c:v>
-                </c:pt>
-                <c:pt idx="7">
-                  <c:v>8.19523</c:v>
-                </c:pt>
-                <c:pt idx="8">
-                  <c:v>5.26901</c:v>
-                </c:pt>
-                <c:pt idx="9">
-                  <c:v>2.77431</c:v>
-                </c:pt>
+                <c:ptCount val="0"/>
               </c:numCache>
             </c:numRef>
           </c:xVal>
           <c:yVal>
             <c:numRef>
-              <c:f>Sheet1!$B$15:$B$24</c:f>
+              <c:f>Sheet1!$B$4:$B$3</c:f>
               <c:numCache>
                 <c:formatCode>General</c:formatCode>
-                <c:ptCount val="10"/>
-                <c:pt idx="0">
-                  <c:v>76.07558</c:v>
-                </c:pt>
-                <c:pt idx="1">
-                  <c:v>90.11709</c:v>
-                </c:pt>
-                <c:pt idx="2">
-                  <c:v>84.75704</c:v>
-                </c:pt>
-                <c:pt idx="3">
-                  <c:v>78.5494</c:v>
-                </c:pt>
-                <c:pt idx="4">
-                  <c:v>60.78835</c:v>
-                </c:pt>
-                <c:pt idx="5">
-                  <c:v>77.92646</c:v>
-                </c:pt>
-                <c:pt idx="6">
-                  <c:v>83.2979</c:v>
-                </c:pt>
-                <c:pt idx="7">
-                  <c:v>78.25331</c:v>
-                </c:pt>
-                <c:pt idx="8">
-                  <c:v>36.31141</c:v>
-                </c:pt>
-                <c:pt idx="9">
-                  <c:v>57.55254</c:v>
-                </c:pt>
+                <c:ptCount val="0"/>
               </c:numCache>
             </c:numRef>
           </c:yVal>
           <c:bubbleSize>
             <c:numRef>
-              <c:f>Sheet1!$C$15:$C$24</c:f>
+              <c:f>Sheet1!$C$4:$C$3</c:f>
               <c:numCache>
                 <c:formatCode>General</c:formatCode>
-                <c:ptCount val="10"/>
-                <c:pt idx="0">
-                  <c:v>339.18996951217986</c:v>
-                </c:pt>
-                <c:pt idx="1">
-                  <c:v>262.70099258506576</c:v>
-                </c:pt>
-                <c:pt idx="2">
-                  <c:v>175.17548215807747</c:v>
-                </c:pt>
-                <c:pt idx="3">
-                  <c:v>76.56447245170047</c:v>
-                </c:pt>
-                <c:pt idx="4">
-                  <c:v>59.41762804924715</c:v>
-                </c:pt>
-                <c:pt idx="5">
-                  <c:v>28.69315971339149</c:v>
-                </c:pt>
-                <c:pt idx="6">
-                  <c:v>26.77437275985667</c:v>
-                </c:pt>
-                <c:pt idx="7">
-                  <c:v>21.30444444444446</c:v>
-                </c:pt>
-                <c:pt idx="8">
-                  <c:v>21.883886685494133</c:v>
-                </c:pt>
-                <c:pt idx="9">
-                  <c:v>11.360794690860216</c:v>
-                </c:pt>
+                <c:ptCount val="0"/>
               </c:numCache>
             </c:numRef>
           </c:bubbleSize>
@@ -1771,7 +775,7 @@
           <c:order val="2"/>
           <c:tx>
             <c:strRef>
-              <c:f>Sheet1!$B$26</c:f>
+              <c:f>Sheet1!$B$5</c:f>
               <c:strCache>
                 <c:ptCount val="1"/>
                 <c:pt idx="0">
@@ -1790,711 +794,30 @@
             <a:effectLst/>
           </c:spPr>
           <c:invertIfNegative val="0"/>
-          <c:dPt>
-            <c:idx val="0"/>
-            <c:spPr>
-              <a:solidFill>
-                <a:srgbClr val="8DA8FF"/>
-              </a:solidFill>
-              <a:ln>
-                <a:solidFill>
-                  <a:srgbClr val="FFFFFF"/>
-                </a:solidFill>
-              </a:ln>
-            </c:spPr>
-          </c:dPt>
-          <c:dPt>
-            <c:idx val="1"/>
-            <c:spPr>
-              <a:solidFill>
-                <a:srgbClr val="8DA8FF"/>
-              </a:solidFill>
-              <a:ln>
-                <a:solidFill>
-                  <a:srgbClr val="FFFFFF"/>
-                </a:solidFill>
-              </a:ln>
-            </c:spPr>
-          </c:dPt>
-          <c:dPt>
-            <c:idx val="2"/>
-            <c:spPr>
-              <a:solidFill>
-                <a:srgbClr val="8DA8FF"/>
-              </a:solidFill>
-              <a:ln>
-                <a:solidFill>
-                  <a:srgbClr val="FFFFFF"/>
-                </a:solidFill>
-              </a:ln>
-            </c:spPr>
-          </c:dPt>
-          <c:dPt>
-            <c:idx val="3"/>
-            <c:spPr>
-              <a:solidFill>
-                <a:srgbClr val="8DA8FF"/>
-              </a:solidFill>
-              <a:ln>
-                <a:solidFill>
-                  <a:srgbClr val="FFFFFF"/>
-                </a:solidFill>
-              </a:ln>
-            </c:spPr>
-          </c:dPt>
-          <c:dPt>
-            <c:idx val="4"/>
-            <c:spPr>
-              <a:solidFill>
-                <a:srgbClr val="8DA8FF"/>
-              </a:solidFill>
-              <a:ln>
-                <a:solidFill>
-                  <a:srgbClr val="FFFFFF"/>
-                </a:solidFill>
-              </a:ln>
-            </c:spPr>
-          </c:dPt>
-          <c:dPt>
-            <c:idx val="5"/>
-            <c:spPr>
-              <a:solidFill>
-                <a:srgbClr val="8DA8FF"/>
-              </a:solidFill>
-              <a:ln>
-                <a:solidFill>
-                  <a:srgbClr val="FFFFFF"/>
-                </a:solidFill>
-              </a:ln>
-            </c:spPr>
-          </c:dPt>
-          <c:dPt>
-            <c:idx val="6"/>
-            <c:spPr>
-              <a:solidFill>
-                <a:srgbClr val="8DA8FF"/>
-              </a:solidFill>
-              <a:ln>
-                <a:solidFill>
-                  <a:srgbClr val="FFFFFF"/>
-                </a:solidFill>
-              </a:ln>
-            </c:spPr>
-          </c:dPt>
-          <c:dPt>
-            <c:idx val="7"/>
-            <c:spPr>
-              <a:solidFill>
-                <a:srgbClr val="8DA8FF"/>
-              </a:solidFill>
-              <a:ln>
-                <a:solidFill>
-                  <a:srgbClr val="FFFFFF"/>
-                </a:solidFill>
-              </a:ln>
-            </c:spPr>
-          </c:dPt>
-          <c:dPt>
-            <c:idx val="8"/>
-            <c:spPr>
-              <a:solidFill>
-                <a:srgbClr val="8DA8FF"/>
-              </a:solidFill>
-              <a:ln>
-                <a:solidFill>
-                  <a:srgbClr val="FFFFFF"/>
-                </a:solidFill>
-              </a:ln>
-            </c:spPr>
-          </c:dPt>
-          <c:dPt>
-            <c:idx val="9"/>
-            <c:spPr>
-              <a:solidFill>
-                <a:srgbClr val="8DA8FF"/>
-              </a:solidFill>
-              <a:ln>
-                <a:solidFill>
-                  <a:srgbClr val="FFFFFF"/>
-                </a:solidFill>
-              </a:ln>
-            </c:spPr>
-          </c:dPt>
-          <c:dPt>
-            <c:idx val="10"/>
-            <c:spPr>
-              <a:solidFill>
-                <a:srgbClr val="8DA8FF"/>
-              </a:solidFill>
-              <a:ln>
-                <a:solidFill>
-                  <a:srgbClr val="FFFFFF"/>
-                </a:solidFill>
-              </a:ln>
-            </c:spPr>
-          </c:dPt>
-          <c:dPt>
-            <c:idx val="11"/>
-            <c:spPr>
-              <a:solidFill>
-                <a:srgbClr val="8DA8FF"/>
-              </a:solidFill>
-              <a:ln>
-                <a:solidFill>
-                  <a:srgbClr val="FFFFFF"/>
-                </a:solidFill>
-              </a:ln>
-            </c:spPr>
-          </c:dPt>
-          <c:dPt>
-            <c:idx val="12"/>
-            <c:spPr>
-              <a:solidFill>
-                <a:srgbClr val="8DA8FF"/>
-              </a:solidFill>
-              <a:ln>
-                <a:solidFill>
-                  <a:srgbClr val="FFFFFF"/>
-                </a:solidFill>
-              </a:ln>
-            </c:spPr>
-          </c:dPt>
-          <c:dPt>
-            <c:idx val="13"/>
-            <c:spPr>
-              <a:solidFill>
-                <a:srgbClr val="8DA8FF"/>
-              </a:solidFill>
-              <a:ln>
-                <a:solidFill>
-                  <a:srgbClr val="FFFFFF"/>
-                </a:solidFill>
-              </a:ln>
-            </c:spPr>
-          </c:dPt>
-          <c:dPt>
-            <c:idx val="14"/>
-            <c:spPr>
-              <a:solidFill>
-                <a:srgbClr val="8DA8FF"/>
-              </a:solidFill>
-              <a:ln>
-                <a:solidFill>
-                  <a:srgbClr val="FFFFFF"/>
-                </a:solidFill>
-              </a:ln>
-            </c:spPr>
-          </c:dPt>
-          <c:dPt>
-            <c:idx val="15"/>
-            <c:spPr>
-              <a:solidFill>
-                <a:srgbClr val="8DA8FF"/>
-              </a:solidFill>
-              <a:ln>
-                <a:solidFill>
-                  <a:srgbClr val="FFFFFF"/>
-                </a:solidFill>
-              </a:ln>
-            </c:spPr>
-          </c:dPt>
-          <c:dLbls>
-            <c:dLbl>
-              <c:idx val="0"/>
-              <c:tx>
-                <c:rich>
-                  <a:bodyPr/>
-                  <a:lstStyle/>
-                  <a:p>
-                    <a:r>
-                      <a:t>Tensorflow</a:t>
-                    </a:r>
-                  </a:p>
-                </c:rich>
-              </c:tx>
-              <c:showLegendKey val="0"/>
-              <c:showVal val="1"/>
-              <c:showCatName val="0"/>
-              <c:showSerName val="0"/>
-              <c:showPercent val="0"/>
-              <c:showBubbleSize val="0"/>
-            </c:dLbl>
-            <c:dLbl>
-              <c:idx val="1"/>
-              <c:tx>
-                <c:rich>
-                  <a:bodyPr/>
-                  <a:lstStyle/>
-                  <a:p>
-                    <a:r>
-                      <a:t>Google V8</a:t>
-                    </a:r>
-                  </a:p>
-                </c:rich>
-              </c:tx>
-              <c:showLegendKey val="0"/>
-              <c:showVal val="1"/>
-              <c:showCatName val="0"/>
-              <c:showSerName val="0"/>
-              <c:showPercent val="0"/>
-              <c:showBubbleSize val="0"/>
-            </c:dLbl>
-            <c:dLbl>
-              <c:idx val="2"/>
-              <c:tx>
-                <c:rich>
-                  <a:bodyPr/>
-                  <a:lstStyle/>
-                  <a:p>
-                    <a:r>
-                      <a:t>PostgreSQL</a:t>
-                    </a:r>
-                  </a:p>
-                </c:rich>
-              </c:tx>
-              <c:showLegendKey val="0"/>
-              <c:showVal val="1"/>
-              <c:showCatName val="0"/>
-              <c:showSerName val="0"/>
-              <c:showPercent val="0"/>
-              <c:showBubbleSize val="0"/>
-            </c:dLbl>
-            <c:dLbl>
-              <c:idx val="3"/>
-              <c:tx>
-                <c:rich>
-                  <a:bodyPr/>
-                  <a:lstStyle/>
-                  <a:p>
-                    <a:r>
-                      <a:t>Systemd</a:t>
-                    </a:r>
-                  </a:p>
-                </c:rich>
-              </c:tx>
-              <c:showLegendKey val="0"/>
-              <c:showVal val="1"/>
-              <c:showCatName val="0"/>
-              <c:showSerName val="0"/>
-              <c:showPercent val="0"/>
-              <c:showBubbleSize val="0"/>
-            </c:dLbl>
-            <c:dLbl>
-              <c:idx val="4"/>
-              <c:tx>
-                <c:rich>
-                  <a:bodyPr/>
-                  <a:lstStyle/>
-                  <a:p>
-                    <a:r>
-                      <a:t>GIT</a:t>
-                    </a:r>
-                  </a:p>
-                </c:rich>
-              </c:tx>
-              <c:showLegendKey val="0"/>
-              <c:showVal val="1"/>
-              <c:showCatName val="0"/>
-              <c:showSerName val="0"/>
-              <c:showPercent val="0"/>
-              <c:showBubbleSize val="0"/>
-            </c:dLbl>
-            <c:dLbl>
-              <c:idx val="5"/>
-              <c:tx>
-                <c:rich>
-                  <a:bodyPr/>
-                  <a:lstStyle/>
-                  <a:p>
-                    <a:r>
-                      <a:t>Kafka</a:t>
-                    </a:r>
-                  </a:p>
-                </c:rich>
-              </c:tx>
-              <c:showLegendKey val="0"/>
-              <c:showVal val="1"/>
-              <c:showCatName val="0"/>
-              <c:showSerName val="0"/>
-              <c:showPercent val="0"/>
-              <c:showBubbleSize val="0"/>
-            </c:dLbl>
-            <c:dLbl>
-              <c:idx val="6"/>
-              <c:tx>
-                <c:rich>
-                  <a:bodyPr/>
-                  <a:lstStyle/>
-                  <a:p>
-                    <a:r>
-                      <a:t>Visual Studio Code</a:t>
-                    </a:r>
-                  </a:p>
-                </c:rich>
-              </c:tx>
-              <c:showLegendKey val="0"/>
-              <c:showVal val="1"/>
-              <c:showCatName val="0"/>
-              <c:showSerName val="0"/>
-              <c:showPercent val="0"/>
-              <c:showBubbleSize val="0"/>
-            </c:dLbl>
-            <c:dLbl>
-              <c:idx val="7"/>
-              <c:tx>
-                <c:rich>
-                  <a:bodyPr/>
-                  <a:lstStyle/>
-                  <a:p>
-                    <a:r>
-                      <a:t>JRuby</a:t>
-                    </a:r>
-                  </a:p>
-                </c:rich>
-              </c:tx>
-              <c:showLegendKey val="0"/>
-              <c:showVal val="1"/>
-              <c:showCatName val="0"/>
-              <c:showSerName val="0"/>
-              <c:showPercent val="0"/>
-              <c:showBubbleSize val="0"/>
-            </c:dLbl>
-            <c:dLbl>
-              <c:idx val="8"/>
-              <c:tx>
-                <c:rich>
-                  <a:bodyPr/>
-                  <a:lstStyle/>
-                  <a:p>
-                    <a:r>
-                      <a:t>Golang</a:t>
-                    </a:r>
-                  </a:p>
-                </c:rich>
-              </c:tx>
-              <c:showLegendKey val="0"/>
-              <c:showVal val="1"/>
-              <c:showCatName val="0"/>
-              <c:showSerName val="0"/>
-              <c:showPercent val="0"/>
-              <c:showBubbleSize val="0"/>
-            </c:dLbl>
-            <c:dLbl>
-              <c:idx val="9"/>
-              <c:tx>
-                <c:rich>
-                  <a:bodyPr/>
-                  <a:lstStyle/>
-                  <a:p>
-                    <a:r>
-                      <a:t>Angular</a:t>
-                    </a:r>
-                  </a:p>
-                </c:rich>
-              </c:tx>
-              <c:showLegendKey val="0"/>
-              <c:showVal val="1"/>
-              <c:showCatName val="0"/>
-              <c:showSerName val="0"/>
-              <c:showPercent val="0"/>
-              <c:showBubbleSize val="0"/>
-            </c:dLbl>
-            <c:dLbl>
-              <c:idx val="10"/>
-              <c:tx>
-                <c:rich>
-                  <a:bodyPr/>
-                  <a:lstStyle/>
-                  <a:p>
-                    <a:r>
-                      <a:t>NodeJS</a:t>
-                    </a:r>
-                  </a:p>
-                </c:rich>
-              </c:tx>
-              <c:showLegendKey val="0"/>
-              <c:showVal val="1"/>
-              <c:showCatName val="0"/>
-              <c:showSerName val="0"/>
-              <c:showPercent val="0"/>
-              <c:showBubbleSize val="0"/>
-            </c:dLbl>
-            <c:dLbl>
-              <c:idx val="11"/>
-              <c:tx>
-                <c:rich>
-                  <a:bodyPr/>
-                  <a:lstStyle/>
-                  <a:p>
-                    <a:r>
-                      <a:t>React</a:t>
-                    </a:r>
-                  </a:p>
-                </c:rich>
-              </c:tx>
-              <c:showLegendKey val="0"/>
-              <c:showVal val="1"/>
-              <c:showCatName val="0"/>
-              <c:showSerName val="0"/>
-              <c:showPercent val="0"/>
-              <c:showBubbleSize val="0"/>
-            </c:dLbl>
-            <c:dLbl>
-              <c:idx val="12"/>
-              <c:tx>
-                <c:rich>
-                  <a:bodyPr/>
-                  <a:lstStyle/>
-                  <a:p>
-                    <a:r>
-                      <a:t>Android-core</a:t>
-                    </a:r>
-                  </a:p>
-                </c:rich>
-              </c:tx>
-              <c:showLegendKey val="0"/>
-              <c:showVal val="1"/>
-              <c:showCatName val="0"/>
-              <c:showSerName val="0"/>
-              <c:showPercent val="0"/>
-              <c:showBubbleSize val="0"/>
-            </c:dLbl>
-            <c:dLbl>
-              <c:idx val="13"/>
-              <c:tx>
-                <c:rich>
-                  <a:bodyPr/>
-                  <a:lstStyle/>
-                  <a:p>
-                    <a:r>
-                      <a:t>Electron</a:t>
-                    </a:r>
-                  </a:p>
-                </c:rich>
-              </c:tx>
-              <c:showLegendKey val="0"/>
-              <c:showVal val="1"/>
-              <c:showCatName val="0"/>
-              <c:showSerName val="0"/>
-              <c:showPercent val="0"/>
-              <c:showBubbleSize val="0"/>
-            </c:dLbl>
-            <c:dLbl>
-              <c:idx val="14"/>
-              <c:tx>
-                <c:rich>
-                  <a:bodyPr/>
-                  <a:lstStyle/>
-                  <a:p>
-                    <a:r>
-                      <a:t>Bazel</a:t>
-                    </a:r>
-                  </a:p>
-                </c:rich>
-              </c:tx>
-              <c:showLegendKey val="0"/>
-              <c:showVal val="1"/>
-              <c:showCatName val="0"/>
-              <c:showSerName val="0"/>
-              <c:showPercent val="0"/>
-              <c:showBubbleSize val="0"/>
-            </c:dLbl>
-            <c:dLbl>
-              <c:idx val="15"/>
-              <c:tx>
-                <c:rich>
-                  <a:bodyPr/>
-                  <a:lstStyle/>
-                  <a:p>
-                    <a:r>
-                      <a:t>utPLSQL</a:t>
-                    </a:r>
-                  </a:p>
-                </c:rich>
-              </c:tx>
-              <c:showLegendKey val="0"/>
-              <c:showVal val="1"/>
-              <c:showCatName val="0"/>
-              <c:showSerName val="0"/>
-              <c:showPercent val="0"/>
-              <c:showBubbleSize val="0"/>
-            </c:dLbl>
-            <c:showLegendKey val="0"/>
-            <c:showVal val="0"/>
-            <c:showCatName val="0"/>
-            <c:showSerName val="0"/>
-            <c:showPercent val="0"/>
-            <c:showBubbleSize val="0"/>
-            <c:showLeaderLines val="1"/>
-          </c:dLbls>
           <c:xVal>
             <c:numRef>
-              <c:f>Sheet1!$A$27:$A$42</c:f>
+              <c:f>Sheet1!$A$6:$A$5</c:f>
               <c:numCache>
                 <c:formatCode>General</c:formatCode>
-                <c:ptCount val="16"/>
-                <c:pt idx="0">
-                  <c:v>260.16236712396966</c:v>
-                </c:pt>
-                <c:pt idx="1">
-                  <c:v>79.72585</c:v>
-                </c:pt>
-                <c:pt idx="2">
-                  <c:v>90.58979</c:v>
-                </c:pt>
-                <c:pt idx="3">
-                  <c:v>69.70323</c:v>
-                </c:pt>
-                <c:pt idx="4">
-                  <c:v>24.45168</c:v>
-                </c:pt>
-                <c:pt idx="5">
-                  <c:v>17.91134</c:v>
-                </c:pt>
-                <c:pt idx="6">
-                  <c:v>18.8132</c:v>
-                </c:pt>
-                <c:pt idx="7">
-                  <c:v>18.75342</c:v>
-                </c:pt>
-                <c:pt idx="8">
-                  <c:v>14.59827</c:v>
-                </c:pt>
-                <c:pt idx="9">
-                  <c:v>10.1496</c:v>
-                </c:pt>
-                <c:pt idx="10">
-                  <c:v>8.29559</c:v>
-                </c:pt>
-                <c:pt idx="11">
-                  <c:v>11.9119</c:v>
-                </c:pt>
-                <c:pt idx="12">
-                  <c:v>4.87776</c:v>
-                </c:pt>
-                <c:pt idx="13">
-                  <c:v>3.16419</c:v>
-                </c:pt>
-                <c:pt idx="14">
-                  <c:v>1.5314</c:v>
-                </c:pt>
-                <c:pt idx="15">
-                  <c:v>0.63175</c:v>
-                </c:pt>
+                <c:ptCount val="0"/>
               </c:numCache>
             </c:numRef>
           </c:xVal>
           <c:yVal>
             <c:numRef>
-              <c:f>Sheet1!$B$27:$B$42</c:f>
+              <c:f>Sheet1!$B$6:$B$5</c:f>
               <c:numCache>
                 <c:formatCode>General</c:formatCode>
-                <c:ptCount val="16"/>
-                <c:pt idx="0">
-                  <c:v>75.58706</c:v>
-                </c:pt>
-                <c:pt idx="1">
-                  <c:v>82.44632</c:v>
-                </c:pt>
-                <c:pt idx="2">
-                  <c:v>103.80727</c:v>
-                </c:pt>
-                <c:pt idx="3">
-                  <c:v>104.71228</c:v>
-                </c:pt>
-                <c:pt idx="4">
-                  <c:v>96.96495</c:v>
-                </c:pt>
-                <c:pt idx="5">
-                  <c:v>78.41279</c:v>
-                </c:pt>
-                <c:pt idx="6">
-                  <c:v>41.75224</c:v>
-                </c:pt>
-                <c:pt idx="7">
-                  <c:v>86.79028</c:v>
-                </c:pt>
-                <c:pt idx="8">
-                  <c:v>87.69346</c:v>
-                </c:pt>
-                <c:pt idx="9">
-                  <c:v>58.07822</c:v>
-                </c:pt>
-                <c:pt idx="10">
-                  <c:v>49.65581</c:v>
-                </c:pt>
-                <c:pt idx="11">
-                  <c:v>38.44903</c:v>
-                </c:pt>
-                <c:pt idx="12">
-                  <c:v>55.28725</c:v>
-                </c:pt>
-                <c:pt idx="13">
-                  <c:v>27.19237</c:v>
-                </c:pt>
-                <c:pt idx="14">
-                  <c:v>35.19517</c:v>
-                </c:pt>
-                <c:pt idx="15">
-                  <c:v>73.8148</c:v>
-                </c:pt>
+                <c:ptCount val="0"/>
               </c:numCache>
             </c:numRef>
           </c:yVal>
           <c:bubbleSize>
             <c:numRef>
-              <c:f>Sheet1!$C$27:$C$42</c:f>
+              <c:f>Sheet1!$C$6:$C$5</c:f>
               <c:numCache>
                 <c:formatCode>General</c:formatCode>
-                <c:ptCount val="16"/>
-                <c:pt idx="0">
-                  <c:v>260.16236712396966</c:v>
-                </c:pt>
-                <c:pt idx="1">
-                  <c:v>159.19123441612817</c:v>
-                </c:pt>
-                <c:pt idx="2">
-                  <c:v>100.97631859769871</c:v>
-                </c:pt>
-                <c:pt idx="3">
-                  <c:v>81.62158917682852</c:v>
-                </c:pt>
-                <c:pt idx="4">
-                  <c:v>36.8308447252819</c:v>
-                </c:pt>
-                <c:pt idx="5">
-                  <c:v>42.6041631944445</c:v>
-                </c:pt>
-                <c:pt idx="6">
-                  <c:v>77.33298297129444</c:v>
-                </c:pt>
-                <c:pt idx="7">
-                  <c:v>36.35964730933028</c:v>
-                </c:pt>
-                <c:pt idx="8">
-                  <c:v>25.287808219178057</c:v>
-                </c:pt>
-                <c:pt idx="9">
-                  <c:v>32.726012046993276</c:v>
-                </c:pt>
-                <c:pt idx="10">
-                  <c:v>34.19510036935046</c:v>
-                </c:pt>
-                <c:pt idx="11">
-                  <c:v>36.73600159299017</c:v>
-                </c:pt>
-                <c:pt idx="12">
-                  <c:v>17.05715701219506</c:v>
-                </c:pt>
-                <c:pt idx="13">
-                  <c:v>12.957363313311653</c:v>
-                </c:pt>
-                <c:pt idx="14">
-                  <c:v>6.740096036585361</c:v>
-                </c:pt>
-                <c:pt idx="15">
-                  <c:v>1.7355555555555553</c:v>
-                </c:pt>
+                <c:ptCount val="0"/>
               </c:numCache>
             </c:numRef>
           </c:bubbleSize>
@@ -2510,7 +833,7 @@
           <c:order val="3"/>
           <c:tx>
             <c:strRef>
-              <c:f>Sheet1!$B$44</c:f>
+              <c:f>Sheet1!$B$7</c:f>
               <c:strCache>
                 <c:ptCount val="1"/>
                 <c:pt idx="0">
@@ -2529,711 +852,30 @@
             <a:effectLst/>
           </c:spPr>
           <c:invertIfNegative val="0"/>
-          <c:dPt>
-            <c:idx val="0"/>
-            <c:spPr>
-              <a:solidFill>
-                <a:srgbClr val="DBE1FF"/>
-              </a:solidFill>
-              <a:ln>
-                <a:solidFill>
-                  <a:srgbClr val="FFFFFF"/>
-                </a:solidFill>
-              </a:ln>
-            </c:spPr>
-          </c:dPt>
-          <c:dPt>
-            <c:idx val="1"/>
-            <c:spPr>
-              <a:solidFill>
-                <a:srgbClr val="DBE1FF"/>
-              </a:solidFill>
-              <a:ln>
-                <a:solidFill>
-                  <a:srgbClr val="FFFFFF"/>
-                </a:solidFill>
-              </a:ln>
-            </c:spPr>
-          </c:dPt>
-          <c:dPt>
-            <c:idx val="2"/>
-            <c:spPr>
-              <a:solidFill>
-                <a:srgbClr val="DBE1FF"/>
-              </a:solidFill>
-              <a:ln>
-                <a:solidFill>
-                  <a:srgbClr val="FFFFFF"/>
-                </a:solidFill>
-              </a:ln>
-            </c:spPr>
-          </c:dPt>
-          <c:dPt>
-            <c:idx val="3"/>
-            <c:spPr>
-              <a:solidFill>
-                <a:srgbClr val="DBE1FF"/>
-              </a:solidFill>
-              <a:ln>
-                <a:solidFill>
-                  <a:srgbClr val="FFFFFF"/>
-                </a:solidFill>
-              </a:ln>
-            </c:spPr>
-          </c:dPt>
-          <c:dPt>
-            <c:idx val="4"/>
-            <c:spPr>
-              <a:solidFill>
-                <a:srgbClr val="DBE1FF"/>
-              </a:solidFill>
-              <a:ln>
-                <a:solidFill>
-                  <a:srgbClr val="FFFFFF"/>
-                </a:solidFill>
-              </a:ln>
-            </c:spPr>
-          </c:dPt>
-          <c:dPt>
-            <c:idx val="5"/>
-            <c:spPr>
-              <a:solidFill>
-                <a:srgbClr val="DBE1FF"/>
-              </a:solidFill>
-              <a:ln>
-                <a:solidFill>
-                  <a:srgbClr val="FFFFFF"/>
-                </a:solidFill>
-              </a:ln>
-            </c:spPr>
-          </c:dPt>
-          <c:dPt>
-            <c:idx val="6"/>
-            <c:spPr>
-              <a:solidFill>
-                <a:srgbClr val="DBE1FF"/>
-              </a:solidFill>
-              <a:ln>
-                <a:solidFill>
-                  <a:srgbClr val="FFFFFF"/>
-                </a:solidFill>
-              </a:ln>
-            </c:spPr>
-          </c:dPt>
-          <c:dPt>
-            <c:idx val="7"/>
-            <c:spPr>
-              <a:solidFill>
-                <a:srgbClr val="DBE1FF"/>
-              </a:solidFill>
-              <a:ln>
-                <a:solidFill>
-                  <a:srgbClr val="FFFFFF"/>
-                </a:solidFill>
-              </a:ln>
-            </c:spPr>
-          </c:dPt>
-          <c:dPt>
-            <c:idx val="8"/>
-            <c:spPr>
-              <a:solidFill>
-                <a:srgbClr val="DBE1FF"/>
-              </a:solidFill>
-              <a:ln>
-                <a:solidFill>
-                  <a:srgbClr val="FFFFFF"/>
-                </a:solidFill>
-              </a:ln>
-            </c:spPr>
-          </c:dPt>
-          <c:dPt>
-            <c:idx val="9"/>
-            <c:spPr>
-              <a:solidFill>
-                <a:srgbClr val="DBE1FF"/>
-              </a:solidFill>
-              <a:ln>
-                <a:solidFill>
-                  <a:srgbClr val="FFFFFF"/>
-                </a:solidFill>
-              </a:ln>
-            </c:spPr>
-          </c:dPt>
-          <c:dPt>
-            <c:idx val="10"/>
-            <c:spPr>
-              <a:solidFill>
-                <a:srgbClr val="DBE1FF"/>
-              </a:solidFill>
-              <a:ln>
-                <a:solidFill>
-                  <a:srgbClr val="FFFFFF"/>
-                </a:solidFill>
-              </a:ln>
-            </c:spPr>
-          </c:dPt>
-          <c:dPt>
-            <c:idx val="11"/>
-            <c:spPr>
-              <a:solidFill>
-                <a:srgbClr val="DBE1FF"/>
-              </a:solidFill>
-              <a:ln>
-                <a:solidFill>
-                  <a:srgbClr val="FFFFFF"/>
-                </a:solidFill>
-              </a:ln>
-            </c:spPr>
-          </c:dPt>
-          <c:dPt>
-            <c:idx val="12"/>
-            <c:spPr>
-              <a:solidFill>
-                <a:srgbClr val="DBE1FF"/>
-              </a:solidFill>
-              <a:ln>
-                <a:solidFill>
-                  <a:srgbClr val="FFFFFF"/>
-                </a:solidFill>
-              </a:ln>
-            </c:spPr>
-          </c:dPt>
-          <c:dPt>
-            <c:idx val="13"/>
-            <c:spPr>
-              <a:solidFill>
-                <a:srgbClr val="DBE1FF"/>
-              </a:solidFill>
-              <a:ln>
-                <a:solidFill>
-                  <a:srgbClr val="FFFFFF"/>
-                </a:solidFill>
-              </a:ln>
-            </c:spPr>
-          </c:dPt>
-          <c:dPt>
-            <c:idx val="14"/>
-            <c:spPr>
-              <a:solidFill>
-                <a:srgbClr val="DBE1FF"/>
-              </a:solidFill>
-              <a:ln>
-                <a:solidFill>
-                  <a:srgbClr val="FFFFFF"/>
-                </a:solidFill>
-              </a:ln>
-            </c:spPr>
-          </c:dPt>
-          <c:dPt>
-            <c:idx val="15"/>
-            <c:spPr>
-              <a:solidFill>
-                <a:srgbClr val="DBE1FF"/>
-              </a:solidFill>
-              <a:ln>
-                <a:solidFill>
-                  <a:srgbClr val="FFFFFF"/>
-                </a:solidFill>
-              </a:ln>
-            </c:spPr>
-          </c:dPt>
-          <c:dLbls>
-            <c:dLbl>
-              <c:idx val="0"/>
-              <c:tx>
-                <c:rich>
-                  <a:bodyPr/>
-                  <a:lstStyle/>
-                  <a:p>
-                    <a:r>
-                      <a:t>Clickhouse</a:t>
-                    </a:r>
-                  </a:p>
-                </c:rich>
-              </c:tx>
-              <c:showLegendKey val="0"/>
-              <c:showVal val="1"/>
-              <c:showCatName val="0"/>
-              <c:showSerName val="0"/>
-              <c:showPercent val="0"/>
-              <c:showBubbleSize val="0"/>
-            </c:dLbl>
-            <c:dLbl>
-              <c:idx val="1"/>
-              <c:tx>
-                <c:rich>
-                  <a:bodyPr/>
-                  <a:lstStyle/>
-                  <a:p>
-                    <a:r>
-                      <a:t>Brave-core</a:t>
-                    </a:r>
-                  </a:p>
-                </c:rich>
-              </c:tx>
-              <c:showLegendKey val="0"/>
-              <c:showVal val="1"/>
-              <c:showCatName val="0"/>
-              <c:showSerName val="0"/>
-              <c:showPercent val="0"/>
-              <c:showBubbleSize val="0"/>
-            </c:dLbl>
-            <c:dLbl>
-              <c:idx val="2"/>
-              <c:tx>
-                <c:rich>
-                  <a:bodyPr/>
-                  <a:lstStyle/>
-                  <a:p>
-                    <a:r>
-                      <a:t>Outsystems-demo</a:t>
-                    </a:r>
-                  </a:p>
-                </c:rich>
-              </c:tx>
-              <c:showLegendKey val="0"/>
-              <c:showVal val="1"/>
-              <c:showCatName val="0"/>
-              <c:showSerName val="0"/>
-              <c:showPercent val="0"/>
-              <c:showBubbleSize val="0"/>
-            </c:dLbl>
-            <c:dLbl>
-              <c:idx val="3"/>
-              <c:tx>
-                <c:rich>
-                  <a:bodyPr/>
-                  <a:lstStyle/>
-                  <a:p>
-                    <a:r>
-                      <a:t>Umbraco-cms</a:t>
-                    </a:r>
-                  </a:p>
-                </c:rich>
-              </c:tx>
-              <c:showLegendKey val="0"/>
-              <c:showVal val="1"/>
-              <c:showCatName val="0"/>
-              <c:showSerName val="0"/>
-              <c:showPercent val="0"/>
-              <c:showBubbleSize val="0"/>
-            </c:dLbl>
-            <c:dLbl>
-              <c:idx val="4"/>
-              <c:tx>
-                <c:rich>
-                  <a:bodyPr/>
-                  <a:lstStyle/>
-                  <a:p>
-                    <a:r>
-                      <a:t>Solana</a:t>
-                    </a:r>
-                  </a:p>
-                </c:rich>
-              </c:tx>
-              <c:showLegendKey val="0"/>
-              <c:showVal val="1"/>
-              <c:showCatName val="0"/>
-              <c:showSerName val="0"/>
-              <c:showPercent val="0"/>
-              <c:showBubbleSize val="0"/>
-            </c:dLbl>
-            <c:dLbl>
-              <c:idx val="5"/>
-              <c:tx>
-                <c:rich>
-                  <a:bodyPr/>
-                  <a:lstStyle/>
-                  <a:p>
-                    <a:r>
-                      <a:t>Twitter Algorithm</a:t>
-                    </a:r>
-                  </a:p>
-                </c:rich>
-              </c:tx>
-              <c:showLegendKey val="0"/>
-              <c:showVal val="1"/>
-              <c:showCatName val="0"/>
-              <c:showSerName val="0"/>
-              <c:showPercent val="0"/>
-              <c:showBubbleSize val="0"/>
-            </c:dLbl>
-            <c:dLbl>
-              <c:idx val="6"/>
-              <c:tx>
-                <c:rich>
-                  <a:bodyPr/>
-                  <a:lstStyle/>
-                  <a:p>
-                    <a:r>
-                      <a:t>Google Guava</a:t>
-                    </a:r>
-                  </a:p>
-                </c:rich>
-              </c:tx>
-              <c:showLegendKey val="0"/>
-              <c:showVal val="1"/>
-              <c:showCatName val="0"/>
-              <c:showSerName val="0"/>
-              <c:showPercent val="0"/>
-              <c:showBubbleSize val="0"/>
-            </c:dLbl>
-            <c:dLbl>
-              <c:idx val="7"/>
-              <c:tx>
-                <c:rich>
-                  <a:bodyPr/>
-                  <a:lstStyle/>
-                  <a:p>
-                    <a:r>
-                      <a:t>Bitcoin</a:t>
-                    </a:r>
-                  </a:p>
-                </c:rich>
-              </c:tx>
-              <c:showLegendKey val="0"/>
-              <c:showVal val="1"/>
-              <c:showCatName val="0"/>
-              <c:showSerName val="0"/>
-              <c:showPercent val="0"/>
-              <c:showBubbleSize val="0"/>
-            </c:dLbl>
-            <c:dLbl>
-              <c:idx val="8"/>
-              <c:tx>
-                <c:rich>
-                  <a:bodyPr/>
-                  <a:lstStyle/>
-                  <a:p>
-                    <a:r>
-                      <a:t>Struts</a:t>
-                    </a:r>
-                  </a:p>
-                </c:rich>
-              </c:tx>
-              <c:showLegendKey val="0"/>
-              <c:showVal val="1"/>
-              <c:showCatName val="0"/>
-              <c:showSerName val="0"/>
-              <c:showPercent val="0"/>
-              <c:showBubbleSize val="0"/>
-            </c:dLbl>
-            <c:dLbl>
-              <c:idx val="9"/>
-              <c:tx>
-                <c:rich>
-                  <a:bodyPr/>
-                  <a:lstStyle/>
-                  <a:p>
-                    <a:r>
-                      <a:t>abapGit</a:t>
-                    </a:r>
-                  </a:p>
-                </c:rich>
-              </c:tx>
-              <c:showLegendKey val="0"/>
-              <c:showVal val="1"/>
-              <c:showCatName val="0"/>
-              <c:showSerName val="0"/>
-              <c:showPercent val="0"/>
-              <c:showBubbleSize val="0"/>
-            </c:dLbl>
-            <c:dLbl>
-              <c:idx val="10"/>
-              <c:tx>
-                <c:rich>
-                  <a:bodyPr/>
-                  <a:lstStyle/>
-                  <a:p>
-                    <a:r>
-                      <a:t>Curl</a:t>
-                    </a:r>
-                  </a:p>
-                </c:rich>
-              </c:tx>
-              <c:showLegendKey val="0"/>
-              <c:showVal val="1"/>
-              <c:showCatName val="0"/>
-              <c:showSerName val="0"/>
-              <c:showPercent val="0"/>
-              <c:showBubbleSize val="0"/>
-            </c:dLbl>
-            <c:dLbl>
-              <c:idx val="11"/>
-              <c:tx>
-                <c:rich>
-                  <a:bodyPr/>
-                  <a:lstStyle/>
-                  <a:p>
-                    <a:r>
-                      <a:t>Webpack</a:t>
-                    </a:r>
-                  </a:p>
-                </c:rich>
-              </c:tx>
-              <c:showLegendKey val="0"/>
-              <c:showVal val="1"/>
-              <c:showCatName val="0"/>
-              <c:showSerName val="0"/>
-              <c:showPercent val="0"/>
-              <c:showBubbleSize val="0"/>
-            </c:dLbl>
-            <c:dLbl>
-              <c:idx val="12"/>
-              <c:tx>
-                <c:rich>
-                  <a:bodyPr/>
-                  <a:lstStyle/>
-                  <a:p>
-                    <a:r>
-                      <a:t>Rasa</a:t>
-                    </a:r>
-                  </a:p>
-                </c:rich>
-              </c:tx>
-              <c:showLegendKey val="0"/>
-              <c:showVal val="1"/>
-              <c:showCatName val="0"/>
-              <c:showSerName val="0"/>
-              <c:showPercent val="0"/>
-              <c:showBubbleSize val="0"/>
-            </c:dLbl>
-            <c:dLbl>
-              <c:idx val="13"/>
-              <c:tx>
-                <c:rich>
-                  <a:bodyPr/>
-                  <a:lstStyle/>
-                  <a:p>
-                    <a:r>
-                      <a:t>Vscode-python</a:t>
-                    </a:r>
-                  </a:p>
-                </c:rich>
-              </c:tx>
-              <c:showLegendKey val="0"/>
-              <c:showVal val="1"/>
-              <c:showCatName val="0"/>
-              <c:showSerName val="0"/>
-              <c:showPercent val="0"/>
-              <c:showBubbleSize val="0"/>
-            </c:dLbl>
-            <c:dLbl>
-              <c:idx val="14"/>
-              <c:tx>
-                <c:rich>
-                  <a:bodyPr/>
-                  <a:lstStyle/>
-                  <a:p>
-                    <a:r>
-                      <a:t>Facebookyoga</a:t>
-                    </a:r>
-                  </a:p>
-                </c:rich>
-              </c:tx>
-              <c:showLegendKey val="0"/>
-              <c:showVal val="1"/>
-              <c:showCatName val="0"/>
-              <c:showSerName val="0"/>
-              <c:showPercent val="0"/>
-              <c:showBubbleSize val="0"/>
-            </c:dLbl>
-            <c:dLbl>
-              <c:idx val="15"/>
-              <c:tx>
-                <c:rich>
-                  <a:bodyPr/>
-                  <a:lstStyle/>
-                  <a:p>
-                    <a:r>
-                      <a:t>Return to workplace</a:t>
-                    </a:r>
-                  </a:p>
-                </c:rich>
-              </c:tx>
-              <c:showLegendKey val="0"/>
-              <c:showVal val="1"/>
-              <c:showCatName val="0"/>
-              <c:showSerName val="0"/>
-              <c:showPercent val="0"/>
-              <c:showBubbleSize val="0"/>
-            </c:dLbl>
-            <c:showLegendKey val="0"/>
-            <c:showVal val="0"/>
-            <c:showCatName val="0"/>
-            <c:showSerName val="0"/>
-            <c:showPercent val="0"/>
-            <c:showBubbleSize val="0"/>
-            <c:showLeaderLines val="1"/>
-          </c:dLbls>
           <c:xVal>
             <c:numRef>
-              <c:f>Sheet1!$A$45:$A$60</c:f>
+              <c:f>Sheet1!$A$8:$A$7</c:f>
               <c:numCache>
                 <c:formatCode>General</c:formatCode>
-                <c:ptCount val="16"/>
-                <c:pt idx="0">
-                  <c:v>56.01164</c:v>
-                </c:pt>
-                <c:pt idx="1">
-                  <c:v>28.55415</c:v>
-                </c:pt>
-                <c:pt idx="2">
-                  <c:v>70.96459334320562</c:v>
-                </c:pt>
-                <c:pt idx="3">
-                  <c:v>11.14414</c:v>
-                </c:pt>
-                <c:pt idx="4">
-                  <c:v>34.84491</c:v>
-                </c:pt>
-                <c:pt idx="5">
-                  <c:v>39.71483466072114</c:v>
-                </c:pt>
-                <c:pt idx="6">
-                  <c:v>5.23083</c:v>
-                </c:pt>
-                <c:pt idx="7">
-                  <c:v>13.05913</c:v>
-                </c:pt>
-                <c:pt idx="8">
-                  <c:v>4.18054</c:v>
-                </c:pt>
-                <c:pt idx="9">
-                  <c:v>14.616503703365735</c:v>
-                </c:pt>
-                <c:pt idx="10">
-                  <c:v>8.67078</c:v>
-                </c:pt>
-                <c:pt idx="11">
-                  <c:v>2.68415</c:v>
-                </c:pt>
-                <c:pt idx="12">
-                  <c:v>3.52922</c:v>
-                </c:pt>
-                <c:pt idx="13">
-                  <c:v>1.31425</c:v>
-                </c:pt>
-                <c:pt idx="14">
-                  <c:v>1.03302</c:v>
-                </c:pt>
-                <c:pt idx="15">
-                  <c:v>0.91724</c:v>
-                </c:pt>
+                <c:ptCount val="0"/>
               </c:numCache>
             </c:numRef>
           </c:xVal>
           <c:yVal>
             <c:numRef>
-              <c:f>Sheet1!$B$45:$B$60</c:f>
+              <c:f>Sheet1!$B$8:$B$7</c:f>
               <c:numCache>
                 <c:formatCode>General</c:formatCode>
-                <c:ptCount val="16"/>
-                <c:pt idx="0">
-                  <c:v>79.38283</c:v>
-                </c:pt>
-                <c:pt idx="1">
-                  <c:v>42.09434</c:v>
-                </c:pt>
-                <c:pt idx="2">
-                  <c:v>32.72942</c:v>
-                </c:pt>
-                <c:pt idx="3">
-                  <c:v>37.41208</c:v>
-                </c:pt>
-                <c:pt idx="4">
-                  <c:v>96.68597</c:v>
-                </c:pt>
-                <c:pt idx="5">
-                  <c:v>43.72778</c:v>
-                </c:pt>
-                <c:pt idx="6">
-                  <c:v>27.04173</c:v>
-                </c:pt>
-                <c:pt idx="7">
-                  <c:v>76.52871</c:v>
-                </c:pt>
-                <c:pt idx="8">
-                  <c:v>66.25977</c:v>
-                </c:pt>
-                <c:pt idx="9">
-                  <c:v>71.13314</c:v>
-                </c:pt>
-                <c:pt idx="10">
-                  <c:v>82.55915</c:v>
-                </c:pt>
-                <c:pt idx="11">
-                  <c:v>59.37446</c:v>
-                </c:pt>
-                <c:pt idx="12">
-                  <c:v>83.75028</c:v>
-                </c:pt>
-                <c:pt idx="13">
-                  <c:v>39.9342</c:v>
-                </c:pt>
-                <c:pt idx="14">
-                  <c:v>37.98614</c:v>
-                </c:pt>
-                <c:pt idx="15">
-                  <c:v>37.09208</c:v>
-                </c:pt>
+                <c:ptCount val="0"/>
               </c:numCache>
             </c:numRef>
           </c:yVal>
           <c:bubbleSize>
             <c:numRef>
-              <c:f>Sheet1!$C$45:$C$60</c:f>
+              <c:f>Sheet1!$C$8:$C$7</c:f>
               <c:numCache>
                 <c:formatCode>General</c:formatCode>
-                <c:ptCount val="16"/>
-                <c:pt idx="0">
-                  <c:v>135.60304060338413</c:v>
-                </c:pt>
-                <c:pt idx="1">
-                  <c:v>116.93216991312302</c:v>
-                </c:pt>
-                <c:pt idx="2">
-                  <c:v>70.96459334320562</c:v>
-                </c:pt>
-                <c:pt idx="3">
-                  <c:v>45.658306856402554</c:v>
-                </c:pt>
-                <c:pt idx="4">
-                  <c:v>45.13899999999996</c:v>
-                </c:pt>
-                <c:pt idx="5">
-                  <c:v>39.71483466072114</c:v>
-                </c:pt>
-                <c:pt idx="6">
-                  <c:v>29.576290322580657</c:v>
-                </c:pt>
-                <c:pt idx="7">
-                  <c:v>26.10661204268288</c:v>
-                </c:pt>
-                <c:pt idx="8">
-                  <c:v>18.920243547897623</c:v>
-                </c:pt>
-                <c:pt idx="9">
-                  <c:v>14.616503703365735</c:v>
-                </c:pt>
-                <c:pt idx="10">
-                  <c:v>14.519878048780463</c:v>
-                </c:pt>
-                <c:pt idx="11">
-                  <c:v>10.991592990840289</c:v>
-                </c:pt>
-                <c:pt idx="12">
-                  <c:v>7.93359375</c:v>
-                </c:pt>
-                <c:pt idx="13">
-                  <c:v>5.73710339506173</c:v>
-                </c:pt>
-                <c:pt idx="14">
-                  <c:v>3.603644565740011</c:v>
-                </c:pt>
-                <c:pt idx="15">
-                  <c:v>2.9021568570861747</c:v>
-                </c:pt>
+                <c:ptCount val="0"/>
               </c:numCache>
             </c:numRef>
           </c:bubbleSize>
@@ -3249,7 +891,7 @@
           <c:order val="4"/>
           <c:tx>
             <c:strRef>
-              <c:f>Sheet1!$B$62</c:f>
+              <c:f>Sheet1!$B$9</c:f>
               <c:strCache>
                 <c:ptCount val="1"/>
                 <c:pt idx="0">
@@ -3281,6 +923,149 @@
               </a:ln>
             </c:spPr>
           </c:dPt>
+          <c:dPt>
+            <c:idx val="1"/>
+            <c:spPr>
+              <a:solidFill>
+                <a:srgbClr val="8A98A8"/>
+              </a:solidFill>
+              <a:ln>
+                <a:solidFill>
+                  <a:srgbClr val="FFFFFF"/>
+                </a:solidFill>
+              </a:ln>
+            </c:spPr>
+          </c:dPt>
+          <c:dPt>
+            <c:idx val="2"/>
+            <c:spPr>
+              <a:solidFill>
+                <a:srgbClr val="8A98A8"/>
+              </a:solidFill>
+              <a:ln>
+                <a:solidFill>
+                  <a:srgbClr val="FFFFFF"/>
+                </a:solidFill>
+              </a:ln>
+            </c:spPr>
+          </c:dPt>
+          <c:dPt>
+            <c:idx val="3"/>
+            <c:spPr>
+              <a:solidFill>
+                <a:srgbClr val="8A98A8"/>
+              </a:solidFill>
+              <a:ln>
+                <a:solidFill>
+                  <a:srgbClr val="FFFFFF"/>
+                </a:solidFill>
+              </a:ln>
+            </c:spPr>
+          </c:dPt>
+          <c:dPt>
+            <c:idx val="4"/>
+            <c:spPr>
+              <a:solidFill>
+                <a:srgbClr val="8A98A8"/>
+              </a:solidFill>
+              <a:ln>
+                <a:solidFill>
+                  <a:srgbClr val="FFFFFF"/>
+                </a:solidFill>
+              </a:ln>
+            </c:spPr>
+          </c:dPt>
+          <c:dPt>
+            <c:idx val="5"/>
+            <c:spPr>
+              <a:solidFill>
+                <a:srgbClr val="8A98A8"/>
+              </a:solidFill>
+              <a:ln>
+                <a:solidFill>
+                  <a:srgbClr val="FFFFFF"/>
+                </a:solidFill>
+              </a:ln>
+            </c:spPr>
+          </c:dPt>
+          <c:dPt>
+            <c:idx val="6"/>
+            <c:spPr>
+              <a:solidFill>
+                <a:srgbClr val="8A98A8"/>
+              </a:solidFill>
+              <a:ln>
+                <a:solidFill>
+                  <a:srgbClr val="FFFFFF"/>
+                </a:solidFill>
+              </a:ln>
+            </c:spPr>
+          </c:dPt>
+          <c:dPt>
+            <c:idx val="7"/>
+            <c:spPr>
+              <a:solidFill>
+                <a:srgbClr val="8A98A8"/>
+              </a:solidFill>
+              <a:ln>
+                <a:solidFill>
+                  <a:srgbClr val="FFFFFF"/>
+                </a:solidFill>
+              </a:ln>
+            </c:spPr>
+          </c:dPt>
+          <c:dPt>
+            <c:idx val="8"/>
+            <c:spPr>
+              <a:solidFill>
+                <a:srgbClr val="8A98A8"/>
+              </a:solidFill>
+              <a:ln>
+                <a:solidFill>
+                  <a:srgbClr val="FFFFFF"/>
+                </a:solidFill>
+              </a:ln>
+            </c:spPr>
+          </c:dPt>
+          <c:dPt>
+            <c:idx val="9"/>
+            <c:spPr>
+              <a:solidFill>
+                <a:srgbClr val="8A98A8"/>
+              </a:solidFill>
+              <a:ln>
+                <a:solidFill>
+                  <a:srgbClr val="FFFFFF"/>
+                </a:solidFill>
+              </a:ln>
+            </c:spPr>
+          </c:dPt>
+          <c:dPt>
+            <c:idx val="10"/>
+            <c:spPr>
+              <a:solidFill>
+                <a:srgbClr val="8A98A8"/>
+              </a:solidFill>
+              <a:ln>
+                <a:solidFill>
+                  <a:srgbClr val="FFFFFF"/>
+                </a:solidFill>
+              </a:ln>
+            </c:spPr>
+          </c:dPt>
+          <c:dPt>
+            <c:idx val="11"/>
+            <c:spPr>
+              <a:solidFill>
+                <a:srgbClr val="8A98A8"/>
+              </a:solidFill>
+              <a:ln>
+                <a:solidFill>
+                  <a:srgbClr val="FFFFFF"/>
+                </a:solidFill>
+              </a:ln>
+            </c:spPr>
+          </c:dPt>
           <c:dLbls>
             <c:dLbl>
               <c:idx val="0"/>
@@ -3290,7 +1075,227 @@
                   <a:lstStyle/>
                   <a:p>
                     <a:r>
-                      <a:t>webgoat</a:t>
+                      <a:t>integrationtest-elasticsearch</a:t>
+                    </a:r>
+                  </a:p>
+                </c:rich>
+              </c:tx>
+              <c:showLegendKey val="0"/>
+              <c:showVal val="1"/>
+              <c:showCatName val="0"/>
+              <c:showSerName val="0"/>
+              <c:showPercent val="0"/>
+              <c:showBubbleSize val="0"/>
+            </c:dLbl>
+            <c:dLbl>
+              <c:idx val="1"/>
+              <c:tx>
+                <c:rich>
+                  <a:bodyPr/>
+                  <a:lstStyle/>
+                  <a:p>
+                    <a:r>
+                      <a:t>integrationtest-airflow</a:t>
+                    </a:r>
+                  </a:p>
+                </c:rich>
+              </c:tx>
+              <c:showLegendKey val="0"/>
+              <c:showVal val="1"/>
+              <c:showCatName val="0"/>
+              <c:showSerName val="0"/>
+              <c:showPercent val="0"/>
+              <c:showBubbleSize val="0"/>
+            </c:dLbl>
+            <c:dLbl>
+              <c:idx val="2"/>
+              <c:tx>
+                <c:rich>
+                  <a:bodyPr/>
+                  <a:lstStyle/>
+                  <a:p>
+                    <a:r>
+                      <a:t>integrationtest-vscode</a:t>
+                    </a:r>
+                  </a:p>
+                </c:rich>
+              </c:tx>
+              <c:showLegendKey val="0"/>
+              <c:showVal val="1"/>
+              <c:showCatName val="0"/>
+              <c:showSerName val="0"/>
+              <c:showPercent val="0"/>
+              <c:showBubbleSize val="0"/>
+            </c:dLbl>
+            <c:dLbl>
+              <c:idx val="3"/>
+              <c:tx>
+                <c:rich>
+                  <a:bodyPr/>
+                  <a:lstStyle/>
+                  <a:p>
+                    <a:r>
+                      <a:t>integrationtest-git</a:t>
+                    </a:r>
+                  </a:p>
+                </c:rich>
+              </c:tx>
+              <c:showLegendKey val="0"/>
+              <c:showVal val="1"/>
+              <c:showCatName val="0"/>
+              <c:showSerName val="0"/>
+              <c:showPercent val="0"/>
+              <c:showBubbleSize val="0"/>
+            </c:dLbl>
+            <c:dLbl>
+              <c:idx val="4"/>
+              <c:tx>
+                <c:rich>
+                  <a:bodyPr/>
+                  <a:lstStyle/>
+                  <a:p>
+                    <a:r>
+                      <a:t>integrationtest-kafka</a:t>
+                    </a:r>
+                  </a:p>
+                </c:rich>
+              </c:tx>
+              <c:showLegendKey val="0"/>
+              <c:showVal val="1"/>
+              <c:showCatName val="0"/>
+              <c:showSerName val="0"/>
+              <c:showPercent val="0"/>
+              <c:showBubbleSize val="0"/>
+            </c:dLbl>
+            <c:dLbl>
+              <c:idx val="5"/>
+              <c:tx>
+                <c:rich>
+                  <a:bodyPr/>
+                  <a:lstStyle/>
+                  <a:p>
+                    <a:r>
+                      <a:t>integrationtest-jruby</a:t>
+                    </a:r>
+                  </a:p>
+                </c:rich>
+              </c:tx>
+              <c:showLegendKey val="0"/>
+              <c:showVal val="1"/>
+              <c:showCatName val="0"/>
+              <c:showSerName val="0"/>
+              <c:showPercent val="0"/>
+              <c:showBubbleSize val="0"/>
+            </c:dLbl>
+            <c:dLbl>
+              <c:idx val="6"/>
+              <c:tx>
+                <c:rich>
+                  <a:bodyPr/>
+                  <a:lstStyle/>
+                  <a:p>
+                    <a:r>
+                      <a:t>integrationtest-druid</a:t>
+                    </a:r>
+                  </a:p>
+                </c:rich>
+              </c:tx>
+              <c:showLegendKey val="0"/>
+              <c:showVal val="1"/>
+              <c:showCatName val="0"/>
+              <c:showSerName val="0"/>
+              <c:showPercent val="0"/>
+              <c:showBubbleSize val="0"/>
+            </c:dLbl>
+            <c:dLbl>
+              <c:idx val="7"/>
+              <c:tx>
+                <c:rich>
+                  <a:bodyPr/>
+                  <a:lstStyle/>
+                  <a:p>
+                    <a:r>
+                      <a:t>integrationtest-webpack</a:t>
+                    </a:r>
+                  </a:p>
+                </c:rich>
+              </c:tx>
+              <c:showLegendKey val="0"/>
+              <c:showVal val="1"/>
+              <c:showCatName val="0"/>
+              <c:showSerName val="0"/>
+              <c:showPercent val="0"/>
+              <c:showBubbleSize val="0"/>
+            </c:dLbl>
+            <c:dLbl>
+              <c:idx val="8"/>
+              <c:tx>
+                <c:rich>
+                  <a:bodyPr/>
+                  <a:lstStyle/>
+                  <a:p>
+                    <a:r>
+                      <a:t>integrationtest-electron</a:t>
+                    </a:r>
+                  </a:p>
+                </c:rich>
+              </c:tx>
+              <c:showLegendKey val="0"/>
+              <c:showVal val="1"/>
+              <c:showCatName val="0"/>
+              <c:showSerName val="0"/>
+              <c:showPercent val="0"/>
+              <c:showBubbleSize val="0"/>
+            </c:dLbl>
+            <c:dLbl>
+              <c:idx val="9"/>
+              <c:tx>
+                <c:rich>
+                  <a:bodyPr/>
+                  <a:lstStyle/>
+                  <a:p>
+                    <a:r>
+                      <a:t>integrationtest-bazel</a:t>
+                    </a:r>
+                  </a:p>
+                </c:rich>
+              </c:tx>
+              <c:showLegendKey val="0"/>
+              <c:showVal val="1"/>
+              <c:showCatName val="0"/>
+              <c:showSerName val="0"/>
+              <c:showPercent val="0"/>
+              <c:showBubbleSize val="0"/>
+            </c:dLbl>
+            <c:dLbl>
+              <c:idx val="10"/>
+              <c:tx>
+                <c:rich>
+                  <a:bodyPr/>
+                  <a:lstStyle/>
+                  <a:p>
+                    <a:r>
+                      <a:t>integrationtest-facebookyoga</a:t>
+                    </a:r>
+                  </a:p>
+                </c:rich>
+              </c:tx>
+              <c:showLegendKey val="0"/>
+              <c:showVal val="1"/>
+              <c:showCatName val="0"/>
+              <c:showSerName val="0"/>
+              <c:showPercent val="0"/>
+              <c:showBubbleSize val="0"/>
+            </c:dLbl>
+            <c:dLbl>
+              <c:idx val="11"/>
+              <c:tx>
+                <c:rich>
+                  <a:bodyPr/>
+                  <a:lstStyle/>
+                  <a:p>
+                    <a:r>
+                      <a:t>integrationtest-zuul</a:t>
                     </a:r>
                   </a:p>
                 </c:rich>
@@ -3312,36 +1317,135 @@
           </c:dLbls>
           <c:xVal>
             <c:numRef>
-              <c:f>Sheet1!$A$63:$A$63</c:f>
+              <c:f>Sheet1!$A$10:$A$21</c:f>
               <c:numCache>
                 <c:formatCode>General</c:formatCode>
-                <c:ptCount val="1"/>
+                <c:ptCount val="12"/>
                 <c:pt idx="0">
-                  <c:v>0.66187</c:v>
+                  <c:v>138.76191</c:v>
+                </c:pt>
+                <c:pt idx="1">
+                  <c:v>34.85719</c:v>
+                </c:pt>
+                <c:pt idx="2">
+                  <c:v>18.88447</c:v>
+                </c:pt>
+                <c:pt idx="3">
+                  <c:v>24.57473</c:v>
+                </c:pt>
+                <c:pt idx="4">
+                  <c:v>18.16938</c:v>
+                </c:pt>
+                <c:pt idx="5">
+                  <c:v>18.38069</c:v>
+                </c:pt>
+                <c:pt idx="6">
+                  <c:v>12.48652</c:v>
+                </c:pt>
+                <c:pt idx="7">
+                  <c:v>2.69231</c:v>
+                </c:pt>
+                <c:pt idx="8">
+                  <c:v>3.17265</c:v>
+                </c:pt>
+                <c:pt idx="9">
+                  <c:v>1.53173</c:v>
+                </c:pt>
+                <c:pt idx="10">
+                  <c:v>1.04072</c:v>
+                </c:pt>
+                <c:pt idx="11">
+                  <c:v>0.52362</c:v>
                 </c:pt>
               </c:numCache>
             </c:numRef>
           </c:xVal>
           <c:yVal>
             <c:numRef>
-              <c:f>Sheet1!$B$63:$B$63</c:f>
+              <c:f>Sheet1!$B$10:$B$21</c:f>
               <c:numCache>
                 <c:formatCode>General</c:formatCode>
-                <c:ptCount val="1"/>
+                <c:ptCount val="12"/>
                 <c:pt idx="0">
-                  <c:v>10.22878</c:v>
+                  <c:v>88.2573</c:v>
+                </c:pt>
+                <c:pt idx="1">
+                  <c:v>80.33779</c:v>
+                </c:pt>
+                <c:pt idx="2">
+                  <c:v>46.60242</c:v>
+                </c:pt>
+                <c:pt idx="3">
+                  <c:v>96.01779</c:v>
+                </c:pt>
+                <c:pt idx="4">
+                  <c:v>77.13151</c:v>
+                </c:pt>
+                <c:pt idx="5">
+                  <c:v>86.40853</c:v>
+                </c:pt>
+                <c:pt idx="6">
+                  <c:v>83.28291</c:v>
+                </c:pt>
+                <c:pt idx="7">
+                  <c:v>57.96047</c:v>
+                </c:pt>
+                <c:pt idx="8">
+                  <c:v>29.89517</c:v>
+                </c:pt>
+                <c:pt idx="9">
+                  <c:v>39.07102</c:v>
+                </c:pt>
+                <c:pt idx="10">
+                  <c:v>38.19532</c:v>
+                </c:pt>
+                <c:pt idx="11">
+                  <c:v>46.80238</c:v>
                 </c:pt>
               </c:numCache>
             </c:numRef>
           </c:yVal>
           <c:bubbleSize>
             <c:numRef>
-              <c:f>Sheet1!$C$63:$C$63</c:f>
+              <c:f>Sheet1!$C$10:$C$21</c:f>
               <c:numCache>
                 <c:formatCode>General</c:formatCode>
-                <c:ptCount val="1"/>
+                <c:ptCount val="12"/>
                 <c:pt idx="0">
-                  <c:v>2.7103568439793277</c:v>
+                  <c:v>264.77134488858826</c:v>
+                </c:pt>
+                <c:pt idx="1">
+                  <c:v>56.54070304634169</c:v>
+                </c:pt>
+                <c:pt idx="2">
+                  <c:v>77.62481676610504</c:v>
+                </c:pt>
+                <c:pt idx="3">
+                  <c:v>36.96596667650137</c:v>
+                </c:pt>
+                <c:pt idx="4">
+                  <c:v>42.97360763888895</c:v>
+                </c:pt>
+                <c:pt idx="5">
+                  <c:v>35.78347270615566</c:v>
+                </c:pt>
+                <c:pt idx="6">
+                  <c:v>27.236483870967803</c:v>
+                </c:pt>
+                <c:pt idx="7">
+                  <c:v>11.025033851055353</c:v>
+                </c:pt>
+                <c:pt idx="8">
+                  <c:v>12.992016324817127</c:v>
+                </c:pt>
+                <c:pt idx="9">
+                  <c:v>6.741429369918694</c:v>
+                </c:pt>
+                <c:pt idx="10">
+                  <c:v>3.605855317396138</c:v>
+                </c:pt>
+                <c:pt idx="11">
+                  <c:v>2.1463333333333314</c:v>
                 </c:pt>
               </c:numCache>
             </c:numRef>
@@ -25277,7 +23381,7 @@
           <a:p>
             <a:r>
               <a:rPr lang="en-US" dirty="0"/>
-              <a:t>Software Quality report on Opendemo</a:t>
+              <a:t>Software Quality report on Reportgeneratordemo</a:t>
             </a:r>
             <a:endParaRPr lang="en-US" dirty="0"/>
           </a:p>
@@ -25369,7 +23473,7 @@
           <a:p>
             <a:r>
               <a:rPr lang="en-US" dirty="0" err="1"/>
-              <a:t>March 12, 2026</a:t>
+              <a:t>March 08, 2026</a:t>
             </a:r>
             <a:endParaRPr lang="en-US" dirty="0"/>
           </a:p>
@@ -32845,7 +30949,7 @@
           </p:nvSpPr>
           <p:spPr>
             <a:xfrm>
-              <a:off x="6526029" y="3991186"/>
+              <a:off x="6301897" y="3991186"/>
               <a:ext cx="378144" cy="301667"/>
             </a:xfrm>
             <a:custGeom>
@@ -32944,7 +31048,7 @@
                     <a:srgbClr val="0066FF"/>
                   </a:solidFill>
                 </a:rPr>
-                <a:t>1762 PY
+                <a:t>275 PY
 </a:t>
               </a:r>
             </a:p>
@@ -33881,7 +31985,7 @@
           </p:nvSpPr>
           <p:spPr>
             <a:xfrm>
-              <a:off x="7384572" y="2806318"/>
+              <a:off x="7531039" y="2806318"/>
               <a:ext cx="378145" cy="301667"/>
             </a:xfrm>
             <a:custGeom>
@@ -33980,7 +32084,7 @@
                     <a:srgbClr val="0066FF"/>
                   </a:solidFill>
                 </a:rPr>
-                <a:t>+ 75%
+                <a:t>+ 78%
 </a:t>
               </a:r>
             </a:p>
@@ -34709,7 +32813,7 @@
           </p:nvSpPr>
           <p:spPr>
             <a:xfrm>
-              <a:off x="7051315" y="1595006"/>
+              <a:off x="4862323" y="1595006"/>
               <a:ext cx="378145" cy="301667"/>
             </a:xfrm>
             <a:custGeom>
@@ -34808,7 +32912,7 @@
                     <a:srgbClr val="0066FF"/>
                   </a:solidFill>
                 </a:rPr>
-                <a:t>3315 PY
+                <a:t>578 PY
 </a:t>
               </a:r>
             </a:p>
@@ -35794,7 +33898,7 @@
                           <a:effectLst/>
                           <a:latin typeface="Calibri Bold"/>
                         </a:rPr>
-                        <a:t>MongoDB</a:t>
+                        <a:t>integrationtest-airflow</a:t>
                       </a:r>
                     </a:p>
                   </a:txBody>
@@ -35805,122 +33909,6 @@
                     </a:lnL>
                     <a:lnR>
                       <a:noFill/>
-                    </a:lnR>
-                    <a:lnT w="19050" cap="flat" cmpd="sng" algn="ctr">
-                      <a:noFill/>
-                      <a:prstDash val="sysDot"/>
-                      <a:round/>
-                      <a:headEnd type="none" w="med" len="med"/>
-                      <a:tailEnd type="none" w="med" len="med"/>
-                    </a:lnT>
-                    <a:lnB w="12700" cap="flat" cmpd="sng" algn="ctr">
-                      <a:solidFill>
-                        <a:schemeClr val="tx1">
-                          <a:lumMod val="40000"/>
-                          <a:lumOff val="60000"/>
-                        </a:schemeClr>
-                      </a:solidFill>
-                      <a:prstDash val="sysDot"/>
-                      <a:round/>
-                      <a:headEnd type="none" w="med" len="med"/>
-                      <a:tailEnd type="none" w="med" len="med"/>
-                    </a:lnB>
-                    <a:lnTlToBr w="12700" cmpd="sng">
-                      <a:noFill/>
-                      <a:prstDash val="solid"/>
-                    </a:lnTlToBr>
-                    <a:lnBlToTr w="12700" cmpd="sng">
-                      <a:noFill/>
-                      <a:prstDash val="solid"/>
-                    </a:lnBlToTr>
-                    <a:solidFill>
-                      <a:schemeClr val="bg1"/>
-                    </a:solidFill>
-                  </a:tcPr>
-                </a:tc>
-                <a:tc>
-                  <a:txBody>
-                    <a:bodyPr/>
-                    <a:lstStyle/>
-                    <a:p>
-                      <a:pPr algn="ctr" fontAlgn="b"/>
-                      <a:r>
-                        <a:rPr lang="en-US" sz="1400" b="0" i="0" u="none" strike="noStrike" dirty="0">
-                          <a:solidFill>
-                            <a:schemeClr val="tx2"/>
-                          </a:solidFill>
-                          <a:effectLst/>
-                          <a:latin typeface="Calibri Regular"/>
-                        </a:rPr>
-                        <a:t>Critical</a:t>
-                      </a:r>
-                    </a:p>
-                  </a:txBody>
-                  <a:tcPr marL="108000" marR="108000" marT="90000" marB="90000">
-                    <a:lnL>
-                      <a:noFill/>
-                    </a:lnL>
-                    <a:lnR w="9525" cap="flat" cmpd="sng" algn="ctr">
-                      <a:noFill/>
-                      <a:prstDash val="solid"/>
-                    </a:lnR>
-                    <a:lnT w="19050" cap="flat" cmpd="sng" algn="ctr">
-                      <a:noFill/>
-                      <a:prstDash val="sysDot"/>
-                      <a:round/>
-                      <a:headEnd type="none" w="med" len="med"/>
-                      <a:tailEnd type="none" w="med" len="med"/>
-                    </a:lnT>
-                    <a:lnB w="12700" cap="flat" cmpd="sng" algn="ctr">
-                      <a:solidFill>
-                        <a:schemeClr val="tx1">
-                          <a:lumMod val="40000"/>
-                          <a:lumOff val="60000"/>
-                        </a:schemeClr>
-                      </a:solidFill>
-                      <a:prstDash val="sysDot"/>
-                      <a:round/>
-                      <a:headEnd type="none" w="med" len="med"/>
-                      <a:tailEnd type="none" w="med" len="med"/>
-                    </a:lnB>
-                    <a:lnTlToBr w="12700" cmpd="sng">
-                      <a:noFill/>
-                      <a:prstDash val="solid"/>
-                    </a:lnTlToBr>
-                    <a:lnBlToTr w="12700" cmpd="sng">
-                      <a:noFill/>
-                      <a:prstDash val="solid"/>
-                    </a:lnBlToTr>
-                    <a:solidFill>
-                      <a:schemeClr val="bg1"/>
-                    </a:solidFill>
-                  </a:tcPr>
-                </a:tc>
-                <a:tc>
-                  <a:txBody>
-                    <a:bodyPr/>
-                    <a:lstStyle/>
-                    <a:p>
-                      <a:pPr algn="ctr" fontAlgn="b"/>
-                      <a:r>
-                        <a:rPr lang="en-US" sz="1400" b="0" i="0" u="none" strike="noStrike" dirty="0">
-                          <a:solidFill>
-                            <a:schemeClr val="tx2"/>
-                          </a:solidFill>
-                          <a:effectLst/>
-                          <a:latin typeface="Calibri Regular"/>
-                        </a:rPr>
-                        <a:t>224.0 PY</a:t>
-                      </a:r>
-                    </a:p>
-                  </a:txBody>
-                  <a:tcPr marL="108000" marR="108000" marT="90000" marB="90000">
-                    <a:lnL>
-                      <a:noFill/>
-                    </a:lnL>
-                    <a:lnR w="9525" cap="flat" cmpd="sng" algn="ctr">
-                      <a:noFill/>
-                      <a:prstDash val="solid"/>
                     </a:lnR>
                     <a:lnT w="19050" cap="flat" cmpd="sng" algn="ctr">
                       <a:noFill/>
@@ -35969,6 +33957,122 @@
                           <a:latin typeface="Calibri Regular"/>
                         </a:rPr>
                         <a:t>Unknown</a:t>
+                      </a:r>
+                    </a:p>
+                  </a:txBody>
+                  <a:tcPr marL="108000" marR="108000" marT="90000" marB="90000">
+                    <a:lnL>
+                      <a:noFill/>
+                    </a:lnL>
+                    <a:lnR w="9525" cap="flat" cmpd="sng" algn="ctr">
+                      <a:noFill/>
+                      <a:prstDash val="solid"/>
+                    </a:lnR>
+                    <a:lnT w="19050" cap="flat" cmpd="sng" algn="ctr">
+                      <a:noFill/>
+                      <a:prstDash val="sysDot"/>
+                      <a:round/>
+                      <a:headEnd type="none" w="med" len="med"/>
+                      <a:tailEnd type="none" w="med" len="med"/>
+                    </a:lnT>
+                    <a:lnB w="12700" cap="flat" cmpd="sng" algn="ctr">
+                      <a:solidFill>
+                        <a:schemeClr val="tx1">
+                          <a:lumMod val="40000"/>
+                          <a:lumOff val="60000"/>
+                        </a:schemeClr>
+                      </a:solidFill>
+                      <a:prstDash val="sysDot"/>
+                      <a:round/>
+                      <a:headEnd type="none" w="med" len="med"/>
+                      <a:tailEnd type="none" w="med" len="med"/>
+                    </a:lnB>
+                    <a:lnTlToBr w="12700" cmpd="sng">
+                      <a:noFill/>
+                      <a:prstDash val="solid"/>
+                    </a:lnTlToBr>
+                    <a:lnBlToTr w="12700" cmpd="sng">
+                      <a:noFill/>
+                      <a:prstDash val="solid"/>
+                    </a:lnBlToTr>
+                    <a:solidFill>
+                      <a:schemeClr val="bg1"/>
+                    </a:solidFill>
+                  </a:tcPr>
+                </a:tc>
+                <a:tc>
+                  <a:txBody>
+                    <a:bodyPr/>
+                    <a:lstStyle/>
+                    <a:p>
+                      <a:pPr algn="ctr" fontAlgn="b"/>
+                      <a:r>
+                        <a:rPr lang="en-US" sz="1400" b="0" i="0" u="none" strike="noStrike" dirty="0">
+                          <a:solidFill>
+                            <a:schemeClr val="tx2"/>
+                          </a:solidFill>
+                          <a:effectLst/>
+                          <a:latin typeface="Calibri Regular"/>
+                        </a:rPr>
+                        <a:t>56.5 PY</a:t>
+                      </a:r>
+                    </a:p>
+                  </a:txBody>
+                  <a:tcPr marL="108000" marR="108000" marT="90000" marB="90000">
+                    <a:lnL>
+                      <a:noFill/>
+                    </a:lnL>
+                    <a:lnR w="9525" cap="flat" cmpd="sng" algn="ctr">
+                      <a:noFill/>
+                      <a:prstDash val="solid"/>
+                    </a:lnR>
+                    <a:lnT w="19050" cap="flat" cmpd="sng" algn="ctr">
+                      <a:noFill/>
+                      <a:prstDash val="sysDot"/>
+                      <a:round/>
+                      <a:headEnd type="none" w="med" len="med"/>
+                      <a:tailEnd type="none" w="med" len="med"/>
+                    </a:lnT>
+                    <a:lnB w="12700" cap="flat" cmpd="sng" algn="ctr">
+                      <a:solidFill>
+                        <a:schemeClr val="tx1">
+                          <a:lumMod val="40000"/>
+                          <a:lumOff val="60000"/>
+                        </a:schemeClr>
+                      </a:solidFill>
+                      <a:prstDash val="sysDot"/>
+                      <a:round/>
+                      <a:headEnd type="none" w="med" len="med"/>
+                      <a:tailEnd type="none" w="med" len="med"/>
+                    </a:lnB>
+                    <a:lnTlToBr w="12700" cmpd="sng">
+                      <a:noFill/>
+                      <a:prstDash val="solid"/>
+                    </a:lnTlToBr>
+                    <a:lnBlToTr w="12700" cmpd="sng">
+                      <a:noFill/>
+                      <a:prstDash val="solid"/>
+                    </a:lnBlToTr>
+                    <a:solidFill>
+                      <a:schemeClr val="bg1"/>
+                    </a:solidFill>
+                  </a:tcPr>
+                </a:tc>
+                <a:tc>
+                  <a:txBody>
+                    <a:bodyPr/>
+                    <a:lstStyle/>
+                    <a:p>
+                      <a:pPr algn="ctr" fontAlgn="b"/>
+                      <a:r>
+                        <a:rPr lang="en-US" sz="1400" b="0" i="0" u="none" strike="noStrike" dirty="0">
+                          <a:solidFill>
+                            <a:schemeClr val="tx2"/>
+                          </a:solidFill>
+                          <a:effectLst/>
+                          <a:latin typeface="Calibri Regular"/>
+                        </a:rPr>
+                        <a:t>43.4 PY</a:t>
                       </a:r>
                     </a:p>
                   </a:txBody>
@@ -36100,7 +34204,7 @@
                           <a:effectLst/>
                           <a:latin typeface="Calibri Regular"/>
                         </a:rPr>
-                        <a:t>+ 86%</a:t>
+                        <a:t>+ 80%</a:t>
                       </a:r>
                     </a:p>
                   </a:txBody>
@@ -36158,7 +34262,7 @@
                           <a:effectLst/>
                           <a:latin typeface="Calibri Regular"/>
                         </a:rPr>
-                        <a:t>118.7 PY</a:t>
+                        <a:t>34.9 PY</a:t>
                       </a:r>
                     </a:p>
                   </a:txBody>
@@ -36318,7 +34422,7 @@
                           <a:effectLst/>
                           <a:latin typeface="Calibri Bold"/>
                         </a:rPr>
-                        <a:t>Elasticsearch</a:t>
+                        <a:t>integrationtest-vscode</a:t>
                       </a:r>
                     </a:p>
                   </a:txBody>
@@ -36381,7 +34485,7 @@
                           <a:effectLst/>
                           <a:latin typeface="Calibri Regular"/>
                         </a:rPr>
-                        <a:t>High</a:t>
+                        <a:t>Unknown</a:t>
                       </a:r>
                     </a:p>
                   </a:txBody>
@@ -36444,7 +34548,7 @@
                           <a:effectLst/>
                           <a:latin typeface="Calibri Regular"/>
                         </a:rPr>
-                        <a:t>262.7 PY</a:t>
+                        <a:t>77.6 PY</a:t>
                       </a:r>
                     </a:p>
                   </a:txBody>
@@ -36523,7 +34627,7 @@
                           <a:effectLst/>
                           <a:latin typeface="Calibri Regular"/>
                         </a:rPr>
-                        <a:t>Unknown</a:t>
+                        <a:t>26.7 PY</a:t>
                       </a:r>
                     </a:p>
                   </a:txBody>
@@ -36681,7 +34785,7 @@
                           <a:effectLst/>
                           <a:latin typeface="Calibri Regular"/>
                         </a:rPr>
-                        <a:t>+ 90%</a:t>
+                        <a:t>+ 47%</a:t>
                       </a:r>
                     </a:p>
                   </a:txBody>
@@ -36760,7 +34864,7 @@
                           <a:effectLst/>
                           <a:latin typeface="Calibri Regular"/>
                         </a:rPr>
-                        <a:t>137.0 PY</a:t>
+                        <a:t>18.9 PY</a:t>
                       </a:r>
                     </a:p>
                   </a:txBody>
@@ -36925,7 +35029,7 @@
                           <a:effectLst/>
                           <a:latin typeface="Calibri Bold"/>
                         </a:rPr>
-                        <a:t>Oracle GraalVM</a:t>
+                        <a:t>integrationtest-git</a:t>
                       </a:r>
                     </a:p>
                   </a:txBody>
@@ -36988,7 +35092,7 @@
                           <a:effectLst/>
                           <a:latin typeface="Calibri Regular"/>
                         </a:rPr>
-                        <a:t>High</a:t>
+                        <a:t>Unknown</a:t>
                       </a:r>
                     </a:p>
                   </a:txBody>
@@ -37051,7 +35155,7 @@
                           <a:effectLst/>
                           <a:latin typeface="Calibri Regular"/>
                         </a:rPr>
-                        <a:t>175.2 PY</a:t>
+                        <a:t>37.0 PY</a:t>
                       </a:r>
                     </a:p>
                   </a:txBody>
@@ -37130,7 +35234,7 @@
                           <a:effectLst/>
                           <a:latin typeface="Calibri Regular"/>
                         </a:rPr>
-                        <a:t>Unknown</a:t>
+                        <a:t>6.4 PY</a:t>
                       </a:r>
                     </a:p>
                   </a:txBody>
@@ -37209,7 +35313,7 @@
                           <a:effectLst/>
                           <a:latin typeface="Calibri Regular"/>
                         </a:rPr>
-                        <a:t>REBUILD</a:t>
+                        <a:t>RENOVATE</a:t>
                       </a:r>
                     </a:p>
                   </a:txBody>
@@ -37288,7 +35392,7 @@
                           <a:effectLst/>
                           <a:latin typeface="Calibri Regular"/>
                         </a:rPr>
-                        <a:t>+ 85%</a:t>
+                        <a:t>+ 96%</a:t>
                       </a:r>
                     </a:p>
                   </a:txBody>
@@ -37367,7 +35471,7 @@
                           <a:effectLst/>
                           <a:latin typeface="Calibri Regular"/>
                         </a:rPr>
-                        <a:t>175.2 PY</a:t>
+                        <a:t>24.6 PY</a:t>
                       </a:r>
                     </a:p>
                   </a:txBody>
@@ -37532,7 +35636,7 @@
                           <a:effectLst/>
                           <a:latin typeface="Calibri Bold"/>
                         </a:rPr>
-                        <a:t>Tensorflow</a:t>
+                        <a:t>integrationtest-kafka</a:t>
                       </a:r>
                     </a:p>
                   </a:txBody>
@@ -37595,7 +35699,7 @@
                           <a:effectLst/>
                           <a:latin typeface="Calibri Regular"/>
                         </a:rPr>
-                        <a:t>Medium</a:t>
+                        <a:t>Unknown</a:t>
                       </a:r>
                     </a:p>
                   </a:txBody>
@@ -37658,7 +35762,7 @@
                           <a:effectLst/>
                           <a:latin typeface="Calibri Regular"/>
                         </a:rPr>
-                        <a:t>260.2 PY</a:t>
+                        <a:t>43.0 PY</a:t>
                       </a:r>
                     </a:p>
                   </a:txBody>
@@ -37737,7 +35841,7 @@
                           <a:effectLst/>
                           <a:latin typeface="Calibri Regular"/>
                         </a:rPr>
-                        <a:t>Unknown</a:t>
+                        <a:t>10.5 PY</a:t>
                       </a:r>
                     </a:p>
                   </a:txBody>
@@ -37816,7 +35920,7 @@
                           <a:effectLst/>
                           <a:latin typeface="Calibri Regular"/>
                         </a:rPr>
-                        <a:t>REBUILD</a:t>
+                        <a:t>RENOVATE</a:t>
                       </a:r>
                     </a:p>
                   </a:txBody>
@@ -37895,7 +35999,7 @@
                           <a:effectLst/>
                           <a:latin typeface="Calibri Regular"/>
                         </a:rPr>
-                        <a:t>+ 76%</a:t>
+                        <a:t>+ 77%</a:t>
                       </a:r>
                     </a:p>
                   </a:txBody>
@@ -37974,7 +36078,7 @@
                           <a:effectLst/>
                           <a:latin typeface="Calibri Regular"/>
                         </a:rPr>
-                        <a:t>260.2 PY</a:t>
+                        <a:t>18.2 PY</a:t>
                       </a:r>
                     </a:p>
                   </a:txBody>
@@ -38139,7 +36243,7 @@
                           <a:effectLst/>
                           <a:latin typeface="Calibri Bold"/>
                         </a:rPr>
-                        <a:t>Google V8</a:t>
+                        <a:t>integrationtest-jruby</a:t>
                       </a:r>
                     </a:p>
                   </a:txBody>
@@ -38202,7 +36306,7 @@
                           <a:effectLst/>
                           <a:latin typeface="Calibri Regular"/>
                         </a:rPr>
-                        <a:t>Medium</a:t>
+                        <a:t>Unknown</a:t>
                       </a:r>
                     </a:p>
                   </a:txBody>
@@ -38265,7 +36369,7 @@
                           <a:effectLst/>
                           <a:latin typeface="Calibri Regular"/>
                         </a:rPr>
-                        <a:t>159.2 PY</a:t>
+                        <a:t>35.8 PY</a:t>
                       </a:r>
                     </a:p>
                   </a:txBody>
@@ -38344,7 +36448,7 @@
                           <a:effectLst/>
                           <a:latin typeface="Calibri Regular"/>
                         </a:rPr>
-                        <a:t>Unknown</a:t>
+                        <a:t>4.4 PY</a:t>
                       </a:r>
                     </a:p>
                   </a:txBody>
@@ -38502,7 +36606,7 @@
                           <a:effectLst/>
                           <a:latin typeface="Calibri Regular"/>
                         </a:rPr>
-                        <a:t>+ 82%</a:t>
+                        <a:t>+ 86%</a:t>
                       </a:r>
                     </a:p>
                   </a:txBody>
@@ -38581,7 +36685,7 @@
                           <a:effectLst/>
                           <a:latin typeface="Calibri Regular"/>
                         </a:rPr>
-                        <a:t>79.7 PY</a:t>
+                        <a:t>18.4 PY</a:t>
                       </a:r>
                     </a:p>
                   </a:txBody>
@@ -38746,7 +36850,7 @@
                           <a:effectLst/>
                           <a:latin typeface="Calibri Bold"/>
                         </a:rPr>
-                        <a:t>Hadoop</a:t>
+                        <a:t>integrationtest-druid</a:t>
                       </a:r>
                     </a:p>
                   </a:txBody>
@@ -38757,164 +36861,6 @@
                     </a:lnL>
                     <a:lnR>
                       <a:noFill/>
-                    </a:lnR>
-                    <a:lnT w="12700" cap="flat" cmpd="sng" algn="ctr">
-                      <a:solidFill>
-                        <a:schemeClr val="tx1">
-                          <a:lumMod val="40000"/>
-                          <a:lumOff val="60000"/>
-                        </a:schemeClr>
-                      </a:solidFill>
-                      <a:prstDash val="sysDot"/>
-                      <a:round/>
-                      <a:headEnd type="none" w="med" len="med"/>
-                      <a:tailEnd type="none" w="med" len="med"/>
-                    </a:lnT>
-                    <a:lnB w="12700" cap="flat" cmpd="sng" algn="ctr">
-                      <a:solidFill>
-                        <a:schemeClr val="tx1">
-                          <a:lumMod val="40000"/>
-                          <a:lumOff val="60000"/>
-                        </a:schemeClr>
-                      </a:solidFill>
-                      <a:prstDash val="sysDot"/>
-                      <a:round/>
-                      <a:headEnd type="none" w="med" len="med"/>
-                      <a:tailEnd type="none" w="med" len="med"/>
-                    </a:lnB>
-                    <a:lnTlToBr w="12700" cmpd="sng">
-                      <a:noFill/>
-                      <a:prstDash val="solid"/>
-                    </a:lnTlToBr>
-                    <a:lnBlToTr w="12700" cmpd="sng">
-                      <a:noFill/>
-                      <a:prstDash val="solid"/>
-                    </a:lnBlToTr>
-                    <a:solidFill>
-                      <a:schemeClr val="bg1"/>
-                    </a:solidFill>
-                  </a:tcPr>
-                </a:tc>
-                <a:tc>
-                  <a:txBody>
-                    <a:bodyPr/>
-                    <a:lstStyle/>
-                    <a:p>
-                      <a:pPr marL="0" marR="0" lvl="0" indent="0" algn="ctr" defTabSz="914400" rtl="0" eaLnBrk="1" fontAlgn="b" latinLnBrk="0" hangingPunct="1">
-                        <a:lnSpc>
-                          <a:spcPct val="100000"/>
-                        </a:lnSpc>
-                        <a:spcBef>
-                          <a:spcPts val="0"/>
-                        </a:spcBef>
-                        <a:spcAft>
-                          <a:spcPts val="0"/>
-                        </a:spcAft>
-                        <a:buClrTx/>
-                        <a:buSzTx/>
-                        <a:buFontTx/>
-                        <a:buNone/>
-                        <a:tabLst/>
-                        <a:defRPr/>
-                      </a:pPr>
-                      <a:r>
-                        <a:rPr lang="en-US" sz="1400" b="0" i="0" u="none" strike="noStrike" dirty="0">
-                          <a:solidFill>
-                            <a:schemeClr val="tx2"/>
-                          </a:solidFill>
-                          <a:effectLst/>
-                          <a:latin typeface="Calibri Regular"/>
-                        </a:rPr>
-                        <a:t>Critical</a:t>
-                      </a:r>
-                    </a:p>
-                  </a:txBody>
-                  <a:tcPr marL="108000" marR="108000" marT="90000" marB="90000">
-                    <a:lnL>
-                      <a:noFill/>
-                    </a:lnL>
-                    <a:lnR w="9525" cap="flat" cmpd="sng" algn="ctr">
-                      <a:noFill/>
-                      <a:prstDash val="solid"/>
-                    </a:lnR>
-                    <a:lnT w="12700" cap="flat" cmpd="sng" algn="ctr">
-                      <a:solidFill>
-                        <a:schemeClr val="tx1">
-                          <a:lumMod val="40000"/>
-                          <a:lumOff val="60000"/>
-                        </a:schemeClr>
-                      </a:solidFill>
-                      <a:prstDash val="sysDot"/>
-                      <a:round/>
-                      <a:headEnd type="none" w="med" len="med"/>
-                      <a:tailEnd type="none" w="med" len="med"/>
-                    </a:lnT>
-                    <a:lnB w="12700" cap="flat" cmpd="sng" algn="ctr">
-                      <a:solidFill>
-                        <a:schemeClr val="tx1">
-                          <a:lumMod val="40000"/>
-                          <a:lumOff val="60000"/>
-                        </a:schemeClr>
-                      </a:solidFill>
-                      <a:prstDash val="sysDot"/>
-                      <a:round/>
-                      <a:headEnd type="none" w="med" len="med"/>
-                      <a:tailEnd type="none" w="med" len="med"/>
-                    </a:lnB>
-                    <a:lnTlToBr w="12700" cmpd="sng">
-                      <a:noFill/>
-                      <a:prstDash val="solid"/>
-                    </a:lnTlToBr>
-                    <a:lnBlToTr w="12700" cmpd="sng">
-                      <a:noFill/>
-                      <a:prstDash val="solid"/>
-                    </a:lnBlToTr>
-                    <a:solidFill>
-                      <a:schemeClr val="bg1"/>
-                    </a:solidFill>
-                  </a:tcPr>
-                </a:tc>
-                <a:tc>
-                  <a:txBody>
-                    <a:bodyPr/>
-                    <a:lstStyle/>
-                    <a:p>
-                      <a:pPr marL="0" marR="0" lvl="0" indent="0" algn="ctr" defTabSz="914400" rtl="0" eaLnBrk="1" fontAlgn="b" latinLnBrk="0" hangingPunct="1">
-                        <a:lnSpc>
-                          <a:spcPct val="100000"/>
-                        </a:lnSpc>
-                        <a:spcBef>
-                          <a:spcPts val="0"/>
-                        </a:spcBef>
-                        <a:spcAft>
-                          <a:spcPts val="0"/>
-                        </a:spcAft>
-                        <a:buClrTx/>
-                        <a:buSzTx/>
-                        <a:buFontTx/>
-                        <a:buNone/>
-                        <a:tabLst/>
-                        <a:defRPr/>
-                      </a:pPr>
-                      <a:r>
-                        <a:rPr lang="en-US" sz="1400" b="0" i="0" u="none" strike="noStrike" dirty="0">
-                          <a:solidFill>
-                            <a:schemeClr val="tx2"/>
-                          </a:solidFill>
-                          <a:effectLst/>
-                          <a:latin typeface="Calibri Regular"/>
-                        </a:rPr>
-                        <a:t>81.2 PY</a:t>
-                      </a:r>
-                    </a:p>
-                  </a:txBody>
-                  <a:tcPr marL="108000" marR="108000" marT="90000" marB="90000">
-                    <a:lnL>
-                      <a:noFill/>
-                    </a:lnL>
-                    <a:lnR w="9525" cap="flat" cmpd="sng" algn="ctr">
-                      <a:noFill/>
-                      <a:prstDash val="solid"/>
                     </a:lnR>
                     <a:lnT w="12700" cap="flat" cmpd="sng" algn="ctr">
                       <a:solidFill>
@@ -39055,14 +37001,93 @@
                         <a:defRPr/>
                       </a:pPr>
                       <a:r>
-                        <a:rPr lang="en-US" sz="1400" b="1" i="0" u="none" strike="noStrike" dirty="0">
+                        <a:rPr lang="en-US" sz="1400" b="0" i="0" u="none" strike="noStrike" dirty="0">
                           <a:solidFill>
-                            <a:schemeClr val="accent3"/>
+                            <a:schemeClr val="tx2"/>
                           </a:solidFill>
                           <a:effectLst/>
                           <a:latin typeface="Calibri Regular"/>
                         </a:rPr>
-                        <a:t>RENOVATE</a:t>
+                        <a:t>27.2 PY</a:t>
+                      </a:r>
+                    </a:p>
+                  </a:txBody>
+                  <a:tcPr marL="108000" marR="108000" marT="90000" marB="90000">
+                    <a:lnL>
+                      <a:noFill/>
+                    </a:lnL>
+                    <a:lnR w="9525" cap="flat" cmpd="sng" algn="ctr">
+                      <a:noFill/>
+                      <a:prstDash val="solid"/>
+                    </a:lnR>
+                    <a:lnT w="12700" cap="flat" cmpd="sng" algn="ctr">
+                      <a:solidFill>
+                        <a:schemeClr val="tx1">
+                          <a:lumMod val="40000"/>
+                          <a:lumOff val="60000"/>
+                        </a:schemeClr>
+                      </a:solidFill>
+                      <a:prstDash val="sysDot"/>
+                      <a:round/>
+                      <a:headEnd type="none" w="med" len="med"/>
+                      <a:tailEnd type="none" w="med" len="med"/>
+                    </a:lnT>
+                    <a:lnB w="12700" cap="flat" cmpd="sng" algn="ctr">
+                      <a:solidFill>
+                        <a:schemeClr val="tx1">
+                          <a:lumMod val="40000"/>
+                          <a:lumOff val="60000"/>
+                        </a:schemeClr>
+                      </a:solidFill>
+                      <a:prstDash val="sysDot"/>
+                      <a:round/>
+                      <a:headEnd type="none" w="med" len="med"/>
+                      <a:tailEnd type="none" w="med" len="med"/>
+                    </a:lnB>
+                    <a:lnTlToBr w="12700" cmpd="sng">
+                      <a:noFill/>
+                      <a:prstDash val="solid"/>
+                    </a:lnTlToBr>
+                    <a:lnBlToTr w="12700" cmpd="sng">
+                      <a:noFill/>
+                      <a:prstDash val="solid"/>
+                    </a:lnBlToTr>
+                    <a:solidFill>
+                      <a:schemeClr val="bg1"/>
+                    </a:solidFill>
+                  </a:tcPr>
+                </a:tc>
+                <a:tc>
+                  <a:txBody>
+                    <a:bodyPr/>
+                    <a:lstStyle/>
+                    <a:p>
+                      <a:pPr marL="0" marR="0" lvl="0" indent="0" algn="ctr" defTabSz="914400" rtl="0" eaLnBrk="1" fontAlgn="b" latinLnBrk="0" hangingPunct="1">
+                        <a:lnSpc>
+                          <a:spcPct val="100000"/>
+                        </a:lnSpc>
+                        <a:spcBef>
+                          <a:spcPts val="0"/>
+                        </a:spcBef>
+                        <a:spcAft>
+                          <a:spcPts val="0"/>
+                        </a:spcAft>
+                        <a:buClrTx/>
+                        <a:buSzTx/>
+                        <a:buFontTx/>
+                        <a:buNone/>
+                        <a:tabLst/>
+                        <a:defRPr/>
+                      </a:pPr>
+                      <a:r>
+                        <a:rPr lang="en-US" sz="1400" b="0" i="0" u="none" strike="noStrike" dirty="0">
+                          <a:solidFill>
+                            <a:schemeClr val="tx2"/>
+                          </a:solidFill>
+                          <a:effectLst/>
+                          <a:latin typeface="Calibri Regular"/>
+                        </a:rPr>
+                        <a:t>1.5 PY</a:t>
                       </a:r>
                     </a:p>
                   </a:txBody>
@@ -39141,7 +37166,7 @@
                           <a:effectLst/>
                           <a:latin typeface="Calibri Regular"/>
                         </a:rPr>
-                        <a:t>+ 78%</a:t>
+                        <a:t>RENOVATE</a:t>
                       </a:r>
                     </a:p>
                   </a:txBody>
@@ -39220,7 +37245,86 @@
                           <a:effectLst/>
                           <a:latin typeface="Calibri Regular"/>
                         </a:rPr>
-                        <a:t>33.2 PY</a:t>
+                        <a:t>+ 83%</a:t>
+                      </a:r>
+                    </a:p>
+                  </a:txBody>
+                  <a:tcPr marL="108000" marR="108000" marT="90000" marB="90000">
+                    <a:lnL>
+                      <a:noFill/>
+                    </a:lnL>
+                    <a:lnR w="9525" cap="flat" cmpd="sng" algn="ctr">
+                      <a:noFill/>
+                      <a:prstDash val="solid"/>
+                    </a:lnR>
+                    <a:lnT w="12700" cap="flat" cmpd="sng" algn="ctr">
+                      <a:solidFill>
+                        <a:schemeClr val="tx1">
+                          <a:lumMod val="40000"/>
+                          <a:lumOff val="60000"/>
+                        </a:schemeClr>
+                      </a:solidFill>
+                      <a:prstDash val="sysDot"/>
+                      <a:round/>
+                      <a:headEnd type="none" w="med" len="med"/>
+                      <a:tailEnd type="none" w="med" len="med"/>
+                    </a:lnT>
+                    <a:lnB w="12700" cap="flat" cmpd="sng" algn="ctr">
+                      <a:solidFill>
+                        <a:schemeClr val="tx1">
+                          <a:lumMod val="40000"/>
+                          <a:lumOff val="60000"/>
+                        </a:schemeClr>
+                      </a:solidFill>
+                      <a:prstDash val="sysDot"/>
+                      <a:round/>
+                      <a:headEnd type="none" w="med" len="med"/>
+                      <a:tailEnd type="none" w="med" len="med"/>
+                    </a:lnB>
+                    <a:lnTlToBr w="12700" cmpd="sng">
+                      <a:noFill/>
+                      <a:prstDash val="solid"/>
+                    </a:lnTlToBr>
+                    <a:lnBlToTr w="12700" cmpd="sng">
+                      <a:noFill/>
+                      <a:prstDash val="solid"/>
+                    </a:lnBlToTr>
+                    <a:solidFill>
+                      <a:schemeClr val="bg1"/>
+                    </a:solidFill>
+                  </a:tcPr>
+                </a:tc>
+                <a:tc>
+                  <a:txBody>
+                    <a:bodyPr/>
+                    <a:lstStyle/>
+                    <a:p>
+                      <a:pPr marL="0" marR="0" lvl="0" indent="0" algn="ctr" defTabSz="914400" rtl="0" eaLnBrk="1" fontAlgn="b" latinLnBrk="0" hangingPunct="1">
+                        <a:lnSpc>
+                          <a:spcPct val="100000"/>
+                        </a:lnSpc>
+                        <a:spcBef>
+                          <a:spcPts val="0"/>
+                        </a:spcBef>
+                        <a:spcAft>
+                          <a:spcPts val="0"/>
+                        </a:spcAft>
+                        <a:buClrTx/>
+                        <a:buSzTx/>
+                        <a:buFontTx/>
+                        <a:buNone/>
+                        <a:tabLst/>
+                        <a:defRPr/>
+                      </a:pPr>
+                      <a:r>
+                        <a:rPr lang="en-US" sz="1400" b="1" i="0" u="none" strike="noStrike" dirty="0">
+                          <a:solidFill>
+                            <a:schemeClr val="accent3"/>
+                          </a:solidFill>
+                          <a:effectLst/>
+                          <a:latin typeface="Calibri Regular"/>
+                        </a:rPr>
+                        <a:t>12.5 PY</a:t>
                       </a:r>
                     </a:p>
                   </a:txBody>
@@ -39385,7 +37489,7 @@
                           <a:effectLst/>
                           <a:latin typeface="Calibri Bold"/>
                         </a:rPr>
-                        <a:t>Hibernate</a:t>
+                        <a:t>integrationtest-webpack</a:t>
                       </a:r>
                     </a:p>
                   </a:txBody>
@@ -39396,164 +37500,6 @@
                     </a:lnL>
                     <a:lnR>
                       <a:noFill/>
-                    </a:lnR>
-                    <a:lnT w="12700" cap="flat" cmpd="sng" algn="ctr">
-                      <a:solidFill>
-                        <a:schemeClr val="tx1">
-                          <a:lumMod val="40000"/>
-                          <a:lumOff val="60000"/>
-                        </a:schemeClr>
-                      </a:solidFill>
-                      <a:prstDash val="sysDot"/>
-                      <a:round/>
-                      <a:headEnd type="none" w="med" len="med"/>
-                      <a:tailEnd type="none" w="med" len="med"/>
-                    </a:lnT>
-                    <a:lnB w="12700" cap="flat" cmpd="sng" algn="ctr">
-                      <a:solidFill>
-                        <a:schemeClr val="tx1">
-                          <a:lumMod val="40000"/>
-                          <a:lumOff val="60000"/>
-                        </a:schemeClr>
-                      </a:solidFill>
-                      <a:prstDash val="sysDot"/>
-                      <a:round/>
-                      <a:headEnd type="none" w="med" len="med"/>
-                      <a:tailEnd type="none" w="med" len="med"/>
-                    </a:lnB>
-                    <a:lnTlToBr w="12700" cmpd="sng">
-                      <a:noFill/>
-                      <a:prstDash val="solid"/>
-                    </a:lnTlToBr>
-                    <a:lnBlToTr w="12700" cmpd="sng">
-                      <a:noFill/>
-                      <a:prstDash val="solid"/>
-                    </a:lnBlToTr>
-                    <a:solidFill>
-                      <a:schemeClr val="bg1"/>
-                    </a:solidFill>
-                  </a:tcPr>
-                </a:tc>
-                <a:tc>
-                  <a:txBody>
-                    <a:bodyPr/>
-                    <a:lstStyle/>
-                    <a:p>
-                      <a:pPr marL="0" marR="0" lvl="0" indent="0" algn="ctr" defTabSz="914400" rtl="0" eaLnBrk="1" fontAlgn="b" latinLnBrk="0" hangingPunct="1">
-                        <a:lnSpc>
-                          <a:spcPct val="100000"/>
-                        </a:lnSpc>
-                        <a:spcBef>
-                          <a:spcPts val="0"/>
-                        </a:spcBef>
-                        <a:spcAft>
-                          <a:spcPts val="0"/>
-                        </a:spcAft>
-                        <a:buClrTx/>
-                        <a:buSzTx/>
-                        <a:buFontTx/>
-                        <a:buNone/>
-                        <a:tabLst/>
-                        <a:defRPr/>
-                      </a:pPr>
-                      <a:r>
-                        <a:rPr lang="en-US" sz="1400" b="0" i="0" u="none" strike="noStrike" dirty="0">
-                          <a:solidFill>
-                            <a:schemeClr val="tx2"/>
-                          </a:solidFill>
-                          <a:effectLst/>
-                          <a:latin typeface="Calibri Regular"/>
-                        </a:rPr>
-                        <a:t>Critical</a:t>
-                      </a:r>
-                    </a:p>
-                  </a:txBody>
-                  <a:tcPr marL="108000" marR="108000" marT="90000" marB="90000">
-                    <a:lnL>
-                      <a:noFill/>
-                    </a:lnL>
-                    <a:lnR w="9525" cap="flat" cmpd="sng" algn="ctr">
-                      <a:noFill/>
-                      <a:prstDash val="solid"/>
-                    </a:lnR>
-                    <a:lnT w="12700" cap="flat" cmpd="sng" algn="ctr">
-                      <a:solidFill>
-                        <a:schemeClr val="tx1">
-                          <a:lumMod val="40000"/>
-                          <a:lumOff val="60000"/>
-                        </a:schemeClr>
-                      </a:solidFill>
-                      <a:prstDash val="sysDot"/>
-                      <a:round/>
-                      <a:headEnd type="none" w="med" len="med"/>
-                      <a:tailEnd type="none" w="med" len="med"/>
-                    </a:lnT>
-                    <a:lnB w="12700" cap="flat" cmpd="sng" algn="ctr">
-                      <a:solidFill>
-                        <a:schemeClr val="tx1">
-                          <a:lumMod val="40000"/>
-                          <a:lumOff val="60000"/>
-                        </a:schemeClr>
-                      </a:solidFill>
-                      <a:prstDash val="sysDot"/>
-                      <a:round/>
-                      <a:headEnd type="none" w="med" len="med"/>
-                      <a:tailEnd type="none" w="med" len="med"/>
-                    </a:lnB>
-                    <a:lnTlToBr w="12700" cmpd="sng">
-                      <a:noFill/>
-                      <a:prstDash val="solid"/>
-                    </a:lnTlToBr>
-                    <a:lnBlToTr w="12700" cmpd="sng">
-                      <a:noFill/>
-                      <a:prstDash val="solid"/>
-                    </a:lnBlToTr>
-                    <a:solidFill>
-                      <a:schemeClr val="bg1"/>
-                    </a:solidFill>
-                  </a:tcPr>
-                </a:tc>
-                <a:tc>
-                  <a:txBody>
-                    <a:bodyPr/>
-                    <a:lstStyle/>
-                    <a:p>
-                      <a:pPr marL="0" marR="0" lvl="0" indent="0" algn="ctr" defTabSz="914400" rtl="0" eaLnBrk="1" fontAlgn="b" latinLnBrk="0" hangingPunct="1">
-                        <a:lnSpc>
-                          <a:spcPct val="100000"/>
-                        </a:lnSpc>
-                        <a:spcBef>
-                          <a:spcPts val="0"/>
-                        </a:spcBef>
-                        <a:spcAft>
-                          <a:spcPts val="0"/>
-                        </a:spcAft>
-                        <a:buClrTx/>
-                        <a:buSzTx/>
-                        <a:buFontTx/>
-                        <a:buNone/>
-                        <a:tabLst/>
-                        <a:defRPr/>
-                      </a:pPr>
-                      <a:r>
-                        <a:rPr lang="en-US" sz="1400" b="0" i="0" u="none" strike="noStrike" dirty="0">
-                          <a:solidFill>
-                            <a:schemeClr val="tx2"/>
-                          </a:solidFill>
-                          <a:effectLst/>
-                          <a:latin typeface="Calibri Regular"/>
-                        </a:rPr>
-                        <a:t>72.9 PY</a:t>
-                      </a:r>
-                    </a:p>
-                  </a:txBody>
-                  <a:tcPr marL="108000" marR="108000" marT="90000" marB="90000">
-                    <a:lnL>
-                      <a:noFill/>
-                    </a:lnL>
-                    <a:lnR w="9525" cap="flat" cmpd="sng" algn="ctr">
-                      <a:noFill/>
-                      <a:prstDash val="solid"/>
                     </a:lnR>
                     <a:lnT w="12700" cap="flat" cmpd="sng" algn="ctr">
                       <a:solidFill>
@@ -39694,14 +37640,93 @@
                         <a:defRPr/>
                       </a:pPr>
                       <a:r>
-                        <a:rPr lang="en-US" sz="1400" b="1" i="0" u="none" strike="noStrike" dirty="0">
+                        <a:rPr lang="en-US" sz="1400" b="0" i="0" u="none" strike="noStrike" dirty="0">
                           <a:solidFill>
-                            <a:schemeClr val="accent3"/>
+                            <a:schemeClr val="tx2"/>
                           </a:solidFill>
                           <a:effectLst/>
                           <a:latin typeface="Calibri Regular"/>
                         </a:rPr>
-                        <a:t>RENOVATE</a:t>
+                        <a:t>11.0 PY</a:t>
+                      </a:r>
+                    </a:p>
+                  </a:txBody>
+                  <a:tcPr marL="108000" marR="108000" marT="90000" marB="90000">
+                    <a:lnL>
+                      <a:noFill/>
+                    </a:lnL>
+                    <a:lnR w="9525" cap="flat" cmpd="sng" algn="ctr">
+                      <a:noFill/>
+                      <a:prstDash val="solid"/>
+                    </a:lnR>
+                    <a:lnT w="12700" cap="flat" cmpd="sng" algn="ctr">
+                      <a:solidFill>
+                        <a:schemeClr val="tx1">
+                          <a:lumMod val="40000"/>
+                          <a:lumOff val="60000"/>
+                        </a:schemeClr>
+                      </a:solidFill>
+                      <a:prstDash val="sysDot"/>
+                      <a:round/>
+                      <a:headEnd type="none" w="med" len="med"/>
+                      <a:tailEnd type="none" w="med" len="med"/>
+                    </a:lnT>
+                    <a:lnB w="12700" cap="flat" cmpd="sng" algn="ctr">
+                      <a:solidFill>
+                        <a:schemeClr val="tx1">
+                          <a:lumMod val="40000"/>
+                          <a:lumOff val="60000"/>
+                        </a:schemeClr>
+                      </a:solidFill>
+                      <a:prstDash val="sysDot"/>
+                      <a:round/>
+                      <a:headEnd type="none" w="med" len="med"/>
+                      <a:tailEnd type="none" w="med" len="med"/>
+                    </a:lnB>
+                    <a:lnTlToBr w="12700" cmpd="sng">
+                      <a:noFill/>
+                      <a:prstDash val="solid"/>
+                    </a:lnTlToBr>
+                    <a:lnBlToTr w="12700" cmpd="sng">
+                      <a:noFill/>
+                      <a:prstDash val="solid"/>
+                    </a:lnBlToTr>
+                    <a:solidFill>
+                      <a:schemeClr val="bg1"/>
+                    </a:solidFill>
+                  </a:tcPr>
+                </a:tc>
+                <a:tc>
+                  <a:txBody>
+                    <a:bodyPr/>
+                    <a:lstStyle/>
+                    <a:p>
+                      <a:pPr marL="0" marR="0" lvl="0" indent="0" algn="ctr" defTabSz="914400" rtl="0" eaLnBrk="1" fontAlgn="b" latinLnBrk="0" hangingPunct="1">
+                        <a:lnSpc>
+                          <a:spcPct val="100000"/>
+                        </a:lnSpc>
+                        <a:spcBef>
+                          <a:spcPts val="0"/>
+                        </a:spcBef>
+                        <a:spcAft>
+                          <a:spcPts val="0"/>
+                        </a:spcAft>
+                        <a:buClrTx/>
+                        <a:buSzTx/>
+                        <a:buFontTx/>
+                        <a:buNone/>
+                        <a:tabLst/>
+                        <a:defRPr/>
+                      </a:pPr>
+                      <a:r>
+                        <a:rPr lang="en-US" sz="1400" b="0" i="0" u="none" strike="noStrike" dirty="0">
+                          <a:solidFill>
+                            <a:schemeClr val="tx2"/>
+                          </a:solidFill>
+                          <a:effectLst/>
+                          <a:latin typeface="Calibri Regular"/>
+                        </a:rPr>
+                        <a:t>4.5 PY</a:t>
                       </a:r>
                     </a:p>
                   </a:txBody>
@@ -39780,7 +37805,7 @@
                           <a:effectLst/>
                           <a:latin typeface="Calibri Regular"/>
                         </a:rPr>
-                        <a:t>+ 82%</a:t>
+                        <a:t>RENOVATE</a:t>
                       </a:r>
                     </a:p>
                   </a:txBody>
@@ -39859,7 +37884,86 @@
                           <a:effectLst/>
                           <a:latin typeface="Calibri Regular"/>
                         </a:rPr>
-                        <a:t>30.6 PY</a:t>
+                        <a:t>+ 58%</a:t>
+                      </a:r>
+                    </a:p>
+                  </a:txBody>
+                  <a:tcPr marL="108000" marR="108000" marT="90000" marB="90000">
+                    <a:lnL>
+                      <a:noFill/>
+                    </a:lnL>
+                    <a:lnR w="9525" cap="flat" cmpd="sng" algn="ctr">
+                      <a:noFill/>
+                      <a:prstDash val="solid"/>
+                    </a:lnR>
+                    <a:lnT w="12700" cap="flat" cmpd="sng" algn="ctr">
+                      <a:solidFill>
+                        <a:schemeClr val="tx1">
+                          <a:lumMod val="40000"/>
+                          <a:lumOff val="60000"/>
+                        </a:schemeClr>
+                      </a:solidFill>
+                      <a:prstDash val="sysDot"/>
+                      <a:round/>
+                      <a:headEnd type="none" w="med" len="med"/>
+                      <a:tailEnd type="none" w="med" len="med"/>
+                    </a:lnT>
+                    <a:lnB w="12700" cap="flat" cmpd="sng" algn="ctr">
+                      <a:solidFill>
+                        <a:schemeClr val="tx1">
+                          <a:lumMod val="40000"/>
+                          <a:lumOff val="60000"/>
+                        </a:schemeClr>
+                      </a:solidFill>
+                      <a:prstDash val="sysDot"/>
+                      <a:round/>
+                      <a:headEnd type="none" w="med" len="med"/>
+                      <a:tailEnd type="none" w="med" len="med"/>
+                    </a:lnB>
+                    <a:lnTlToBr w="12700" cmpd="sng">
+                      <a:noFill/>
+                      <a:prstDash val="solid"/>
+                    </a:lnTlToBr>
+                    <a:lnBlToTr w="12700" cmpd="sng">
+                      <a:noFill/>
+                      <a:prstDash val="solid"/>
+                    </a:lnBlToTr>
+                    <a:solidFill>
+                      <a:schemeClr val="bg1"/>
+                    </a:solidFill>
+                  </a:tcPr>
+                </a:tc>
+                <a:tc>
+                  <a:txBody>
+                    <a:bodyPr/>
+                    <a:lstStyle/>
+                    <a:p>
+                      <a:pPr marL="0" marR="0" lvl="0" indent="0" algn="ctr" defTabSz="914400" rtl="0" eaLnBrk="1" fontAlgn="b" latinLnBrk="0" hangingPunct="1">
+                        <a:lnSpc>
+                          <a:spcPct val="100000"/>
+                        </a:lnSpc>
+                        <a:spcBef>
+                          <a:spcPts val="0"/>
+                        </a:spcBef>
+                        <a:spcAft>
+                          <a:spcPts val="0"/>
+                        </a:spcAft>
+                        <a:buClrTx/>
+                        <a:buSzTx/>
+                        <a:buFontTx/>
+                        <a:buNone/>
+                        <a:tabLst/>
+                        <a:defRPr/>
+                      </a:pPr>
+                      <a:r>
+                        <a:rPr lang="en-US" sz="1400" b="1" i="0" u="none" strike="noStrike" dirty="0">
+                          <a:solidFill>
+                            <a:schemeClr val="accent3"/>
+                          </a:solidFill>
+                          <a:effectLst/>
+                          <a:latin typeface="Calibri Regular"/>
+                        </a:rPr>
+                        <a:t>2.7 PY</a:t>
                       </a:r>
                     </a:p>
                   </a:txBody>
@@ -40024,7 +38128,7 @@
                           <a:effectLst/>
                           <a:latin typeface="Calibri Bold"/>
                         </a:rPr>
-                        <a:t>PostgreSQL</a:t>
+                        <a:t>integrationtest-electron</a:t>
                       </a:r>
                     </a:p>
                   </a:txBody>
@@ -40103,7 +38207,7 @@
                           <a:effectLst/>
                           <a:latin typeface="Calibri Regular"/>
                         </a:rPr>
-                        <a:t>Medium</a:t>
+                        <a:t>Unknown</a:t>
                       </a:r>
                     </a:p>
                   </a:txBody>
@@ -40182,7 +38286,7 @@
                           <a:effectLst/>
                           <a:latin typeface="Calibri Regular"/>
                         </a:rPr>
-                        <a:t>101.0 PY</a:t>
+                        <a:t>13.0 PY</a:t>
                       </a:r>
                     </a:p>
                   </a:txBody>
@@ -40261,7 +38365,7 @@
                           <a:effectLst/>
                           <a:latin typeface="Calibri Regular"/>
                         </a:rPr>
-                        <a:t>20.2 PY</a:t>
+                        <a:t>3.0 PY</a:t>
                       </a:r>
                     </a:p>
                   </a:txBody>
@@ -40419,7 +38523,7 @@
                           <a:effectLst/>
                           <a:latin typeface="Calibri Regular"/>
                         </a:rPr>
-                        <a:t>+ 104%</a:t>
+                        <a:t>+ 30%</a:t>
                       </a:r>
                     </a:p>
                   </a:txBody>
@@ -40498,7 +38602,7 @@
                           <a:effectLst/>
                           <a:latin typeface="Calibri Regular"/>
                         </a:rPr>
-                        <a:t>90.6 PY</a:t>
+                        <a:t>3.2 PY</a:t>
                       </a:r>
                     </a:p>
                   </a:txBody>
@@ -40663,7 +38767,7 @@
                           <a:effectLst/>
                           <a:latin typeface="Calibri Bold"/>
                         </a:rPr>
-                        <a:t>Airflow</a:t>
+                        <a:t>integrationtest-bazel</a:t>
                       </a:r>
                     </a:p>
                   </a:txBody>
@@ -40674,164 +38778,6 @@
                     </a:lnL>
                     <a:lnR>
                       <a:noFill/>
-                    </a:lnR>
-                    <a:lnT w="12700" cap="flat" cmpd="sng" algn="ctr">
-                      <a:solidFill>
-                        <a:schemeClr val="tx1">
-                          <a:lumMod val="40000"/>
-                          <a:lumOff val="60000"/>
-                        </a:schemeClr>
-                      </a:solidFill>
-                      <a:prstDash val="sysDot"/>
-                      <a:round/>
-                      <a:headEnd type="none" w="med" len="med"/>
-                      <a:tailEnd type="none" w="med" len="med"/>
-                    </a:lnT>
-                    <a:lnB w="12700" cap="flat" cmpd="sng" algn="ctr">
-                      <a:solidFill>
-                        <a:schemeClr val="tx1">
-                          <a:lumMod val="40000"/>
-                          <a:lumOff val="60000"/>
-                        </a:schemeClr>
-                      </a:solidFill>
-                      <a:prstDash val="sysDot"/>
-                      <a:round/>
-                      <a:headEnd type="none" w="med" len="med"/>
-                      <a:tailEnd type="none" w="med" len="med"/>
-                    </a:lnB>
-                    <a:lnTlToBr w="12700" cmpd="sng">
-                      <a:noFill/>
-                      <a:prstDash val="solid"/>
-                    </a:lnTlToBr>
-                    <a:lnBlToTr w="12700" cmpd="sng">
-                      <a:noFill/>
-                      <a:prstDash val="solid"/>
-                    </a:lnBlToTr>
-                    <a:solidFill>
-                      <a:schemeClr val="bg1"/>
-                    </a:solidFill>
-                  </a:tcPr>
-                </a:tc>
-                <a:tc>
-                  <a:txBody>
-                    <a:bodyPr/>
-                    <a:lstStyle/>
-                    <a:p>
-                      <a:pPr marL="0" marR="0" lvl="0" indent="0" algn="ctr" defTabSz="914400" rtl="0" eaLnBrk="1" fontAlgn="b" latinLnBrk="0" hangingPunct="1">
-                        <a:lnSpc>
-                          <a:spcPct val="100000"/>
-                        </a:lnSpc>
-                        <a:spcBef>
-                          <a:spcPts val="0"/>
-                        </a:spcBef>
-                        <a:spcAft>
-                          <a:spcPts val="0"/>
-                        </a:spcAft>
-                        <a:buClrTx/>
-                        <a:buSzTx/>
-                        <a:buFontTx/>
-                        <a:buNone/>
-                        <a:tabLst/>
-                        <a:defRPr/>
-                      </a:pPr>
-                      <a:r>
-                        <a:rPr lang="en-US" sz="1400" b="0" i="0" u="none" strike="noStrike" dirty="0">
-                          <a:solidFill>
-                            <a:schemeClr val="tx2"/>
-                          </a:solidFill>
-                          <a:effectLst/>
-                          <a:latin typeface="Calibri Regular"/>
-                        </a:rPr>
-                        <a:t>Critical</a:t>
-                      </a:r>
-                    </a:p>
-                  </a:txBody>
-                  <a:tcPr marL="108000" marR="108000" marT="90000" marB="90000">
-                    <a:lnL>
-                      <a:noFill/>
-                    </a:lnL>
-                    <a:lnR w="9525" cap="flat" cmpd="sng" algn="ctr">
-                      <a:noFill/>
-                      <a:prstDash val="solid"/>
-                    </a:lnR>
-                    <a:lnT w="12700" cap="flat" cmpd="sng" algn="ctr">
-                      <a:solidFill>
-                        <a:schemeClr val="tx1">
-                          <a:lumMod val="40000"/>
-                          <a:lumOff val="60000"/>
-                        </a:schemeClr>
-                      </a:solidFill>
-                      <a:prstDash val="sysDot"/>
-                      <a:round/>
-                      <a:headEnd type="none" w="med" len="med"/>
-                      <a:tailEnd type="none" w="med" len="med"/>
-                    </a:lnT>
-                    <a:lnB w="12700" cap="flat" cmpd="sng" algn="ctr">
-                      <a:solidFill>
-                        <a:schemeClr val="tx1">
-                          <a:lumMod val="40000"/>
-                          <a:lumOff val="60000"/>
-                        </a:schemeClr>
-                      </a:solidFill>
-                      <a:prstDash val="sysDot"/>
-                      <a:round/>
-                      <a:headEnd type="none" w="med" len="med"/>
-                      <a:tailEnd type="none" w="med" len="med"/>
-                    </a:lnB>
-                    <a:lnTlToBr w="12700" cmpd="sng">
-                      <a:noFill/>
-                      <a:prstDash val="solid"/>
-                    </a:lnTlToBr>
-                    <a:lnBlToTr w="12700" cmpd="sng">
-                      <a:noFill/>
-                      <a:prstDash val="solid"/>
-                    </a:lnBlToTr>
-                    <a:solidFill>
-                      <a:schemeClr val="bg1"/>
-                    </a:solidFill>
-                  </a:tcPr>
-                </a:tc>
-                <a:tc>
-                  <a:txBody>
-                    <a:bodyPr/>
-                    <a:lstStyle/>
-                    <a:p>
-                      <a:pPr marL="0" marR="0" lvl="0" indent="0" algn="ctr" defTabSz="914400" rtl="0" eaLnBrk="1" fontAlgn="b" latinLnBrk="0" hangingPunct="1">
-                        <a:lnSpc>
-                          <a:spcPct val="100000"/>
-                        </a:lnSpc>
-                        <a:spcBef>
-                          <a:spcPts val="0"/>
-                        </a:spcBef>
-                        <a:spcAft>
-                          <a:spcPts val="0"/>
-                        </a:spcAft>
-                        <a:buClrTx/>
-                        <a:buSzTx/>
-                        <a:buFontTx/>
-                        <a:buNone/>
-                        <a:tabLst/>
-                        <a:defRPr/>
-                      </a:pPr>
-                      <a:r>
-                        <a:rPr lang="en-US" sz="1400" b="0" i="0" u="none" strike="noStrike" dirty="0">
-                          <a:solidFill>
-                            <a:schemeClr val="tx2"/>
-                          </a:solidFill>
-                          <a:effectLst/>
-                          <a:latin typeface="Calibri Regular"/>
-                        </a:rPr>
-                        <a:t>55.5 PY</a:t>
-                      </a:r>
-                    </a:p>
-                  </a:txBody>
-                  <a:tcPr marL="108000" marR="108000" marT="90000" marB="90000">
-                    <a:lnL>
-                      <a:noFill/>
-                    </a:lnL>
-                    <a:lnR w="9525" cap="flat" cmpd="sng" algn="ctr">
-                      <a:noFill/>
-                      <a:prstDash val="solid"/>
                     </a:lnR>
                     <a:lnT w="12700" cap="flat" cmpd="sng" algn="ctr">
                       <a:solidFill>
@@ -40972,14 +38918,93 @@
                         <a:defRPr/>
                       </a:pPr>
                       <a:r>
-                        <a:rPr lang="en-US" sz="1400" b="1" i="0" u="none" strike="noStrike" dirty="0">
+                        <a:rPr lang="en-US" sz="1400" b="0" i="0" u="none" strike="noStrike" dirty="0">
                           <a:solidFill>
-                            <a:schemeClr val="accent3"/>
+                            <a:schemeClr val="tx2"/>
                           </a:solidFill>
                           <a:effectLst/>
                           <a:latin typeface="Calibri Regular"/>
                         </a:rPr>
-                        <a:t>RENOVATE</a:t>
+                        <a:t>6.7 PY</a:t>
+                      </a:r>
+                    </a:p>
+                  </a:txBody>
+                  <a:tcPr marL="108000" marR="108000" marT="90000" marB="90000">
+                    <a:lnL>
+                      <a:noFill/>
+                    </a:lnL>
+                    <a:lnR w="9525" cap="flat" cmpd="sng" algn="ctr">
+                      <a:noFill/>
+                      <a:prstDash val="solid"/>
+                    </a:lnR>
+                    <a:lnT w="12700" cap="flat" cmpd="sng" algn="ctr">
+                      <a:solidFill>
+                        <a:schemeClr val="tx1">
+                          <a:lumMod val="40000"/>
+                          <a:lumOff val="60000"/>
+                        </a:schemeClr>
+                      </a:solidFill>
+                      <a:prstDash val="sysDot"/>
+                      <a:round/>
+                      <a:headEnd type="none" w="med" len="med"/>
+                      <a:tailEnd type="none" w="med" len="med"/>
+                    </a:lnT>
+                    <a:lnB w="12700" cap="flat" cmpd="sng" algn="ctr">
+                      <a:solidFill>
+                        <a:schemeClr val="tx1">
+                          <a:lumMod val="40000"/>
+                          <a:lumOff val="60000"/>
+                        </a:schemeClr>
+                      </a:solidFill>
+                      <a:prstDash val="sysDot"/>
+                      <a:round/>
+                      <a:headEnd type="none" w="med" len="med"/>
+                      <a:tailEnd type="none" w="med" len="med"/>
+                    </a:lnB>
+                    <a:lnTlToBr w="12700" cmpd="sng">
+                      <a:noFill/>
+                      <a:prstDash val="solid"/>
+                    </a:lnTlToBr>
+                    <a:lnBlToTr w="12700" cmpd="sng">
+                      <a:noFill/>
+                      <a:prstDash val="solid"/>
+                    </a:lnBlToTr>
+                    <a:solidFill>
+                      <a:schemeClr val="bg1"/>
+                    </a:solidFill>
+                  </a:tcPr>
+                </a:tc>
+                <a:tc>
+                  <a:txBody>
+                    <a:bodyPr/>
+                    <a:lstStyle/>
+                    <a:p>
+                      <a:pPr marL="0" marR="0" lvl="0" indent="0" algn="ctr" defTabSz="914400" rtl="0" eaLnBrk="1" fontAlgn="b" latinLnBrk="0" hangingPunct="1">
+                        <a:lnSpc>
+                          <a:spcPct val="100000"/>
+                        </a:lnSpc>
+                        <a:spcBef>
+                          <a:spcPts val="0"/>
+                        </a:spcBef>
+                        <a:spcAft>
+                          <a:spcPts val="0"/>
+                        </a:spcAft>
+                        <a:buClrTx/>
+                        <a:buSzTx/>
+                        <a:buFontTx/>
+                        <a:buNone/>
+                        <a:tabLst/>
+                        <a:defRPr/>
+                      </a:pPr>
+                      <a:r>
+                        <a:rPr lang="en-US" sz="1400" b="0" i="0" u="none" strike="noStrike" dirty="0">
+                          <a:solidFill>
+                            <a:schemeClr val="tx2"/>
+                          </a:solidFill>
+                          <a:effectLst/>
+                          <a:latin typeface="Calibri Regular"/>
+                        </a:rPr>
+                        <a:t>1.9 PY</a:t>
                       </a:r>
                     </a:p>
                   </a:txBody>
@@ -41058,7 +39083,7 @@
                           <a:effectLst/>
                           <a:latin typeface="Calibri Regular"/>
                         </a:rPr>
-                        <a:t>+ 82%</a:t>
+                        <a:t>RENOVATE</a:t>
                       </a:r>
                     </a:p>
                   </a:txBody>
@@ -41137,7 +39162,86 @@
                           <a:effectLst/>
                           <a:latin typeface="Calibri Regular"/>
                         </a:rPr>
-                        <a:t>34.3 PY</a:t>
+                        <a:t>+ 39%</a:t>
+                      </a:r>
+                    </a:p>
+                  </a:txBody>
+                  <a:tcPr marL="108000" marR="108000" marT="90000" marB="90000">
+                    <a:lnL>
+                      <a:noFill/>
+                    </a:lnL>
+                    <a:lnR w="9525" cap="flat" cmpd="sng" algn="ctr">
+                      <a:noFill/>
+                      <a:prstDash val="solid"/>
+                    </a:lnR>
+                    <a:lnT w="12700" cap="flat" cmpd="sng" algn="ctr">
+                      <a:solidFill>
+                        <a:schemeClr val="tx1">
+                          <a:lumMod val="40000"/>
+                          <a:lumOff val="60000"/>
+                        </a:schemeClr>
+                      </a:solidFill>
+                      <a:prstDash val="sysDot"/>
+                      <a:round/>
+                      <a:headEnd type="none" w="med" len="med"/>
+                      <a:tailEnd type="none" w="med" len="med"/>
+                    </a:lnT>
+                    <a:lnB w="12700" cap="flat" cmpd="sng" algn="ctr">
+                      <a:solidFill>
+                        <a:schemeClr val="tx1">
+                          <a:lumMod val="40000"/>
+                          <a:lumOff val="60000"/>
+                        </a:schemeClr>
+                      </a:solidFill>
+                      <a:prstDash val="sysDot"/>
+                      <a:round/>
+                      <a:headEnd type="none" w="med" len="med"/>
+                      <a:tailEnd type="none" w="med" len="med"/>
+                    </a:lnB>
+                    <a:lnTlToBr w="12700" cmpd="sng">
+                      <a:noFill/>
+                      <a:prstDash val="solid"/>
+                    </a:lnTlToBr>
+                    <a:lnBlToTr w="12700" cmpd="sng">
+                      <a:noFill/>
+                      <a:prstDash val="solid"/>
+                    </a:lnBlToTr>
+                    <a:solidFill>
+                      <a:schemeClr val="bg1"/>
+                    </a:solidFill>
+                  </a:tcPr>
+                </a:tc>
+                <a:tc>
+                  <a:txBody>
+                    <a:bodyPr/>
+                    <a:lstStyle/>
+                    <a:p>
+                      <a:pPr marL="0" marR="0" lvl="0" indent="0" algn="ctr" defTabSz="914400" rtl="0" eaLnBrk="1" fontAlgn="b" latinLnBrk="0" hangingPunct="1">
+                        <a:lnSpc>
+                          <a:spcPct val="100000"/>
+                        </a:lnSpc>
+                        <a:spcBef>
+                          <a:spcPts val="0"/>
+                        </a:spcBef>
+                        <a:spcAft>
+                          <a:spcPts val="0"/>
+                        </a:spcAft>
+                        <a:buClrTx/>
+                        <a:buSzTx/>
+                        <a:buFontTx/>
+                        <a:buNone/>
+                        <a:tabLst/>
+                        <a:defRPr/>
+                      </a:pPr>
+                      <a:r>
+                        <a:rPr lang="en-US" sz="1400" b="1" i="0" u="none" strike="noStrike" dirty="0">
+                          <a:solidFill>
+                            <a:schemeClr val="accent3"/>
+                          </a:solidFill>
+                          <a:effectLst/>
+                          <a:latin typeface="Calibri Regular"/>
+                        </a:rPr>
+                        <a:t>1.5 PY</a:t>
                       </a:r>
                     </a:p>
                   </a:txBody>
@@ -41297,7 +39401,7 @@
                           <a:effectLst/>
                           <a:latin typeface="Calibri Bold"/>
                         </a:rPr>
-                        <a:t>Artemis</a:t>
+                        <a:t>integrationtest-facebookyoga</a:t>
                       </a:r>
                     </a:p>
                   </a:txBody>
@@ -41308,154 +39412,6 @@
                     </a:lnL>
                     <a:lnR>
                       <a:noFill/>
-                    </a:lnR>
-                    <a:lnT w="12700" cap="flat" cmpd="sng" algn="ctr">
-                      <a:solidFill>
-                        <a:schemeClr val="tx1">
-                          <a:lumMod val="40000"/>
-                          <a:lumOff val="60000"/>
-                        </a:schemeClr>
-                      </a:solidFill>
-                      <a:prstDash val="sysDot"/>
-                      <a:round/>
-                      <a:headEnd type="none" w="med" len="med"/>
-                      <a:tailEnd type="none" w="med" len="med"/>
-                    </a:lnT>
-                    <a:lnB w="12700" cap="flat" cmpd="sng" algn="ctr">
-                      <a:noFill/>
-                      <a:prstDash val="sysDot"/>
-                      <a:round/>
-                      <a:headEnd type="none" w="med" len="med"/>
-                      <a:tailEnd type="none" w="med" len="med"/>
-                    </a:lnB>
-                    <a:lnTlToBr w="12700" cmpd="sng">
-                      <a:noFill/>
-                      <a:prstDash val="solid"/>
-                    </a:lnTlToBr>
-                    <a:lnBlToTr w="12700" cmpd="sng">
-                      <a:noFill/>
-                      <a:prstDash val="solid"/>
-                    </a:lnBlToTr>
-                    <a:solidFill>
-                      <a:schemeClr val="bg1"/>
-                    </a:solidFill>
-                  </a:tcPr>
-                </a:tc>
-                <a:tc>
-                  <a:txBody>
-                    <a:bodyPr/>
-                    <a:lstStyle/>
-                    <a:p>
-                      <a:pPr marL="0" marR="0" lvl="0" indent="0" algn="ctr" defTabSz="914400" rtl="0" eaLnBrk="1" fontAlgn="b" latinLnBrk="0" hangingPunct="1">
-                        <a:lnSpc>
-                          <a:spcPct val="100000"/>
-                        </a:lnSpc>
-                        <a:spcBef>
-                          <a:spcPts val="0"/>
-                        </a:spcBef>
-                        <a:spcAft>
-                          <a:spcPts val="0"/>
-                        </a:spcAft>
-                        <a:buClrTx/>
-                        <a:buSzTx/>
-                        <a:buFontTx/>
-                        <a:buNone/>
-                        <a:tabLst/>
-                        <a:defRPr/>
-                      </a:pPr>
-                      <a:r>
-                        <a:rPr lang="en-US" sz="1400" b="0" i="0" u="none" strike="noStrike" dirty="0">
-                          <a:solidFill>
-                            <a:schemeClr val="tx2"/>
-                          </a:solidFill>
-                          <a:effectLst/>
-                          <a:latin typeface="Calibri Regular"/>
-                        </a:rPr>
-                        <a:t>High</a:t>
-                      </a:r>
-                    </a:p>
-                  </a:txBody>
-                  <a:tcPr marL="108000" marR="108000" marT="90000" marB="90000">
-                    <a:lnL>
-                      <a:noFill/>
-                    </a:lnL>
-                    <a:lnR w="9525" cap="flat" cmpd="sng" algn="ctr">
-                      <a:noFill/>
-                      <a:prstDash val="solid"/>
-                    </a:lnR>
-                    <a:lnT w="12700" cap="flat" cmpd="sng" algn="ctr">
-                      <a:solidFill>
-                        <a:schemeClr val="tx1">
-                          <a:lumMod val="40000"/>
-                          <a:lumOff val="60000"/>
-                        </a:schemeClr>
-                      </a:solidFill>
-                      <a:prstDash val="sysDot"/>
-                      <a:round/>
-                      <a:headEnd type="none" w="med" len="med"/>
-                      <a:tailEnd type="none" w="med" len="med"/>
-                    </a:lnT>
-                    <a:lnB w="12700" cap="flat" cmpd="sng" algn="ctr">
-                      <a:noFill/>
-                      <a:prstDash val="sysDot"/>
-                      <a:round/>
-                      <a:headEnd type="none" w="med" len="med"/>
-                      <a:tailEnd type="none" w="med" len="med"/>
-                    </a:lnB>
-                    <a:lnTlToBr w="12700" cmpd="sng">
-                      <a:noFill/>
-                      <a:prstDash val="solid"/>
-                    </a:lnTlToBr>
-                    <a:lnBlToTr w="12700" cmpd="sng">
-                      <a:noFill/>
-                      <a:prstDash val="solid"/>
-                    </a:lnBlToTr>
-                    <a:solidFill>
-                      <a:schemeClr val="bg1"/>
-                    </a:solidFill>
-                  </a:tcPr>
-                </a:tc>
-                <a:tc>
-                  <a:txBody>
-                    <a:bodyPr/>
-                    <a:lstStyle/>
-                    <a:p>
-                      <a:pPr marL="0" marR="0" lvl="0" indent="0" algn="ctr" defTabSz="914400" rtl="0" eaLnBrk="1" fontAlgn="b" latinLnBrk="0" hangingPunct="1">
-                        <a:lnSpc>
-                          <a:spcPct val="100000"/>
-                        </a:lnSpc>
-                        <a:spcBef>
-                          <a:spcPts val="0"/>
-                        </a:spcBef>
-                        <a:spcAft>
-                          <a:spcPts val="0"/>
-                        </a:spcAft>
-                        <a:buClrTx/>
-                        <a:buSzTx/>
-                        <a:buFontTx/>
-                        <a:buNone/>
-                        <a:tabLst/>
-                        <a:defRPr/>
-                      </a:pPr>
-                      <a:r>
-                        <a:rPr lang="en-US" sz="1400" b="0" i="0" u="none" strike="noStrike" dirty="0">
-                          <a:solidFill>
-                            <a:schemeClr val="tx2"/>
-                          </a:solidFill>
-                          <a:effectLst/>
-                          <a:latin typeface="Calibri Regular"/>
-                        </a:rPr>
-                        <a:t>76.6 PY</a:t>
-                      </a:r>
-                    </a:p>
-                  </a:txBody>
-                  <a:tcPr marL="108000" marR="108000" marT="90000" marB="90000">
-                    <a:lnL>
-                      <a:noFill/>
-                    </a:lnL>
-                    <a:lnR w="9525" cap="flat" cmpd="sng" algn="ctr">
-                      <a:noFill/>
-                      <a:prstDash val="solid"/>
                     </a:lnR>
                     <a:lnT w="12700" cap="flat" cmpd="sng" algn="ctr">
                       <a:solidFill>
@@ -41586,14 +39542,88 @@
                         <a:defRPr/>
                       </a:pPr>
                       <a:r>
-                        <a:rPr lang="en-US" sz="1400" b="1" i="0" u="none" strike="noStrike" dirty="0">
+                        <a:rPr lang="en-US" sz="1400" b="0" i="0" u="none" strike="noStrike" dirty="0">
                           <a:solidFill>
-                            <a:schemeClr val="accent3"/>
+                            <a:schemeClr val="tx2"/>
                           </a:solidFill>
                           <a:effectLst/>
                           <a:latin typeface="Calibri Regular"/>
                         </a:rPr>
-                        <a:t>RENOVATE</a:t>
+                        <a:t>3.6 PY</a:t>
+                      </a:r>
+                    </a:p>
+                  </a:txBody>
+                  <a:tcPr marL="108000" marR="108000" marT="90000" marB="90000">
+                    <a:lnL>
+                      <a:noFill/>
+                    </a:lnL>
+                    <a:lnR w="9525" cap="flat" cmpd="sng" algn="ctr">
+                      <a:noFill/>
+                      <a:prstDash val="solid"/>
+                    </a:lnR>
+                    <a:lnT w="12700" cap="flat" cmpd="sng" algn="ctr">
+                      <a:solidFill>
+                        <a:schemeClr val="tx1">
+                          <a:lumMod val="40000"/>
+                          <a:lumOff val="60000"/>
+                        </a:schemeClr>
+                      </a:solidFill>
+                      <a:prstDash val="sysDot"/>
+                      <a:round/>
+                      <a:headEnd type="none" w="med" len="med"/>
+                      <a:tailEnd type="none" w="med" len="med"/>
+                    </a:lnT>
+                    <a:lnB w="12700" cap="flat" cmpd="sng" algn="ctr">
+                      <a:noFill/>
+                      <a:prstDash val="sysDot"/>
+                      <a:round/>
+                      <a:headEnd type="none" w="med" len="med"/>
+                      <a:tailEnd type="none" w="med" len="med"/>
+                    </a:lnB>
+                    <a:lnTlToBr w="12700" cmpd="sng">
+                      <a:noFill/>
+                      <a:prstDash val="solid"/>
+                    </a:lnTlToBr>
+                    <a:lnBlToTr w="12700" cmpd="sng">
+                      <a:noFill/>
+                      <a:prstDash val="solid"/>
+                    </a:lnBlToTr>
+                    <a:solidFill>
+                      <a:schemeClr val="bg1"/>
+                    </a:solidFill>
+                  </a:tcPr>
+                </a:tc>
+                <a:tc>
+                  <a:txBody>
+                    <a:bodyPr/>
+                    <a:lstStyle/>
+                    <a:p>
+                      <a:pPr marL="0" marR="0" lvl="0" indent="0" algn="ctr" defTabSz="914400" rtl="0" eaLnBrk="1" fontAlgn="b" latinLnBrk="0" hangingPunct="1">
+                        <a:lnSpc>
+                          <a:spcPct val="100000"/>
+                        </a:lnSpc>
+                        <a:spcBef>
+                          <a:spcPts val="0"/>
+                        </a:spcBef>
+                        <a:spcAft>
+                          <a:spcPts val="0"/>
+                        </a:spcAft>
+                        <a:buClrTx/>
+                        <a:buSzTx/>
+                        <a:buFontTx/>
+                        <a:buNone/>
+                        <a:tabLst/>
+                        <a:defRPr/>
+                      </a:pPr>
+                      <a:r>
+                        <a:rPr lang="en-US" sz="1400" b="0" i="0" u="none" strike="noStrike" dirty="0">
+                          <a:solidFill>
+                            <a:schemeClr val="tx2"/>
+                          </a:solidFill>
+                          <a:effectLst/>
+                          <a:latin typeface="Calibri Regular"/>
+                        </a:rPr>
+                        <a:t>Unknown</a:t>
                       </a:r>
                     </a:p>
                   </a:txBody>
@@ -41667,7 +39697,7 @@
                           <a:effectLst/>
                           <a:latin typeface="Calibri Regular"/>
                         </a:rPr>
-                        <a:t>+ 79%</a:t>
+                        <a:t>RENOVATE</a:t>
                       </a:r>
                     </a:p>
                   </a:txBody>
@@ -41741,7 +39771,81 @@
                           <a:effectLst/>
                           <a:latin typeface="Calibri Regular"/>
                         </a:rPr>
-                        <a:t>31.3 PY</a:t>
+                        <a:t>+ 38%</a:t>
+                      </a:r>
+                    </a:p>
+                  </a:txBody>
+                  <a:tcPr marL="108000" marR="108000" marT="90000" marB="90000">
+                    <a:lnL>
+                      <a:noFill/>
+                    </a:lnL>
+                    <a:lnR w="9525" cap="flat" cmpd="sng" algn="ctr">
+                      <a:noFill/>
+                      <a:prstDash val="solid"/>
+                    </a:lnR>
+                    <a:lnT w="12700" cap="flat" cmpd="sng" algn="ctr">
+                      <a:solidFill>
+                        <a:schemeClr val="tx1">
+                          <a:lumMod val="40000"/>
+                          <a:lumOff val="60000"/>
+                        </a:schemeClr>
+                      </a:solidFill>
+                      <a:prstDash val="sysDot"/>
+                      <a:round/>
+                      <a:headEnd type="none" w="med" len="med"/>
+                      <a:tailEnd type="none" w="med" len="med"/>
+                    </a:lnT>
+                    <a:lnB w="12700" cap="flat" cmpd="sng" algn="ctr">
+                      <a:noFill/>
+                      <a:prstDash val="sysDot"/>
+                      <a:round/>
+                      <a:headEnd type="none" w="med" len="med"/>
+                      <a:tailEnd type="none" w="med" len="med"/>
+                    </a:lnB>
+                    <a:lnTlToBr w="12700" cmpd="sng">
+                      <a:noFill/>
+                      <a:prstDash val="solid"/>
+                    </a:lnTlToBr>
+                    <a:lnBlToTr w="12700" cmpd="sng">
+                      <a:noFill/>
+                      <a:prstDash val="solid"/>
+                    </a:lnBlToTr>
+                    <a:solidFill>
+                      <a:schemeClr val="bg1"/>
+                    </a:solidFill>
+                  </a:tcPr>
+                </a:tc>
+                <a:tc>
+                  <a:txBody>
+                    <a:bodyPr/>
+                    <a:lstStyle/>
+                    <a:p>
+                      <a:pPr marL="0" marR="0" lvl="0" indent="0" algn="ctr" defTabSz="914400" rtl="0" eaLnBrk="1" fontAlgn="b" latinLnBrk="0" hangingPunct="1">
+                        <a:lnSpc>
+                          <a:spcPct val="100000"/>
+                        </a:lnSpc>
+                        <a:spcBef>
+                          <a:spcPts val="0"/>
+                        </a:spcBef>
+                        <a:spcAft>
+                          <a:spcPts val="0"/>
+                        </a:spcAft>
+                        <a:buClrTx/>
+                        <a:buSzTx/>
+                        <a:buFontTx/>
+                        <a:buNone/>
+                        <a:tabLst/>
+                        <a:defRPr/>
+                      </a:pPr>
+                      <a:r>
+                        <a:rPr lang="en-US" sz="1400" b="1" i="0" u="none" strike="noStrike" dirty="0">
+                          <a:solidFill>
+                            <a:schemeClr val="accent3"/>
+                          </a:solidFill>
+                          <a:effectLst/>
+                          <a:latin typeface="Calibri Regular"/>
+                        </a:rPr>
+                        <a:t>1.0 PY</a:t>
                       </a:r>
                     </a:p>
                   </a:txBody>
@@ -41834,7 +39938,7 @@
                   <a:schemeClr val="tx2"/>
                 </a:solidFill>
               </a:rPr>
-              <a:t>Modernization analysis was performed on 92 systems.</a:t>
+              <a:t>Modernization analysis was performed on 12 systems.</a:t>
             </a:r>
           </a:p>
         </p:txBody>
@@ -42186,7 +40290,7 @@
                   <a:schemeClr val="tx2"/>
                 </a:solidFill>
               </a:rPr>
-              <a:t>Modernization analysis was performed on 92 systems.</a:t>
+              <a:t>Modernization analysis was performed on 12 systems.</a:t>
             </a:r>
           </a:p>
         </p:txBody>
@@ -42508,7 +40612,7 @@
                   <a:schemeClr val="tx2"/>
                 </a:solidFill>
               </a:rPr>
-              <a:t>Modernization analysis was performed on 92 systems.</a:t>
+              <a:t>Modernization analysis was performed on 12 systems.</a:t>
             </a:r>
           </a:p>
         </p:txBody>
